--- a/2026.9.3集训队个人赛/O/O题解分享.pptx
+++ b/2026.9.3集训队个人赛/O/O题解分享.pptx
@@ -124,7 +124,7 @@
   <p:extLst>
     <p:ext uri="{EFAFB233-063F-42B5-8137-9DF3F51BA10A}">
       <p15:sldGuideLst xmlns:p15="http://schemas.microsoft.com/office/powerpoint/2012/main">
-        <p15:guide id="1" orient="horz" pos="2160" userDrawn="1">
+        <p15:guide id="1" orient="horz" pos="2154" userDrawn="1">
           <p15:clr>
             <a:srgbClr val="A4A3A4"/>
           </p15:clr>
@@ -537,7 +537,7 @@
           </a:p>
           <a:p>
             <a:r>
-              <a:t>4^N 减 3^(N+1) 加 3 乘 2^N 再减 1。听上去像背答案，其实背后是两条很漂亮的异或不等式加一个标准容斥。</a:t>
+              <a:t>4^N 减 3^(N+1) 加 3 乘 2^N 再减 1。听上去像背答案，其实整个推导只用到一个四行的小表和异或的两个基本性质。</a:t>
             </a:r>
           </a:p>
           <a:p>
@@ -612,22 +612,22 @@
           <a:lstStyle/>
           <a:p>
             <a:r>
-              <a:t>代码二十行：快速幂分别算 2^N、3^(N+1)、4^N 三个幂次，然后套公式输出。</a:t>
-            </a:r>
-          </a:p>
-          <a:p>
-            <a:r>
-              <a:t>三个细节：一是三次快速幂，复杂度 O(log N)，10 的 18 次方也没压力；</a:t>
-            </a:r>
-          </a:p>
-          <a:p>
-            <a:r>
-              <a:t>二是减法先加 MOD 再取模，防止 C++ 里负数取模得到负数；</a:t>
-            </a:r>
-          </a:p>
-          <a:p>
-            <a:r>
-              <a:t>三是乘法不会爆：998244353 的平方大约是 9.96 乘 10 的 17 次方，小于 long long 上限 9.2 乘 10 的 18 次方。</a:t>
+              <a:t>总对数 (2^N − 1) 的平方展开是 4^N − 2^(N+1) + 1，减去并集，得到最终答案</a:t>
+            </a:r>
+          </a:p>
+          <a:p>
+            <a:r>
+              <a:t>4^N − 3^(N+1) + 3·2^N − 1。用官方样例核对：N=2 答案是 0；N=5 是 390——</a:t>
+            </a:r>
+          </a:p>
+          <a:p>
+            <a:r>
+              <a:t>比如 (13,24)，13 异或 24 等于 21，13+24 大于 21、13+21 大于 24、21+24 大于 13，确实构成三角形；</a:t>
+            </a:r>
+          </a:p>
+          <a:p>
+            <a:r>
+              <a:t>N=10000 是 851087540。全部吻合。</a:t>
             </a:r>
           </a:p>
         </p:txBody>
@@ -697,27 +697,22 @@
           <a:lstStyle/>
           <a:p>
             <a:r>
-              <a:t>复杂度：时间 O(log N)、空间 O(1)。</a:t>
-            </a:r>
-          </a:p>
-          <a:p>
-            <a:r>
-              <a:t>为什么只能推公式：枚举是 4^N 对，按位 DP 至少 O(N)，对 10 的 18 次方都不行；</a:t>
-            </a:r>
-          </a:p>
-          <a:p>
-            <a:r>
-              <a:t>而答案只与 N 有关，暗示闭式公式存在。</a:t>
-            </a:r>
-          </a:p>
-          <a:p>
-            <a:r>
-              <a:t>最后送一个彩蛋：合法三角形一定三边互异——a 等于 b 会推出 c 等于 0，a 等于 c 会推出 b 等于 0，</a:t>
-            </a:r>
-          </a:p>
-          <a:p>
-            <a:r>
-              <a:t>所以 N 等于 1、2 时答案是 0 并不奇怪。</a:t>
+              <a:t>代码二十行：快速幂分别算 2^N、3^(N+1)、4^N 三个幂次，然后套公式输出。</a:t>
+            </a:r>
+          </a:p>
+          <a:p>
+            <a:r>
+              <a:t>三个细节：一是三次快速幂，时间 O(log N)、空间 O(1)，10 的 18 次方也没压力；</a:t>
+            </a:r>
+          </a:p>
+          <a:p>
+            <a:r>
+              <a:t>二是减法先加 MOD 再取模，防止 C++ 里负数取模得到负数；</a:t>
+            </a:r>
+          </a:p>
+          <a:p>
+            <a:r>
+              <a:t>三是乘法不会爆：998244353 的平方大约是 9.96 乘 10 的 17 次方，小于 long long 上限 9.2 乘 10 的 18 次方。</a:t>
             </a:r>
           </a:p>
         </p:txBody>
@@ -787,32 +782,37 @@
           <a:lstStyle/>
           <a:p>
             <a:r>
-              <a:t>总结一下套路链：先用两条异或不等式把"三角形"翻译成三个位运算条件，</a:t>
-            </a:r>
-          </a:p>
-          <a:p>
-            <a:r>
-              <a:t>再定义三个坏事件做标准容斥，逐项计数得到闭式公式，最后快速幂求值。</a:t>
-            </a:r>
-          </a:p>
-          <a:p>
-            <a:r>
-              <a:t>三个可迁移的点：第一，遇到"异或 + 大小比较"，先想到 a+b = a⊕b + 2(a&amp;b) 这个恒等式；</a:t>
-            </a:r>
-          </a:p>
-          <a:p>
-            <a:r>
-              <a:t>第二，容斥计数时每个集合单独算，"挖 0"的细节会让表面对称的集合大小不同；</a:t>
-            </a:r>
-          </a:p>
-          <a:p>
-            <a:r>
-              <a:t>第三，取模技巧——负数先加 MOD，模数平方小于 2 的 63 次方可以放心乘。</a:t>
-            </a:r>
-          </a:p>
-          <a:p>
-            <a:r>
-              <a:t>谢谢大家，欢迎提问。</a:t>
+              <a:t>总结一下套路链：先用四行小表把"和与异或谁大"归结到 a&amp;b 是否为 0，</a:t>
+            </a:r>
+          </a:p>
+          <a:p>
+            <a:r>
+              <a:t>再用异或自反性把三条三角形不等式统一翻译成三个位条件，最后定义三个坏事件做标准容斥，得到闭式公式、快速幂求值。</a:t>
+            </a:r>
+          </a:p>
+          <a:p>
+            <a:r>
+              <a:t>三个可迁移的点：第一，比较"和"与"异或"，永远先列 00/01/10/11 小表，答案全在表里；</a:t>
+            </a:r>
+          </a:p>
+          <a:p>
+            <a:r>
+              <a:t>第二，x 异或 y 异或 y 等于 x 这个自反性，让三个数两两对等，避免先去比较谁最长；</a:t>
+            </a:r>
+          </a:p>
+          <a:p>
+            <a:r>
+              <a:t>第三，容斥计数时每个集合单独算，"挖 0"的细节会让表面对称的集合大小不同，取模时负数先加 MOD。</a:t>
+            </a:r>
+          </a:p>
+          <a:p>
+            <a:r>
+              <a:t>最后送一个彩蛋：合法三角形一定三边互异——a 等于 b 会推出 c 等于 0，</a:t>
+            </a:r>
+          </a:p>
+          <a:p>
+            <a:r>
+              <a:t>所以 N 等于 1、2 时答案是 0 并不奇怪。谢谢大家，欢迎提问。</a:t>
             </a:r>
           </a:p>
         </p:txBody>
@@ -967,32 +967,32 @@
           <a:lstStyle/>
           <a:p>
             <a:r>
-              <a:t>先建立整个解法的地基：两条异或不等式。记 c = a 异或 b。</a:t>
-            </a:r>
-          </a:p>
-          <a:p>
-            <a:r>
-              <a:t>第一条是上界：c 不超过 a+b。因为 a+b 等于 a 异或 b 再加上 2 倍的 a 按位与 b，所以取等当且仅当 a 按位与 b 等于 0。</a:t>
-            </a:r>
-          </a:p>
-          <a:p>
-            <a:r>
-              <a:t>第二条是下界：c 不小于 |a−b|。不妨设 a 大于等于 b，c 减去 a−b 等于 2(b − a&amp;b)，非负；</a:t>
-            </a:r>
-          </a:p>
-          <a:p>
-            <a:r>
-              <a:t>取等当且仅当 b 等于 a&amp;b，也就是 b 的每个 1 位都在 a 里，记作"b 按位包含于 a"。</a:t>
-            </a:r>
-          </a:p>
-          <a:p>
-            <a:r>
-              <a:t>两条合起来的推论：三角形不等式——两边之和大于第三边、两边之差小于第三边——只会在取等的地方失败，</a:t>
-            </a:r>
-          </a:p>
-          <a:p>
-            <a:r>
-              <a:t>所以退化当且仅当某条边恰好等于另外两条边之和。</a:t>
+              <a:t>先看一个最简单的观察：任意两个数的和，一定大于等于它们的异或。为什么？逐位看四种情况，做一个四行的小表：</a:t>
+            </a:r>
+          </a:p>
+          <a:p>
+            <a:r>
+              <a:t>00 时，和是 0，异或也是 0，相等；01 时，和是 1，异或也是 1，相等；10 时同理，相等；</a:t>
+            </a:r>
+          </a:p>
+          <a:p>
+            <a:r>
+              <a:t>只有 11 这一行不一样——和是 2，进了一位，而异或是 0，和严格大于异或。</a:t>
+            </a:r>
+          </a:p>
+          <a:p>
+            <a:r>
+              <a:t>所以 a+b 大于等于 a 异或 b，取等当且仅当没有任何一个 11 位，也就是 a&amp;b 等于 0；</a:t>
+            </a:r>
+          </a:p>
+          <a:p>
+            <a:r>
+              <a:t>严格大于当且仅当至少有一位是 11，也就是 a&amp;b 不等于 0。</a:t>
+            </a:r>
+          </a:p>
+          <a:p>
+            <a:r>
+              <a:t>等价地，有个恒等式 a+b 等于 a⊕b 加 2 倍的 a&amp;b。这把"和与异或谁大"的问题完全归结到 a&amp;b 上。</a:t>
             </a:r>
           </a:p>
         </p:txBody>
@@ -1062,22 +1062,27 @@
           <a:lstStyle/>
           <a:p>
             <a:r>
-              <a:t>把上一页的三个"取等"翻译成三种退化形式：</a:t>
-            </a:r>
-          </a:p>
-          <a:p>
-            <a:r>
-              <a:t>c = a+b 等价于 a&amp;b = 0；b = a+c 等价于 a 按位包含于 b；a = b+c 等价于 b 按位包含于 a。</a:t>
-            </a:r>
-          </a:p>
-          <a:p>
-            <a:r>
-              <a:t>所以非退化当且仅当三个条件同时不成立：a&amp;b 非零，并且 a、b 按位互不包含。</a:t>
-            </a:r>
-          </a:p>
-          <a:p>
-            <a:r>
-              <a:t>到这里，"三角形"彻底消失了，问题变成三个纯位运算条件的计数。</a:t>
+              <a:t>再看异或的一个基本性质：同一个数异或两次，等于没做，x 异或 y 再异或 y 等于 x。</a:t>
+            </a:r>
+          </a:p>
+          <a:p>
+            <a:r>
+              <a:t>应用到本题：c 等于 a 异或 b，两边同时异或 b，得到 a 等于 b 异或 c；同时异或 a，得到 b 等于 a 异或 c。</a:t>
+            </a:r>
+          </a:p>
+          <a:p>
+            <a:r>
+              <a:t>也就是说，三个数两两之间都能通过异或互相转化，(a,b)、(b,c)、(a,c) 三组地位完全对等。</a:t>
+            </a:r>
+          </a:p>
+          <a:p>
+            <a:r>
+              <a:t>于是我们不需要先弄清楚三条边谁最长——直接列出三条三角形不等式 a+b&gt;c、b+c&gt;a、a+c&gt;b，</a:t>
+            </a:r>
+          </a:p>
+          <a:p>
+            <a:r>
+              <a:t>每一条都用同一招判断：对应的两个数是否至少有一位 11。</a:t>
             </a:r>
           </a:p>
         </p:txBody>
@@ -1147,12 +1152,37 @@
           <a:lstStyle/>
           <a:p>
             <a:r>
-              <a:t>接下来的动作非常标准：容斥。三个坏条件对应三个坏事件 E1、E2、E3。</a:t>
-            </a:r>
-          </a:p>
-          <a:p>
-            <a:r>
-              <a:t>全体对数有 (2^N − 1) 的平方个，答案是总数减去坏事件并集的大小。下面逐个计算每一项。</a:t>
+              <a:t>现在把三条不等式逐条翻译。第一条 a+b 大于 c：由小表，等价于 (a,b) 至少有一位 11，也就是 a&amp;b 非零。</a:t>
+            </a:r>
+          </a:p>
+          <a:p>
+            <a:r>
+              <a:t>第二条 b+c 大于 a：注意 b 异或 c 恰好等于 a，所以等价于 (b,c) 至少有一位 11，也就是 b&amp;c 非零。</a:t>
+            </a:r>
+          </a:p>
+          <a:p>
+            <a:r>
+              <a:t>怎么把 b&amp;c 换成只关于 a、b 的条件？逐位看：c 的每一位是 a 和 b 异或出来的，b 和 c 同时为 1，</a:t>
+            </a:r>
+          </a:p>
+          <a:p>
+            <a:r>
+              <a:t>当且仅当 b 这一位是 1 而 a 这一位是 0——所以 b&amp;c 就是"b 里有、a 里没有"的那些位。</a:t>
+            </a:r>
+          </a:p>
+          <a:p>
+            <a:r>
+              <a:t>b&amp;c 非零，等价于 b 不是 a 的按位子集。第三条完全对称：a&amp;c 非零，等价于 a 不是 b 的子集。</a:t>
+            </a:r>
+          </a:p>
+          <a:p>
+            <a:r>
+              <a:t>于是非退化等价于三个位条件：a&amp;b 非零，b 不包含于 a，a 不包含于 b。到这里"三角形"彻底消失，</a:t>
+            </a:r>
+          </a:p>
+          <a:p>
+            <a:r>
+              <a:t>问题变成三个纯位运算条件的计数。</a:t>
             </a:r>
           </a:p>
         </p:txBody>
@@ -1222,22 +1252,17 @@
           <a:lstStyle/>
           <a:p>
             <a:r>
-              <a:t>先算 E1：a&amp;b 等于 0，也就是两个数的 1 位完全不重叠。</a:t>
-            </a:r>
-          </a:p>
-          <a:p>
-            <a:r>
-              <a:t>看低 N 位，每一位有三种去向：只在 a、只在 b、都不在，所以有 3^N 种分配；</a:t>
-            </a:r>
-          </a:p>
-          <a:p>
-            <a:r>
-              <a:t>但要挖掉 a 等于 0 的 2^N 种和 b 等于 0 的 2^N 种——注意 a = b = 0 被挖了两次，要加回 1 种。</a:t>
-            </a:r>
-          </a:p>
-          <a:p>
-            <a:r>
-              <a:t>得到 |E1| = 3^N − 2^(N+1) + 1。</a:t>
+              <a:t>接下来的动作非常标准：容斥。三个坏条件对应三个坏事件：E1 是 a&amp;b 等于 0；</a:t>
+            </a:r>
+          </a:p>
+          <a:p>
+            <a:r>
+              <a:t>E2 是 b&amp;c 等于 0，也就是 b 包含于 a；E3 是 a&amp;c 等于 0，也就是 a 包含于 b。</a:t>
+            </a:r>
+          </a:p>
+          <a:p>
+            <a:r>
+              <a:t>全体对数有 (2^N − 1) 的平方个，答案是总数减去坏事件并集的大小。下面逐个计算每一项。</a:t>
             </a:r>
           </a:p>
         </p:txBody>
@@ -1307,22 +1332,22 @@
           <a:lstStyle/>
           <a:p>
             <a:r>
-              <a:t>再算 E2：a 按位包含于 b。逐位看，(a_i, b_i) 只有三种合法状态：00、01、11，也是 3^N 种；</a:t>
-            </a:r>
-          </a:p>
-          <a:p>
-            <a:r>
-              <a:t>挖掉 a=0 的 2^N 种。这里有个细节：a=0 的 2^N 种里已经包含了 b=0，不用像 E1 那样再加回。</a:t>
-            </a:r>
-          </a:p>
-          <a:p>
-            <a:r>
-              <a:t>所以 |E2| = 3^N − 2^N，和 |E1| 不一样——这是这道题最容易翻车的地方：</a:t>
-            </a:r>
-          </a:p>
-          <a:p>
-            <a:r>
-              <a:t>两个集合从字面上看几乎对称，但"挖 0"的时候一个有交集、一个没有，计数结果天生不同。E3 与 E2 对称，相等。</a:t>
+              <a:t>先算 E1：a&amp;b 等于 0，就是两个数没有任何一个 11 位，1 位完全不重叠。</a:t>
+            </a:r>
+          </a:p>
+          <a:p>
+            <a:r>
+              <a:t>看低 N 位，每一位有三种去向：只在 a、只在 b、都不在，所以有 3^N 种分配；</a:t>
+            </a:r>
+          </a:p>
+          <a:p>
+            <a:r>
+              <a:t>但要挖掉 a 等于 0 的 2^N 种和 b 等于 0 的 2^N 种——注意 a = b = 0 被挖了两次，要加回 1 种。</a:t>
+            </a:r>
+          </a:p>
+          <a:p>
+            <a:r>
+              <a:t>得到 |E1| = 3^N − 2^(N+1) + 1。</a:t>
             </a:r>
           </a:p>
         </p:txBody>
@@ -1392,17 +1417,22 @@
           <a:lstStyle/>
           <a:p>
             <a:r>
-              <a:t>再看交集。E1 交 E2 是空集：a&amp;b 为 0 又要求 a 包含于 b，只能推出 a = 0，矛盾；</a:t>
-            </a:r>
-          </a:p>
-          <a:p>
-            <a:r>
-              <a:t>E1 交 E3 和三元交同理。E2 交 E3 是 a = b，共 2^N − 1 对。</a:t>
-            </a:r>
-          </a:p>
-          <a:p>
-            <a:r>
-              <a:t>把各项代进容斥公式，并集大小化简成 3^(N+1) − 5·2^N + 2。</a:t>
+              <a:t>再算 E2：b 包含于 a。逐位看，(bᵢ, aᵢ) 只有三种合法状态：00、01、11，也是 3^N 种；</a:t>
+            </a:r>
+          </a:p>
+          <a:p>
+            <a:r>
+              <a:t>挖掉 b 等于 0 的 2^N 种。这里有个细节：b 等于 0 的 2^N 种里已经包含了 a 等于 0，不用像 E1 那样再加回。</a:t>
+            </a:r>
+          </a:p>
+          <a:p>
+            <a:r>
+              <a:t>所以 |E2| = 3^N − 2^N，和 |E1| 不一样——这是这道题最容易翻车的地方：</a:t>
+            </a:r>
+          </a:p>
+          <a:p>
+            <a:r>
+              <a:t>两个集合从字面上看几乎对称，但"挖 0"的时候一个有交集、一个没有，计数结果天生不同。E3 与 E2 对称，相等。</a:t>
             </a:r>
           </a:p>
         </p:txBody>
@@ -1472,22 +1502,17 @@
           <a:lstStyle/>
           <a:p>
             <a:r>
-              <a:t>总对数 (2^N − 1) 的平方展开是 4^N − 2^(N+1) + 1，减去并集，得到最终答案</a:t>
-            </a:r>
-          </a:p>
-          <a:p>
-            <a:r>
-              <a:t>4^N − 3^(N+1) + 3·2^N − 1。用官方样例核对：N=2 答案是 0；N=5 是 390——</a:t>
-            </a:r>
-          </a:p>
-          <a:p>
-            <a:r>
-              <a:t>比如 (13,24)，13 异或 24 等于 21，13+24 大于 21、13+21 大于 24、21+24 大于 13，确实构成三角形；</a:t>
-            </a:r>
-          </a:p>
-          <a:p>
-            <a:r>
-              <a:t>N=10000 是 851087540。全部吻合。</a:t>
+              <a:t>再看交集。E1 交 E2 是空集：a&amp;b 为 0 又要求 b 包含于 a，只能推出 b = 0，矛盾；</a:t>
+            </a:r>
+          </a:p>
+          <a:p>
+            <a:r>
+              <a:t>E1 交 E3 和三元交同理。E2 交 E3 是 a = b，共 2^N − 1 对。</a:t>
+            </a:r>
+          </a:p>
+          <a:p>
+            <a:r>
+              <a:t>把各项代进容斥公式，并集大小化简成 3^(N+1) − 5·2^N + 2。</a:t>
             </a:r>
           </a:p>
         </p:txBody>
@@ -4612,27 +4637,7 @@
                 <a:latin typeface="PingFang SC" panose="020B0400000000000000" charset="-122"/>
                 <a:ea typeface="PingFang SC" panose="020B0400000000000000" charset="-122"/>
               </a:rPr>
-              <a:t>异或不等式 </a:t>
-            </a:r>
-            <a:r>
-              <a:rPr lang="en-US" sz="2400" b="0" i="0">
-                <a:solidFill>
-                  <a:srgbClr val="DCE9F7"/>
-                </a:solidFill>
-                <a:latin typeface="PingFang SC" panose="020B0400000000000000" charset="-122"/>
-                <a:ea typeface="PingFang SC" panose="020B0400000000000000" charset="-122"/>
-              </a:rPr>
-              <a:t>&amp;</a:t>
-            </a:r>
-            <a:r>
-              <a:rPr sz="2400" b="0" i="0">
-                <a:solidFill>
-                  <a:srgbClr val="DCE9F7"/>
-                </a:solidFill>
-                <a:latin typeface="PingFang SC" panose="020B0400000000000000" charset="-122"/>
-                <a:ea typeface="PingFang SC" panose="020B0400000000000000" charset="-122"/>
-              </a:rPr>
-              <a:t> 容斥原理</a:t>
+              <a:t>异或自反性 × 容斥原理</a:t>
             </a:r>
             <a:endParaRPr sz="2400" b="0" i="0">
               <a:solidFill>
@@ -4653,7 +4658,7 @@
         <p:spPr>
           <a:xfrm>
             <a:off x="822960" y="4434840"/>
-            <a:ext cx="10515600" cy="300355"/>
+            <a:ext cx="10515600" cy="457200"/>
           </a:xfrm>
           <a:prstGeom prst="rect">
             <a:avLst/>
@@ -4675,27 +4680,7 @@
                 <a:latin typeface="PingFang SC" panose="020B0400000000000000" charset="-122"/>
                 <a:ea typeface="PingFang SC" panose="020B0400000000000000" charset="-122"/>
               </a:rPr>
-              <a:t>2026.9.3 集训队</a:t>
-            </a:r>
-            <a:r>
-              <a:rPr lang="zh-CN" sz="1600" b="0" i="0">
-                <a:solidFill>
-                  <a:srgbClr val="B9C7DF"/>
-                </a:solidFill>
-                <a:latin typeface="PingFang SC" panose="020B0400000000000000" charset="-122"/>
-                <a:ea typeface="PingFang SC" panose="020B0400000000000000" charset="-122"/>
-              </a:rPr>
-              <a:t>训练</a:t>
-            </a:r>
-            <a:r>
-              <a:rPr sz="1600" b="0" i="0">
-                <a:solidFill>
-                  <a:srgbClr val="B9C7DF"/>
-                </a:solidFill>
-                <a:latin typeface="PingFang SC" panose="020B0400000000000000" charset="-122"/>
-                <a:ea typeface="PingFang SC" panose="020B0400000000000000" charset="-122"/>
-              </a:rPr>
-              <a:t>赛 · 分享交流</a:t>
+              <a:t>2026.9.3 集训队个人赛 · 分享交流</a:t>
             </a:r>
             <a:endParaRPr sz="1600" b="0" i="0">
               <a:solidFill>
@@ -4817,7 +4802,7 @@
                 <a:latin typeface="PingFang SC" panose="020B0400000000000000" charset="-122"/>
                 <a:ea typeface="PingFang SC" panose="020B0400000000000000" charset="-122"/>
               </a:rPr>
-              <a:t>代码实现</a:t>
+              <a:t>最终公式与样例</a:t>
             </a:r>
             <a:endParaRPr sz="2700" b="1" i="0">
               <a:solidFill>
@@ -4881,6 +4866,486 @@
         </p:nvSpPr>
         <p:spPr>
           <a:xfrm>
+            <a:off x="822960" y="1325880"/>
+            <a:ext cx="10515600" cy="1280160"/>
+          </a:xfrm>
+          <a:prstGeom prst="roundRect">
+            <a:avLst/>
+          </a:prstGeom>
+          <a:solidFill>
+            <a:srgbClr val="DFECD8"/>
+          </a:solidFill>
+          <a:ln>
+            <a:noFill/>
+          </a:ln>
+          <a:effectLst/>
+        </p:spPr>
+        <p:style>
+          <a:lnRef idx="1">
+            <a:schemeClr val="accent1"/>
+          </a:lnRef>
+          <a:fillRef idx="3">
+            <a:schemeClr val="accent1"/>
+          </a:fillRef>
+          <a:effectRef idx="2">
+            <a:schemeClr val="accent1"/>
+          </a:effectRef>
+          <a:fontRef idx="minor">
+            <a:schemeClr val="lt1"/>
+          </a:fontRef>
+        </p:style>
+        <p:txBody>
+          <a:bodyPr wrap="square" lIns="365760" rtlCol="0" anchor="ctr"/>
+          <a:lstStyle/>
+          <a:p>
+            <a:pPr algn="ctr"/>
+            <a:r>
+              <a:rPr sz="3000" b="1" i="0">
+                <a:solidFill>
+                  <a:srgbClr val="538A4B"/>
+                </a:solidFill>
+                <a:latin typeface="PingFang SC" panose="020B0400000000000000" charset="-122"/>
+                <a:ea typeface="PingFang SC" panose="020B0400000000000000" charset="-122"/>
+              </a:rPr>
+              <a:t>Ans = 4^N − 3^(N+1) + 3·2^N − 1</a:t>
+            </a:r>
+            <a:endParaRPr sz="3000" b="1" i="0">
+              <a:solidFill>
+                <a:srgbClr val="538A4B"/>
+              </a:solidFill>
+              <a:latin typeface="PingFang SC" panose="020B0400000000000000" charset="-122"/>
+              <a:ea typeface="PingFang SC" panose="020B0400000000000000" charset="-122"/>
+            </a:endParaRPr>
+          </a:p>
+          <a:p>
+            <a:pPr algn="ctr">
+              <a:spcBef>
+                <a:spcPts val="600"/>
+              </a:spcBef>
+            </a:pPr>
+            <a:r>
+              <a:rPr sz="1600" b="0" i="0">
+                <a:solidFill>
+                  <a:srgbClr val="7F7F7F"/>
+                </a:solidFill>
+                <a:latin typeface="PingFang SC" panose="020B0400000000000000" charset="-122"/>
+                <a:ea typeface="PingFang SC" panose="020B0400000000000000" charset="-122"/>
+              </a:rPr>
+              <a:t>(4^N − 2^(N+1) + 1) − (3^(N+1) − 5·2^N + 2)　(mod 998244353)</a:t>
+            </a:r>
+            <a:endParaRPr sz="1600" b="0" i="0">
+              <a:solidFill>
+                <a:srgbClr val="7F7F7F"/>
+              </a:solidFill>
+              <a:latin typeface="PingFang SC" panose="020B0400000000000000" charset="-122"/>
+              <a:ea typeface="PingFang SC" panose="020B0400000000000000" charset="-122"/>
+            </a:endParaRPr>
+          </a:p>
+        </p:txBody>
+      </p:sp>
+      <p:sp>
+        <p:nvSpPr>
+          <p:cNvPr id="5" name="TextBox 4"/>
+          <p:cNvSpPr txBox="1"/>
+          <p:nvPr/>
+        </p:nvSpPr>
+        <p:spPr>
+          <a:xfrm>
+            <a:off x="822960" y="2971800"/>
+            <a:ext cx="10515600" cy="1746885"/>
+          </a:xfrm>
+          <a:prstGeom prst="rect">
+            <a:avLst/>
+          </a:prstGeom>
+          <a:noFill/>
+        </p:spPr>
+        <p:txBody>
+          <a:bodyPr wrap="square" lIns="54864" tIns="27432" rIns="54864" bIns="27432">
+            <a:spAutoFit/>
+          </a:bodyPr>
+          <a:lstStyle/>
+          <a:p>
+            <a:pPr>
+              <a:spcAft>
+                <a:spcPts val="1200"/>
+              </a:spcAft>
+            </a:pPr>
+            <a:r>
+              <a:rPr sz="2000" b="1" i="0">
+                <a:solidFill>
+                  <a:srgbClr val="2E75B6"/>
+                </a:solidFill>
+                <a:latin typeface="PingFang SC" panose="020B0400000000000000" charset="-122"/>
+                <a:ea typeface="PingFang SC" panose="020B0400000000000000" charset="-122"/>
+              </a:rPr>
+              <a:t>▪ </a:t>
+            </a:r>
+            <a:r>
+              <a:rPr sz="2000" b="0" i="0">
+                <a:solidFill>
+                  <a:srgbClr val="262626"/>
+                </a:solidFill>
+                <a:latin typeface="PingFang SC" panose="020B0400000000000000" charset="-122"/>
+                <a:ea typeface="PingFang SC" panose="020B0400000000000000" charset="-122"/>
+              </a:rPr>
+              <a:t>N = 2 → </a:t>
+            </a:r>
+            <a:r>
+              <a:rPr sz="2000" b="1" i="0">
+                <a:solidFill>
+                  <a:srgbClr val="2E75B6"/>
+                </a:solidFill>
+                <a:latin typeface="PingFang SC" panose="020B0400000000000000" charset="-122"/>
+                <a:ea typeface="PingFang SC" panose="020B0400000000000000" charset="-122"/>
+              </a:rPr>
+              <a:t>0</a:t>
+            </a:r>
+            <a:r>
+              <a:rPr sz="2000" b="0" i="0">
+                <a:solidFill>
+                  <a:srgbClr val="262626"/>
+                </a:solidFill>
+                <a:latin typeface="PingFang SC" panose="020B0400000000000000" charset="-122"/>
+                <a:ea typeface="PingFang SC" panose="020B0400000000000000" charset="-122"/>
+              </a:rPr>
+              <a:t>：{1, 2, 3} 共 9 对全部退化</a:t>
+            </a:r>
+            <a:endParaRPr sz="2000" b="0" i="0">
+              <a:solidFill>
+                <a:srgbClr val="262626"/>
+              </a:solidFill>
+              <a:latin typeface="PingFang SC" panose="020B0400000000000000" charset="-122"/>
+              <a:ea typeface="PingFang SC" panose="020B0400000000000000" charset="-122"/>
+            </a:endParaRPr>
+          </a:p>
+          <a:p>
+            <a:pPr>
+              <a:spcAft>
+                <a:spcPts val="1200"/>
+              </a:spcAft>
+            </a:pPr>
+            <a:r>
+              <a:rPr sz="2000" b="1" i="0">
+                <a:solidFill>
+                  <a:srgbClr val="2E75B6"/>
+                </a:solidFill>
+                <a:latin typeface="PingFang SC" panose="020B0400000000000000" charset="-122"/>
+                <a:ea typeface="PingFang SC" panose="020B0400000000000000" charset="-122"/>
+              </a:rPr>
+              <a:t>▪ </a:t>
+            </a:r>
+            <a:r>
+              <a:rPr sz="2000" b="0" i="0">
+                <a:solidFill>
+                  <a:srgbClr val="262626"/>
+                </a:solidFill>
+                <a:latin typeface="PingFang SC" panose="020B0400000000000000" charset="-122"/>
+                <a:ea typeface="PingFang SC" panose="020B0400000000000000" charset="-122"/>
+              </a:rPr>
+              <a:t>N = 5 → </a:t>
+            </a:r>
+            <a:r>
+              <a:rPr sz="2000" b="1" i="0">
+                <a:solidFill>
+                  <a:srgbClr val="2E75B6"/>
+                </a:solidFill>
+                <a:latin typeface="PingFang SC" panose="020B0400000000000000" charset="-122"/>
+                <a:ea typeface="PingFang SC" panose="020B0400000000000000" charset="-122"/>
+              </a:rPr>
+              <a:t>390</a:t>
+            </a:r>
+            <a:r>
+              <a:rPr sz="2000" b="0" i="0">
+                <a:solidFill>
+                  <a:srgbClr val="262626"/>
+                </a:solidFill>
+                <a:latin typeface="PingFang SC" panose="020B0400000000000000" charset="-122"/>
+                <a:ea typeface="PingFang SC" panose="020B0400000000000000" charset="-122"/>
+              </a:rPr>
+              <a:t>；例如 </a:t>
+            </a:r>
+            <a:r>
+              <a:rPr sz="2000" b="1" i="0">
+                <a:solidFill>
+                  <a:srgbClr val="2E75B6"/>
+                </a:solidFill>
+                <a:latin typeface="PingFang SC" panose="020B0400000000000000" charset="-122"/>
+                <a:ea typeface="PingFang SC" panose="020B0400000000000000" charset="-122"/>
+              </a:rPr>
+              <a:t>(13, 24)</a:t>
+            </a:r>
+            <a:r>
+              <a:rPr sz="2000" b="0" i="0">
+                <a:solidFill>
+                  <a:srgbClr val="262626"/>
+                </a:solidFill>
+                <a:latin typeface="PingFang SC" panose="020B0400000000000000" charset="-122"/>
+                <a:ea typeface="PingFang SC" panose="020B0400000000000000" charset="-122"/>
+              </a:rPr>
+              <a:t>：13 ⊕ 24 = 21，且 13+24 &gt; 21、13+21 &gt; 24、21+24 &gt; 13 </a:t>
+            </a:r>
+            <a:endParaRPr sz="2000" b="0" i="0">
+              <a:solidFill>
+                <a:srgbClr val="262626"/>
+              </a:solidFill>
+              <a:latin typeface="PingFang SC" panose="020B0400000000000000" charset="-122"/>
+              <a:ea typeface="PingFang SC" panose="020B0400000000000000" charset="-122"/>
+            </a:endParaRPr>
+          </a:p>
+          <a:p>
+            <a:pPr>
+              <a:spcAft>
+                <a:spcPts val="1200"/>
+              </a:spcAft>
+            </a:pPr>
+            <a:r>
+              <a:rPr sz="2000" b="1" i="0">
+                <a:solidFill>
+                  <a:srgbClr val="2E75B6"/>
+                </a:solidFill>
+                <a:latin typeface="PingFang SC" panose="020B0400000000000000" charset="-122"/>
+                <a:ea typeface="PingFang SC" panose="020B0400000000000000" charset="-122"/>
+              </a:rPr>
+              <a:t>▪ </a:t>
+            </a:r>
+            <a:r>
+              <a:rPr sz="2000" b="0" i="0">
+                <a:solidFill>
+                  <a:srgbClr val="262626"/>
+                </a:solidFill>
+                <a:latin typeface="PingFang SC" panose="020B0400000000000000" charset="-122"/>
+                <a:ea typeface="PingFang SC" panose="020B0400000000000000" charset="-122"/>
+              </a:rPr>
+              <a:t>N = 10000 → </a:t>
+            </a:r>
+            <a:r>
+              <a:rPr sz="2000" b="1" i="0">
+                <a:solidFill>
+                  <a:srgbClr val="2E75B6"/>
+                </a:solidFill>
+                <a:latin typeface="PingFang SC" panose="020B0400000000000000" charset="-122"/>
+                <a:ea typeface="PingFang SC" panose="020B0400000000000000" charset="-122"/>
+              </a:rPr>
+              <a:t>851087540</a:t>
+            </a:r>
+            <a:endParaRPr sz="2000" b="1" i="0">
+              <a:solidFill>
+                <a:srgbClr val="2E75B6"/>
+              </a:solidFill>
+              <a:latin typeface="PingFang SC" panose="020B0400000000000000" charset="-122"/>
+              <a:ea typeface="PingFang SC" panose="020B0400000000000000" charset="-122"/>
+            </a:endParaRPr>
+          </a:p>
+          <a:p>
+            <a:pPr>
+              <a:spcAft>
+                <a:spcPts val="1200"/>
+              </a:spcAft>
+            </a:pPr>
+            <a:r>
+              <a:rPr sz="2000" b="1" i="0">
+                <a:solidFill>
+                  <a:srgbClr val="2E75B6"/>
+                </a:solidFill>
+                <a:latin typeface="PingFang SC" panose="020B0400000000000000" charset="-122"/>
+                <a:ea typeface="PingFang SC" panose="020B0400000000000000" charset="-122"/>
+              </a:rPr>
+              <a:t>▪ </a:t>
+            </a:r>
+            <a:r>
+              <a:rPr sz="2000" b="0" i="0">
+                <a:solidFill>
+                  <a:srgbClr val="262626"/>
+                </a:solidFill>
+                <a:latin typeface="PingFang SC" panose="020B0400000000000000" charset="-122"/>
+                <a:ea typeface="PingFang SC" panose="020B0400000000000000" charset="-122"/>
+              </a:rPr>
+              <a:t>三个样例与公式、与代码输出全部一致</a:t>
+            </a:r>
+            <a:endParaRPr sz="2000" b="0" i="0">
+              <a:solidFill>
+                <a:srgbClr val="262626"/>
+              </a:solidFill>
+              <a:latin typeface="PingFang SC" panose="020B0400000000000000" charset="-122"/>
+              <a:ea typeface="PingFang SC" panose="020B0400000000000000" charset="-122"/>
+            </a:endParaRPr>
+          </a:p>
+        </p:txBody>
+      </p:sp>
+      <p:sp>
+        <p:nvSpPr>
+          <p:cNvPr id="6" name="TextBox 5"/>
+          <p:cNvSpPr txBox="1"/>
+          <p:nvPr/>
+        </p:nvSpPr>
+        <p:spPr>
+          <a:xfrm>
+            <a:off x="9966960" y="6473952"/>
+            <a:ext cx="1737360" cy="320040"/>
+          </a:xfrm>
+          <a:prstGeom prst="rect">
+            <a:avLst/>
+          </a:prstGeom>
+          <a:noFill/>
+        </p:spPr>
+        <p:txBody>
+          <a:bodyPr wrap="square" lIns="54864" tIns="27432" rIns="54864" bIns="27432">
+            <a:spAutoFit/>
+          </a:bodyPr>
+          <a:lstStyle/>
+          <a:p>
+            <a:pPr algn="r"/>
+            <a:r>
+              <a:rPr sz="1100" b="0" i="0">
+                <a:solidFill>
+                  <a:srgbClr val="7F7F7F"/>
+                </a:solidFill>
+                <a:latin typeface="PingFang SC" panose="020B0400000000000000" charset="-122"/>
+                <a:ea typeface="PingFang SC" panose="020B0400000000000000" charset="-122"/>
+              </a:rPr>
+              <a:t>O. Xor Triangle · 9 / 12</a:t>
+            </a:r>
+            <a:endParaRPr sz="1100" b="0" i="0">
+              <a:solidFill>
+                <a:srgbClr val="7F7F7F"/>
+              </a:solidFill>
+              <a:latin typeface="PingFang SC" panose="020B0400000000000000" charset="-122"/>
+              <a:ea typeface="PingFang SC" panose="020B0400000000000000" charset="-122"/>
+            </a:endParaRPr>
+          </a:p>
+        </p:txBody>
+      </p:sp>
+    </p:spTree>
+  </p:cSld>
+  <p:clrMapOvr>
+    <a:masterClrMapping/>
+  </p:clrMapOvr>
+</p:sld>
+</file>
+
+<file path=ppt/slides/slide11.xml><?xml version="1.0" encoding="utf-8"?>
+<p:sld xmlns:a="http://schemas.openxmlformats.org/drawingml/2006/main" xmlns:r="http://schemas.openxmlformats.org/officeDocument/2006/relationships" xmlns:p="http://schemas.openxmlformats.org/presentationml/2006/main">
+  <p:cSld>
+    <p:spTree>
+      <p:nvGrpSpPr>
+        <p:cNvPr id="1" name=""/>
+        <p:cNvGrpSpPr/>
+        <p:nvPr/>
+      </p:nvGrpSpPr>
+      <p:grpSpPr/>
+      <p:sp>
+        <p:nvSpPr>
+          <p:cNvPr id="2" name="Rectangle 1"/>
+          <p:cNvSpPr/>
+          <p:nvPr/>
+        </p:nvSpPr>
+        <p:spPr>
+          <a:xfrm>
+            <a:off x="0" y="0"/>
+            <a:ext cx="12191695" cy="914400"/>
+          </a:xfrm>
+          <a:prstGeom prst="rect">
+            <a:avLst/>
+          </a:prstGeom>
+          <a:solidFill>
+            <a:srgbClr val="1F3864"/>
+          </a:solidFill>
+          <a:ln>
+            <a:noFill/>
+          </a:ln>
+          <a:effectLst/>
+        </p:spPr>
+        <p:style>
+          <a:lnRef idx="1">
+            <a:schemeClr val="accent1"/>
+          </a:lnRef>
+          <a:fillRef idx="3">
+            <a:schemeClr val="accent1"/>
+          </a:fillRef>
+          <a:effectRef idx="2">
+            <a:schemeClr val="accent1"/>
+          </a:effectRef>
+          <a:fontRef idx="minor">
+            <a:schemeClr val="lt1"/>
+          </a:fontRef>
+        </p:style>
+        <p:txBody>
+          <a:bodyPr lIns="502920" tIns="73152" rtlCol="0" anchor="ctr"/>
+          <a:lstStyle/>
+          <a:p>
+            <a:pPr algn="ctr"/>
+            <a:r>
+              <a:rPr sz="2700" b="1" i="0">
+                <a:solidFill>
+                  <a:srgbClr val="FFFFFF"/>
+                </a:solidFill>
+                <a:latin typeface="PingFang SC" panose="020B0400000000000000" charset="-122"/>
+                <a:ea typeface="PingFang SC" panose="020B0400000000000000" charset="-122"/>
+              </a:rPr>
+              <a:t>代码实现</a:t>
+            </a:r>
+            <a:endParaRPr sz="2700" b="1" i="0">
+              <a:solidFill>
+                <a:srgbClr val="FFFFFF"/>
+              </a:solidFill>
+              <a:latin typeface="PingFang SC" panose="020B0400000000000000" charset="-122"/>
+              <a:ea typeface="PingFang SC" panose="020B0400000000000000" charset="-122"/>
+            </a:endParaRPr>
+          </a:p>
+        </p:txBody>
+      </p:sp>
+      <p:sp>
+        <p:nvSpPr>
+          <p:cNvPr id="3" name="Rectangle 2"/>
+          <p:cNvSpPr/>
+          <p:nvPr/>
+        </p:nvSpPr>
+        <p:spPr>
+          <a:xfrm>
+            <a:off x="0" y="914400"/>
+            <a:ext cx="12191695" cy="41148"/>
+          </a:xfrm>
+          <a:prstGeom prst="rect">
+            <a:avLst/>
+          </a:prstGeom>
+          <a:solidFill>
+            <a:srgbClr val="C55A11"/>
+          </a:solidFill>
+          <a:ln>
+            <a:noFill/>
+          </a:ln>
+          <a:effectLst/>
+        </p:spPr>
+        <p:style>
+          <a:lnRef idx="1">
+            <a:schemeClr val="accent1"/>
+          </a:lnRef>
+          <a:fillRef idx="3">
+            <a:schemeClr val="accent1"/>
+          </a:fillRef>
+          <a:effectRef idx="2">
+            <a:schemeClr val="accent1"/>
+          </a:effectRef>
+          <a:fontRef idx="minor">
+            <a:schemeClr val="lt1"/>
+          </a:fontRef>
+        </p:style>
+        <p:txBody>
+          <a:bodyPr rtlCol="0" anchor="ctr"/>
+          <a:lstStyle/>
+          <a:p>
+            <a:pPr algn="ctr"/>
+          </a:p>
+        </p:txBody>
+      </p:sp>
+      <p:sp>
+        <p:nvSpPr>
+          <p:cNvPr id="4" name="Rounded Rectangle 3"/>
+          <p:cNvSpPr/>
+          <p:nvPr/>
+        </p:nvSpPr>
+        <p:spPr>
+          <a:xfrm>
             <a:off x="502920" y="1097280"/>
             <a:ext cx="7955279" cy="4983480"/>
           </a:xfrm>
@@ -8221,7 +8686,7 @@
         <p:spPr>
           <a:xfrm>
             <a:off x="8778240" y="1344168"/>
-            <a:ext cx="2788920" cy="1280160"/>
+            <a:ext cx="2788920" cy="736600"/>
           </a:xfrm>
           <a:prstGeom prst="rect">
             <a:avLst/>
@@ -8252,11 +8717,21 @@
                 <a:latin typeface="PingFang SC" panose="020B0400000000000000" charset="-122"/>
                 <a:ea typeface="PingFang SC" panose="020B0400000000000000" charset="-122"/>
               </a:rPr>
-              <a:t> 快速幂</a:t>
+              <a:t> · </a:t>
+            </a:r>
+            <a:r>
+              <a:rPr sz="1600" b="1" i="0">
+                <a:solidFill>
+                  <a:srgbClr val="2E75B6"/>
+                </a:solidFill>
+                <a:latin typeface="PingFang SC" panose="020B0400000000000000" charset="-122"/>
+                <a:ea typeface="PingFang SC" panose="020B0400000000000000" charset="-122"/>
+              </a:rPr>
+              <a:t>O(1)</a:t>
             </a:r>
             <a:endParaRPr sz="1600" b="1" i="0">
               <a:solidFill>
-                <a:srgbClr val="262626"/>
+                <a:srgbClr val="2E75B6"/>
               </a:solidFill>
               <a:latin typeface="PingFang SC" panose="020B0400000000000000" charset="-122"/>
               <a:ea typeface="PingFang SC" panose="020B0400000000000000" charset="-122"/>
@@ -8276,7 +8751,7 @@
                 <a:latin typeface="PingFang SC" panose="020B0400000000000000" charset="-122"/>
                 <a:ea typeface="PingFang SC" panose="020B0400000000000000" charset="-122"/>
               </a:rPr>
-              <a:t>只算 2</a:t>
+              <a:t>三次快速幂：2</a:t>
             </a:r>
             <a:r>
               <a:rPr sz="1250" b="0" i="0" baseline="30000">
@@ -8336,7 +8811,7 @@
                 <a:latin typeface="PingFang SC" panose="020B0400000000000000" charset="-122"/>
                 <a:ea typeface="PingFang SC" panose="020B0400000000000000" charset="-122"/>
               </a:rPr>
-              <a:t> 三个幂次，N = 10</a:t>
+              <a:t>；时间 O(log N)、空间 O(1)，N = 10</a:t>
             </a:r>
             <a:r>
               <a:rPr sz="1250" b="0" i="0" baseline="30000">
@@ -8356,9 +8831,19 @@
                 <a:latin typeface="PingFang SC" panose="020B0400000000000000" charset="-122"/>
                 <a:ea typeface="PingFang SC" panose="020B0400000000000000" charset="-122"/>
               </a:rPr>
-              <a:t> 也轻松</a:t>
-            </a:r>
-            <a:endParaRPr sz="1250" b="0" i="0">
+              <a:t> </a:t>
+            </a:r>
+            <a:r>
+              <a:rPr lang="zh-CN" sz="1250" b="0" i="0">
+                <a:solidFill>
+                  <a:srgbClr val="7F7F7F"/>
+                </a:solidFill>
+                <a:latin typeface="PingFang SC" panose="020B0400000000000000" charset="-122"/>
+                <a:ea typeface="PingFang SC" panose="020B0400000000000000" charset="-122"/>
+              </a:rPr>
+              <a:t>可过</a:t>
+            </a:r>
+            <a:endParaRPr lang="zh-CN" sz="1250" b="0" i="0">
               <a:solidFill>
                 <a:srgbClr val="7F7F7F"/>
               </a:solidFill>
@@ -8421,7 +8906,7 @@
         <p:spPr>
           <a:xfrm>
             <a:off x="8778240" y="2971800"/>
-            <a:ext cx="2788920" cy="1280160"/>
+            <a:ext cx="2788920" cy="736600"/>
           </a:xfrm>
           <a:prstGeom prst="rect">
             <a:avLst/>
@@ -8466,7 +8951,7 @@
                 <a:latin typeface="PingFang SC" panose="020B0400000000000000" charset="-122"/>
                 <a:ea typeface="PingFang SC" panose="020B0400000000000000" charset="-122"/>
               </a:rPr>
-              <a:t>先 + MOD 再 % MOD，防止 C++ 负数取模得到负数</a:t>
+              <a:t>先 + MOD 再 % MOD，防止负数取模得到负数</a:t>
             </a:r>
             <a:endParaRPr sz="1250" b="0" i="0">
               <a:solidFill>
@@ -8630,49 +9115,6 @@
       </p:sp>
       <p:sp>
         <p:nvSpPr>
-          <p:cNvPr id="11" name="TextBox 10"/>
-          <p:cNvSpPr txBox="1"/>
-          <p:nvPr/>
-        </p:nvSpPr>
-        <p:spPr>
-          <a:xfrm>
-            <a:off x="8641080" y="6035040"/>
-            <a:ext cx="3063240" cy="365760"/>
-          </a:xfrm>
-          <a:prstGeom prst="rect">
-            <a:avLst/>
-          </a:prstGeom>
-          <a:noFill/>
-        </p:spPr>
-        <p:txBody>
-          <a:bodyPr wrap="square" lIns="54864" tIns="27432" rIns="54864" bIns="27432">
-            <a:spAutoFit/>
-          </a:bodyPr>
-          <a:lstStyle/>
-          <a:p>
-            <a:pPr algn="ctr"/>
-            <a:r>
-              <a:rPr sz="1200" b="0" i="0">
-                <a:solidFill>
-                  <a:srgbClr val="7F7F7F"/>
-                </a:solidFill>
-                <a:latin typeface="PingFang SC" panose="020B0400000000000000" charset="-122"/>
-                <a:ea typeface="PingFang SC" panose="020B0400000000000000" charset="-122"/>
-              </a:rPr>
-              <a:t>完整代码见同目录「O.cpp」</a:t>
-            </a:r>
-            <a:endParaRPr sz="1200" b="0" i="0">
-              <a:solidFill>
-                <a:srgbClr val="7F7F7F"/>
-              </a:solidFill>
-              <a:latin typeface="PingFang SC" panose="020B0400000000000000" charset="-122"/>
-              <a:ea typeface="PingFang SC" panose="020B0400000000000000" charset="-122"/>
-            </a:endParaRPr>
-          </a:p>
-        </p:txBody>
-      </p:sp>
-      <p:sp>
-        <p:nvSpPr>
           <p:cNvPr id="12" name="TextBox 11"/>
           <p:cNvSpPr txBox="1"/>
           <p:nvPr/>
@@ -8702,7 +9144,7 @@
                 <a:latin typeface="PingFang SC" panose="020B0400000000000000" charset="-122"/>
                 <a:ea typeface="PingFang SC" panose="020B0400000000000000" charset="-122"/>
               </a:rPr>
-              <a:t>O. Xor Triangle · 9 / 12</a:t>
+              <a:t>O. Xor Triangle · 10 / 12</a:t>
             </a:r>
             <a:endParaRPr sz="1100" b="0" i="0">
               <a:solidFill>
@@ -8722,7 +9164,7 @@
 </p:sld>
 </file>
 
-<file path=ppt/slides/slide11.xml><?xml version="1.0" encoding="utf-8"?>
+<file path=ppt/slides/slide12.xml><?xml version="1.0" encoding="utf-8"?>
 <p:sld xmlns:a="http://schemas.openxmlformats.org/drawingml/2006/main" xmlns:r="http://schemas.openxmlformats.org/officeDocument/2006/relationships" xmlns:p="http://schemas.openxmlformats.org/presentationml/2006/main">
   <p:cSld>
     <p:spTree>
@@ -8781,587 +9223,7 @@
                 <a:latin typeface="PingFang SC" panose="020B0400000000000000" charset="-122"/>
                 <a:ea typeface="PingFang SC" panose="020B0400000000000000" charset="-122"/>
               </a:rPr>
-              <a:t>复杂度与更多观察</a:t>
-            </a:r>
-            <a:endParaRPr sz="2700" b="1" i="0">
-              <a:solidFill>
-                <a:srgbClr val="FFFFFF"/>
-              </a:solidFill>
-              <a:latin typeface="PingFang SC" panose="020B0400000000000000" charset="-122"/>
-              <a:ea typeface="PingFang SC" panose="020B0400000000000000" charset="-122"/>
-            </a:endParaRPr>
-          </a:p>
-        </p:txBody>
-      </p:sp>
-      <p:sp>
-        <p:nvSpPr>
-          <p:cNvPr id="3" name="Rectangle 2"/>
-          <p:cNvSpPr/>
-          <p:nvPr/>
-        </p:nvSpPr>
-        <p:spPr>
-          <a:xfrm>
-            <a:off x="0" y="914400"/>
-            <a:ext cx="12191695" cy="41148"/>
-          </a:xfrm>
-          <a:prstGeom prst="rect">
-            <a:avLst/>
-          </a:prstGeom>
-          <a:solidFill>
-            <a:srgbClr val="C55A11"/>
-          </a:solidFill>
-          <a:ln>
-            <a:noFill/>
-          </a:ln>
-          <a:effectLst/>
-        </p:spPr>
-        <p:style>
-          <a:lnRef idx="1">
-            <a:schemeClr val="accent1"/>
-          </a:lnRef>
-          <a:fillRef idx="3">
-            <a:schemeClr val="accent1"/>
-          </a:fillRef>
-          <a:effectRef idx="2">
-            <a:schemeClr val="accent1"/>
-          </a:effectRef>
-          <a:fontRef idx="minor">
-            <a:schemeClr val="lt1"/>
-          </a:fontRef>
-        </p:style>
-        <p:txBody>
-          <a:bodyPr rtlCol="0" anchor="ctr"/>
-          <a:lstStyle/>
-          <a:p>
-            <a:pPr algn="ctr"/>
-          </a:p>
-        </p:txBody>
-      </p:sp>
-      <p:sp>
-        <p:nvSpPr>
-          <p:cNvPr id="4" name="Rounded Rectangle 3"/>
-          <p:cNvSpPr/>
-          <p:nvPr/>
-        </p:nvSpPr>
-        <p:spPr>
-          <a:xfrm>
-            <a:off x="822960" y="1371600"/>
-            <a:ext cx="5120640" cy="914400"/>
-          </a:xfrm>
-          <a:prstGeom prst="roundRect">
-            <a:avLst/>
-          </a:prstGeom>
-          <a:solidFill>
-            <a:srgbClr val="DFECD8"/>
-          </a:solidFill>
-          <a:ln w="15240">
-            <a:solidFill>
-              <a:srgbClr val="538A4B"/>
-            </a:solidFill>
-          </a:ln>
-          <a:effectLst/>
-        </p:spPr>
-        <p:style>
-          <a:lnRef idx="1">
-            <a:schemeClr val="accent1"/>
-          </a:lnRef>
-          <a:fillRef idx="3">
-            <a:schemeClr val="accent1"/>
-          </a:fillRef>
-          <a:effectRef idx="2">
-            <a:schemeClr val="accent1"/>
-          </a:effectRef>
-          <a:fontRef idx="minor">
-            <a:schemeClr val="lt1"/>
-          </a:fontRef>
-        </p:style>
-        <p:txBody>
-          <a:bodyPr rtlCol="0" anchor="ctr"/>
-          <a:lstStyle/>
-          <a:p>
-            <a:pPr algn="ctr"/>
-          </a:p>
-        </p:txBody>
-      </p:sp>
-      <p:sp>
-        <p:nvSpPr>
-          <p:cNvPr id="5" name="TextBox 4"/>
-          <p:cNvSpPr txBox="1"/>
-          <p:nvPr/>
-        </p:nvSpPr>
-        <p:spPr>
-          <a:xfrm>
-            <a:off x="822960" y="1600200"/>
-            <a:ext cx="5120640" cy="502920"/>
-          </a:xfrm>
-          <a:prstGeom prst="rect">
-            <a:avLst/>
-          </a:prstGeom>
-          <a:noFill/>
-        </p:spPr>
-        <p:txBody>
-          <a:bodyPr wrap="square" lIns="54864" tIns="27432" rIns="54864" bIns="27432">
-            <a:spAutoFit/>
-          </a:bodyPr>
-          <a:lstStyle/>
-          <a:p>
-            <a:pPr algn="ctr"/>
-            <a:r>
-              <a:rPr sz="2200" b="1" i="0">
-                <a:solidFill>
-                  <a:srgbClr val="262626"/>
-                </a:solidFill>
-                <a:latin typeface="PingFang SC" panose="020B0400000000000000" charset="-122"/>
-                <a:ea typeface="PingFang SC" panose="020B0400000000000000" charset="-122"/>
-              </a:rPr>
-              <a:t>时间复杂度　</a:t>
-            </a:r>
-            <a:r>
-              <a:rPr sz="2200" b="1" i="0">
-                <a:solidFill>
-                  <a:srgbClr val="2E75B6"/>
-                </a:solidFill>
-                <a:latin typeface="PingFang SC" panose="020B0400000000000000" charset="-122"/>
-                <a:ea typeface="PingFang SC" panose="020B0400000000000000" charset="-122"/>
-              </a:rPr>
-              <a:t>O(log N)</a:t>
-            </a:r>
-            <a:endParaRPr sz="2200" b="1" i="0">
-              <a:solidFill>
-                <a:srgbClr val="2E75B6"/>
-              </a:solidFill>
-              <a:latin typeface="PingFang SC" panose="020B0400000000000000" charset="-122"/>
-              <a:ea typeface="PingFang SC" panose="020B0400000000000000" charset="-122"/>
-            </a:endParaRPr>
-          </a:p>
-        </p:txBody>
-      </p:sp>
-      <p:sp>
-        <p:nvSpPr>
-          <p:cNvPr id="6" name="Rounded Rectangle 5"/>
-          <p:cNvSpPr/>
-          <p:nvPr/>
-        </p:nvSpPr>
-        <p:spPr>
-          <a:xfrm>
-            <a:off x="6263640" y="1371600"/>
-            <a:ext cx="5120640" cy="914400"/>
-          </a:xfrm>
-          <a:prstGeom prst="roundRect">
-            <a:avLst/>
-          </a:prstGeom>
-          <a:solidFill>
-            <a:srgbClr val="DFECD8"/>
-          </a:solidFill>
-          <a:ln w="15240">
-            <a:solidFill>
-              <a:srgbClr val="538A4B"/>
-            </a:solidFill>
-          </a:ln>
-          <a:effectLst/>
-        </p:spPr>
-        <p:style>
-          <a:lnRef idx="1">
-            <a:schemeClr val="accent1"/>
-          </a:lnRef>
-          <a:fillRef idx="3">
-            <a:schemeClr val="accent1"/>
-          </a:fillRef>
-          <a:effectRef idx="2">
-            <a:schemeClr val="accent1"/>
-          </a:effectRef>
-          <a:fontRef idx="minor">
-            <a:schemeClr val="lt1"/>
-          </a:fontRef>
-        </p:style>
-        <p:txBody>
-          <a:bodyPr rtlCol="0" anchor="ctr"/>
-          <a:lstStyle/>
-          <a:p>
-            <a:pPr algn="ctr"/>
-          </a:p>
-        </p:txBody>
-      </p:sp>
-      <p:sp>
-        <p:nvSpPr>
-          <p:cNvPr id="7" name="TextBox 6"/>
-          <p:cNvSpPr txBox="1"/>
-          <p:nvPr/>
-        </p:nvSpPr>
-        <p:spPr>
-          <a:xfrm>
-            <a:off x="6263640" y="1600200"/>
-            <a:ext cx="5120640" cy="502920"/>
-          </a:xfrm>
-          <a:prstGeom prst="rect">
-            <a:avLst/>
-          </a:prstGeom>
-          <a:noFill/>
-        </p:spPr>
-        <p:txBody>
-          <a:bodyPr wrap="square" lIns="54864" tIns="27432" rIns="54864" bIns="27432">
-            <a:spAutoFit/>
-          </a:bodyPr>
-          <a:lstStyle/>
-          <a:p>
-            <a:pPr algn="ctr"/>
-            <a:r>
-              <a:rPr sz="2200" b="1" i="0">
-                <a:solidFill>
-                  <a:srgbClr val="262626"/>
-                </a:solidFill>
-                <a:latin typeface="PingFang SC" panose="020B0400000000000000" charset="-122"/>
-                <a:ea typeface="PingFang SC" panose="020B0400000000000000" charset="-122"/>
-              </a:rPr>
-              <a:t>空间复杂度　</a:t>
-            </a:r>
-            <a:r>
-              <a:rPr sz="2200" b="1" i="0">
-                <a:solidFill>
-                  <a:srgbClr val="2E75B6"/>
-                </a:solidFill>
-                <a:latin typeface="PingFang SC" panose="020B0400000000000000" charset="-122"/>
-                <a:ea typeface="PingFang SC" panose="020B0400000000000000" charset="-122"/>
-              </a:rPr>
-              <a:t>O(1)</a:t>
-            </a:r>
-            <a:endParaRPr sz="2200" b="1" i="0">
-              <a:solidFill>
-                <a:srgbClr val="2E75B6"/>
-              </a:solidFill>
-              <a:latin typeface="PingFang SC" panose="020B0400000000000000" charset="-122"/>
-              <a:ea typeface="PingFang SC" panose="020B0400000000000000" charset="-122"/>
-            </a:endParaRPr>
-          </a:p>
-        </p:txBody>
-      </p:sp>
-      <p:sp>
-        <p:nvSpPr>
-          <p:cNvPr id="8" name="TextBox 7"/>
-          <p:cNvSpPr txBox="1"/>
-          <p:nvPr/>
-        </p:nvSpPr>
-        <p:spPr>
-          <a:xfrm>
-            <a:off x="822960" y="2651760"/>
-            <a:ext cx="10515600" cy="1737360"/>
-          </a:xfrm>
-          <a:prstGeom prst="rect">
-            <a:avLst/>
-          </a:prstGeom>
-          <a:noFill/>
-        </p:spPr>
-        <p:txBody>
-          <a:bodyPr wrap="square" lIns="54864" tIns="27432" rIns="54864" bIns="27432">
-            <a:spAutoFit/>
-          </a:bodyPr>
-          <a:lstStyle/>
-          <a:p>
-            <a:pPr>
-              <a:spcAft>
-                <a:spcPts val="1200"/>
-              </a:spcAft>
-            </a:pPr>
-            <a:r>
-              <a:rPr sz="2000" b="1" i="0">
-                <a:solidFill>
-                  <a:srgbClr val="2E75B6"/>
-                </a:solidFill>
-                <a:latin typeface="PingFang SC" panose="020B0400000000000000" charset="-122"/>
-                <a:ea typeface="PingFang SC" panose="020B0400000000000000" charset="-122"/>
-              </a:rPr>
-              <a:t>▪ </a:t>
-            </a:r>
-            <a:r>
-              <a:rPr sz="2000" b="0" i="0">
-                <a:solidFill>
-                  <a:srgbClr val="262626"/>
-                </a:solidFill>
-                <a:latin typeface="PingFang SC" panose="020B0400000000000000" charset="-122"/>
-                <a:ea typeface="PingFang SC" panose="020B0400000000000000" charset="-122"/>
-              </a:rPr>
-              <a:t>为什么只能推公式：枚举 4</a:t>
-            </a:r>
-            <a:r>
-              <a:rPr sz="2000" b="0" i="0" baseline="30000">
-                <a:solidFill>
-                  <a:srgbClr val="262626"/>
-                </a:solidFill>
-                <a:latin typeface="PingFang SC" panose="020B0400000000000000" charset="-122"/>
-                <a:ea typeface="PingFang SC" panose="020B0400000000000000" charset="-122"/>
-              </a:rPr>
-              <a:t>N</a:t>
-            </a:r>
-            <a:r>
-              <a:rPr sz="2000" b="0" i="0">
-                <a:solidFill>
-                  <a:srgbClr val="262626"/>
-                </a:solidFill>
-                <a:latin typeface="PingFang SC" panose="020B0400000000000000" charset="-122"/>
-                <a:ea typeface="PingFang SC" panose="020B0400000000000000" charset="-122"/>
-              </a:rPr>
-              <a:t> 对、按位 DP 至少 O(N)，对 10</a:t>
-            </a:r>
-            <a:r>
-              <a:rPr sz="2000" b="0" i="0" baseline="30000">
-                <a:solidFill>
-                  <a:srgbClr val="262626"/>
-                </a:solidFill>
-                <a:latin typeface="PingFang SC" panose="020B0400000000000000" charset="-122"/>
-                <a:ea typeface="PingFang SC" panose="020B0400000000000000" charset="-122"/>
-              </a:rPr>
-              <a:t>18</a:t>
-            </a:r>
-            <a:r>
-              <a:rPr sz="2000" b="0" i="0">
-                <a:solidFill>
-                  <a:srgbClr val="262626"/>
-                </a:solidFill>
-                <a:latin typeface="PingFang SC" panose="020B0400000000000000" charset="-122"/>
-                <a:ea typeface="PingFang SC" panose="020B0400000000000000" charset="-122"/>
-              </a:rPr>
-              <a:t> 都不可行</a:t>
-            </a:r>
-            <a:endParaRPr sz="2000" b="0" i="0">
-              <a:solidFill>
-                <a:srgbClr val="262626"/>
-              </a:solidFill>
-              <a:latin typeface="PingFang SC" panose="020B0400000000000000" charset="-122"/>
-              <a:ea typeface="PingFang SC" panose="020B0400000000000000" charset="-122"/>
-            </a:endParaRPr>
-          </a:p>
-          <a:p>
-            <a:pPr>
-              <a:spcAft>
-                <a:spcPts val="1200"/>
-              </a:spcAft>
-            </a:pPr>
-            <a:r>
-              <a:rPr sz="2000" b="1" i="0">
-                <a:solidFill>
-                  <a:srgbClr val="2E75B6"/>
-                </a:solidFill>
-                <a:latin typeface="PingFang SC" panose="020B0400000000000000" charset="-122"/>
-                <a:ea typeface="PingFang SC" panose="020B0400000000000000" charset="-122"/>
-              </a:rPr>
-              <a:t>▪ </a:t>
-            </a:r>
-            <a:r>
-              <a:rPr sz="2000" b="0" i="0">
-                <a:solidFill>
-                  <a:srgbClr val="262626"/>
-                </a:solidFill>
-                <a:latin typeface="PingFang SC" panose="020B0400000000000000" charset="-122"/>
-                <a:ea typeface="PingFang SC" panose="020B0400000000000000" charset="-122"/>
-              </a:rPr>
-              <a:t>答案只与 N 有关（a、b 不出现），暗示闭式公式存在</a:t>
-            </a:r>
-            <a:endParaRPr sz="2000" b="0" i="0">
-              <a:solidFill>
-                <a:srgbClr val="262626"/>
-              </a:solidFill>
-              <a:latin typeface="PingFang SC" panose="020B0400000000000000" charset="-122"/>
-              <a:ea typeface="PingFang SC" panose="020B0400000000000000" charset="-122"/>
-            </a:endParaRPr>
-          </a:p>
-        </p:txBody>
-      </p:sp>
-      <p:sp>
-        <p:nvSpPr>
-          <p:cNvPr id="9" name="Rounded Rectangle 8"/>
-          <p:cNvSpPr/>
-          <p:nvPr/>
-        </p:nvSpPr>
-        <p:spPr>
-          <a:xfrm>
-            <a:off x="822960" y="4526280"/>
-            <a:ext cx="10515600" cy="1371600"/>
-          </a:xfrm>
-          <a:prstGeom prst="roundRect">
-            <a:avLst/>
-          </a:prstGeom>
-          <a:solidFill>
-            <a:srgbClr val="DCE9F7"/>
-          </a:solidFill>
-          <a:ln>
-            <a:noFill/>
-          </a:ln>
-          <a:effectLst/>
-        </p:spPr>
-        <p:style>
-          <a:lnRef idx="1">
-            <a:schemeClr val="accent1"/>
-          </a:lnRef>
-          <a:fillRef idx="3">
-            <a:schemeClr val="accent1"/>
-          </a:fillRef>
-          <a:effectRef idx="2">
-            <a:schemeClr val="accent1"/>
-          </a:effectRef>
-          <a:fontRef idx="minor">
-            <a:schemeClr val="lt1"/>
-          </a:fontRef>
-        </p:style>
-        <p:txBody>
-          <a:bodyPr wrap="square" lIns="274320" rtlCol="0" anchor="ctr"/>
-          <a:lstStyle/>
-          <a:p>
-            <a:pPr algn="ctr"/>
-            <a:r>
-              <a:rPr sz="1900" b="1" i="0">
-                <a:solidFill>
-                  <a:srgbClr val="262626"/>
-                </a:solidFill>
-                <a:latin typeface="PingFang SC" panose="020B0400000000000000" charset="-122"/>
-                <a:ea typeface="PingFang SC" panose="020B0400000000000000" charset="-122"/>
-              </a:rPr>
-              <a:t>彩蛋：合法三角形一定三边互异</a:t>
-            </a:r>
-            <a:endParaRPr sz="1900" b="1" i="0">
-              <a:solidFill>
-                <a:srgbClr val="262626"/>
-              </a:solidFill>
-              <a:latin typeface="PingFang SC" panose="020B0400000000000000" charset="-122"/>
-              <a:ea typeface="PingFang SC" panose="020B0400000000000000" charset="-122"/>
-            </a:endParaRPr>
-          </a:p>
-          <a:p>
-            <a:pPr>
-              <a:spcBef>
-                <a:spcPts val="500"/>
-              </a:spcBef>
-            </a:pPr>
-            <a:r>
-              <a:rPr sz="1700" b="0" i="0">
-                <a:solidFill>
-                  <a:srgbClr val="262626"/>
-                </a:solidFill>
-                <a:latin typeface="PingFang SC" panose="020B0400000000000000" charset="-122"/>
-                <a:ea typeface="PingFang SC" panose="020B0400000000000000" charset="-122"/>
-              </a:rPr>
-              <a:t>a = b ⇒ c = 0；a = c ⟺ a = a ⊕ b ⟺ b = 0（矛盾）；b = c 同理。所以 N = 1、2 时答案为 0 并不奇怪。</a:t>
-            </a:r>
-            <a:endParaRPr sz="1700" b="0" i="0">
-              <a:solidFill>
-                <a:srgbClr val="262626"/>
-              </a:solidFill>
-              <a:latin typeface="PingFang SC" panose="020B0400000000000000" charset="-122"/>
-              <a:ea typeface="PingFang SC" panose="020B0400000000000000" charset="-122"/>
-            </a:endParaRPr>
-          </a:p>
-        </p:txBody>
-      </p:sp>
-      <p:sp>
-        <p:nvSpPr>
-          <p:cNvPr id="10" name="TextBox 9"/>
-          <p:cNvSpPr txBox="1"/>
-          <p:nvPr/>
-        </p:nvSpPr>
-        <p:spPr>
-          <a:xfrm>
-            <a:off x="9966960" y="6473952"/>
-            <a:ext cx="1737360" cy="320040"/>
-          </a:xfrm>
-          <a:prstGeom prst="rect">
-            <a:avLst/>
-          </a:prstGeom>
-          <a:noFill/>
-        </p:spPr>
-        <p:txBody>
-          <a:bodyPr wrap="square" lIns="54864" tIns="27432" rIns="54864" bIns="27432">
-            <a:spAutoFit/>
-          </a:bodyPr>
-          <a:lstStyle/>
-          <a:p>
-            <a:pPr algn="r"/>
-            <a:r>
-              <a:rPr sz="1100" b="0" i="0">
-                <a:solidFill>
-                  <a:srgbClr val="7F7F7F"/>
-                </a:solidFill>
-                <a:latin typeface="PingFang SC" panose="020B0400000000000000" charset="-122"/>
-                <a:ea typeface="PingFang SC" panose="020B0400000000000000" charset="-122"/>
-              </a:rPr>
-              <a:t>O. Xor Triangle · 10 / 12</a:t>
-            </a:r>
-            <a:endParaRPr sz="1100" b="0" i="0">
-              <a:solidFill>
-                <a:srgbClr val="7F7F7F"/>
-              </a:solidFill>
-              <a:latin typeface="PingFang SC" panose="020B0400000000000000" charset="-122"/>
-              <a:ea typeface="PingFang SC" panose="020B0400000000000000" charset="-122"/>
-            </a:endParaRPr>
-          </a:p>
-        </p:txBody>
-      </p:sp>
-    </p:spTree>
-  </p:cSld>
-  <p:clrMapOvr>
-    <a:masterClrMapping/>
-  </p:clrMapOvr>
-</p:sld>
-</file>
-
-<file path=ppt/slides/slide12.xml><?xml version="1.0" encoding="utf-8"?>
-<p:sld xmlns:a="http://schemas.openxmlformats.org/drawingml/2006/main" xmlns:r="http://schemas.openxmlformats.org/officeDocument/2006/relationships" xmlns:p="http://schemas.openxmlformats.org/presentationml/2006/main">
-  <p:cSld>
-    <p:spTree>
-      <p:nvGrpSpPr>
-        <p:cNvPr id="1" name=""/>
-        <p:cNvGrpSpPr/>
-        <p:nvPr/>
-      </p:nvGrpSpPr>
-      <p:grpSpPr/>
-      <p:sp>
-        <p:nvSpPr>
-          <p:cNvPr id="2" name="Rectangle 1"/>
-          <p:cNvSpPr/>
-          <p:nvPr/>
-        </p:nvSpPr>
-        <p:spPr>
-          <a:xfrm>
-            <a:off x="0" y="0"/>
-            <a:ext cx="12191695" cy="914400"/>
-          </a:xfrm>
-          <a:prstGeom prst="rect">
-            <a:avLst/>
-          </a:prstGeom>
-          <a:solidFill>
-            <a:srgbClr val="1F3864"/>
-          </a:solidFill>
-          <a:ln>
-            <a:noFill/>
-          </a:ln>
-          <a:effectLst/>
-        </p:spPr>
-        <p:style>
-          <a:lnRef idx="1">
-            <a:schemeClr val="accent1"/>
-          </a:lnRef>
-          <a:fillRef idx="3">
-            <a:schemeClr val="accent1"/>
-          </a:fillRef>
-          <a:effectRef idx="2">
-            <a:schemeClr val="accent1"/>
-          </a:effectRef>
-          <a:fontRef idx="minor">
-            <a:schemeClr val="lt1"/>
-          </a:fontRef>
-        </p:style>
-        <p:txBody>
-          <a:bodyPr lIns="502920" tIns="73152" rtlCol="0" anchor="ctr"/>
-          <a:lstStyle/>
-          <a:p>
-            <a:pPr algn="ctr"/>
-            <a:r>
-              <a:rPr sz="2700" b="1" i="0">
-                <a:solidFill>
-                  <a:srgbClr val="FFFFFF"/>
-                </a:solidFill>
-                <a:latin typeface="PingFang SC" panose="020B0400000000000000" charset="-122"/>
-                <a:ea typeface="PingFang SC" panose="020B0400000000000000" charset="-122"/>
-              </a:rPr>
-              <a:t>总结</a:t>
+              <a:t>总结：一条套路线</a:t>
             </a:r>
             <a:endParaRPr sz="2700" b="1" i="0">
               <a:solidFill>
@@ -9494,7 +9356,7 @@
                 <a:latin typeface="PingFang SC" panose="020B0400000000000000" charset="-122"/>
                 <a:ea typeface="PingFang SC" panose="020B0400000000000000" charset="-122"/>
               </a:rPr>
-              <a:t>① 两条不等式</a:t>
+              <a:t>① 四种位情况</a:t>
             </a:r>
             <a:endParaRPr sz="1600" b="1" i="0">
               <a:solidFill>
@@ -9518,7 +9380,7 @@
                 <a:latin typeface="PingFang SC" panose="020B0400000000000000" charset="-122"/>
                 <a:ea typeface="PingFang SC" panose="020B0400000000000000" charset="-122"/>
               </a:rPr>
-              <a:t>上界与下界</a:t>
+              <a:t>和 vs 异或</a:t>
             </a:r>
             <a:endParaRPr sz="1300" b="0" i="0">
               <a:solidFill>
@@ -9651,7 +9513,7 @@
                 <a:latin typeface="PingFang SC" panose="020B0400000000000000" charset="-122"/>
                 <a:ea typeface="PingFang SC" panose="020B0400000000000000" charset="-122"/>
               </a:rPr>
-              <a:t>② 取等条件</a:t>
+              <a:t>② 异或自反性</a:t>
             </a:r>
             <a:endParaRPr sz="1600" b="1" i="0">
               <a:solidFill>
@@ -9675,7 +9537,7 @@
                 <a:latin typeface="PingFang SC" panose="020B0400000000000000" charset="-122"/>
                 <a:ea typeface="PingFang SC" panose="020B0400000000000000" charset="-122"/>
               </a:rPr>
-              <a:t>三个坏事件</a:t>
+              <a:t>三组对等</a:t>
             </a:r>
             <a:endParaRPr sz="1300" b="0" i="0">
               <a:solidFill>
@@ -9808,7 +9670,7 @@
                 <a:latin typeface="PingFang SC" panose="020B0400000000000000" charset="-122"/>
                 <a:ea typeface="PingFang SC" panose="020B0400000000000000" charset="-122"/>
               </a:rPr>
-              <a:t>③ 容斥计数</a:t>
+              <a:t>③ 三个位条件</a:t>
             </a:r>
             <a:endParaRPr sz="1600" b="1" i="0">
               <a:solidFill>
@@ -9832,7 +9694,7 @@
                 <a:latin typeface="PingFang SC" panose="020B0400000000000000" charset="-122"/>
                 <a:ea typeface="PingFang SC" panose="020B0400000000000000" charset="-122"/>
               </a:rPr>
-              <a:t>逐项计算</a:t>
+              <a:t>三角形消失</a:t>
             </a:r>
             <a:endParaRPr sz="1300" b="0" i="0">
               <a:solidFill>
@@ -9965,7 +9827,7 @@
                 <a:latin typeface="PingFang SC" panose="020B0400000000000000" charset="-122"/>
                 <a:ea typeface="PingFang SC" panose="020B0400000000000000" charset="-122"/>
               </a:rPr>
-              <a:t>④ 闭式公式</a:t>
+              <a:t>④ 容斥计数</a:t>
             </a:r>
             <a:endParaRPr sz="1600" b="1" i="0">
               <a:solidFill>
@@ -9989,7 +9851,7 @@
                 <a:latin typeface="PingFang SC" panose="020B0400000000000000" charset="-122"/>
                 <a:ea typeface="PingFang SC" panose="020B0400000000000000" charset="-122"/>
               </a:rPr>
-              <a:t>快速幂 O(log N)</a:t>
+              <a:t>闭式公式 + 快速幂</a:t>
             </a:r>
             <a:endParaRPr sz="1300" b="0" i="0">
               <a:solidFill>
@@ -10010,7 +9872,7 @@
         <p:spPr>
           <a:xfrm>
             <a:off x="822960" y="3154680"/>
-            <a:ext cx="10515600" cy="3017520"/>
+            <a:ext cx="10515600" cy="1798320"/>
           </a:xfrm>
           <a:prstGeom prst="rect">
             <a:avLst/>
@@ -10046,7 +9908,7 @@
                 <a:latin typeface="PingFang SC" panose="020B0400000000000000" charset="-122"/>
                 <a:ea typeface="PingFang SC" panose="020B0400000000000000" charset="-122"/>
               </a:rPr>
-              <a:t>可迁移 1：遇到</a:t>
+              <a:t>可迁移 1：比较「和」与「异或」→ 列 </a:t>
             </a:r>
             <a:r>
               <a:rPr sz="2000" b="1" i="0">
@@ -10056,7 +9918,7 @@
                 <a:latin typeface="PingFang SC" panose="020B0400000000000000" charset="-122"/>
                 <a:ea typeface="PingFang SC" panose="020B0400000000000000" charset="-122"/>
               </a:rPr>
-              <a:t>“异或 + 大小比较”</a:t>
+              <a:t>00 / 01 / 10 / 11</a:t>
             </a:r>
             <a:r>
               <a:rPr sz="2000" b="0" i="0">
@@ -10066,71 +9928,17 @@
                 <a:latin typeface="PingFang SC" panose="020B0400000000000000" charset="-122"/>
                 <a:ea typeface="PingFang SC" panose="020B0400000000000000" charset="-122"/>
               </a:rPr>
-              <a:t>先想到恒等式 </a:t>
-            </a:r>
-            <a:r>
-              <a:rPr sz="2000" b="1" i="0">
-                <a:solidFill>
-                  <a:srgbClr val="2E75B6"/>
-                </a:solidFill>
-                <a:latin typeface="PingFang SC" panose="020B0400000000000000" charset="-122"/>
-                <a:ea typeface="PingFang SC" panose="020B0400000000000000" charset="-122"/>
-              </a:rPr>
-              <a:t>a + b = a ⊕ b + 2(a &amp; b)</a:t>
-            </a:r>
-            <a:endParaRPr sz="2000" b="1" i="0">
-              <a:solidFill>
-                <a:srgbClr val="2E75B6"/>
-              </a:solidFill>
-              <a:latin typeface="PingFang SC" panose="020B0400000000000000" charset="-122"/>
-              <a:ea typeface="PingFang SC" panose="020B0400000000000000" charset="-122"/>
-            </a:endParaRPr>
-          </a:p>
-          <a:p>
-            <a:pPr>
-              <a:spcAft>
-                <a:spcPts val="1400"/>
-              </a:spcAft>
-            </a:pPr>
-            <a:r>
-              <a:rPr sz="2000" b="1" i="0">
-                <a:solidFill>
-                  <a:srgbClr val="2E75B6"/>
-                </a:solidFill>
-                <a:latin typeface="PingFang SC" panose="020B0400000000000000" charset="-122"/>
-                <a:ea typeface="PingFang SC" panose="020B0400000000000000" charset="-122"/>
-              </a:rPr>
-              <a:t>▪ </a:t>
-            </a:r>
-            <a:r>
-              <a:rPr sz="2000" b="0" i="0">
+              <a:t> 表，</a:t>
+            </a:r>
+            <a:r>
+              <a:rPr lang="zh-CN" sz="2000" b="0" i="0">
                 <a:solidFill>
                   <a:srgbClr val="262626"/>
                 </a:solidFill>
                 <a:latin typeface="PingFang SC" panose="020B0400000000000000" charset="-122"/>
                 <a:ea typeface="PingFang SC" panose="020B0400000000000000" charset="-122"/>
               </a:rPr>
-              <a:t>可迁移 2：</a:t>
-            </a:r>
-            <a:r>
-              <a:rPr sz="2000" b="1" i="0">
-                <a:solidFill>
-                  <a:srgbClr val="C55A11"/>
-                </a:solidFill>
-                <a:latin typeface="PingFang SC" panose="020B0400000000000000" charset="-122"/>
-                <a:ea typeface="PingFang SC" panose="020B0400000000000000" charset="-122"/>
-              </a:rPr>
-              <a:t>容斥计数时每个集合单独算</a:t>
-            </a:r>
-            <a:r>
-              <a:rPr sz="2000" b="0" i="0">
-                <a:solidFill>
-                  <a:srgbClr val="262626"/>
-                </a:solidFill>
-                <a:latin typeface="PingFang SC" panose="020B0400000000000000" charset="-122"/>
-                <a:ea typeface="PingFang SC" panose="020B0400000000000000" charset="-122"/>
-              </a:rPr>
-              <a:t> —— 挖 0 的细节让 |E₂| ≠ |E₁|，对称要小心</a:t>
+              <a:t>找规律</a:t>
             </a:r>
             <a:endParaRPr sz="2000" b="0" i="0">
               <a:solidFill>
@@ -10164,17 +9972,71 @@
                 <a:latin typeface="PingFang SC" panose="020B0400000000000000" charset="-122"/>
                 <a:ea typeface="PingFang SC" panose="020B0400000000000000" charset="-122"/>
               </a:rPr>
+              <a:t>可迁移 2：</a:t>
+            </a:r>
+            <a:r>
+              <a:rPr sz="2000" b="1" i="0">
+                <a:solidFill>
+                  <a:srgbClr val="2E75B6"/>
+                </a:solidFill>
+                <a:latin typeface="PingFang SC" panose="020B0400000000000000" charset="-122"/>
+                <a:ea typeface="PingFang SC" panose="020B0400000000000000" charset="-122"/>
+              </a:rPr>
+              <a:t>x ⊕ y ⊕ y = x</a:t>
+            </a:r>
+            <a:r>
+              <a:rPr sz="2000" b="0" i="0">
+                <a:solidFill>
+                  <a:srgbClr val="262626"/>
+                </a:solidFill>
+                <a:latin typeface="PingFang SC" panose="020B0400000000000000" charset="-122"/>
+                <a:ea typeface="PingFang SC" panose="020B0400000000000000" charset="-122"/>
+              </a:rPr>
+              <a:t> 让 (a,b)、(b,c)、(a,c) 三组地位对等，不必先比谁最长</a:t>
+            </a:r>
+            <a:endParaRPr sz="2000" b="0" i="0">
+              <a:solidFill>
+                <a:srgbClr val="262626"/>
+              </a:solidFill>
+              <a:latin typeface="PingFang SC" panose="020B0400000000000000" charset="-122"/>
+              <a:ea typeface="PingFang SC" panose="020B0400000000000000" charset="-122"/>
+            </a:endParaRPr>
+          </a:p>
+          <a:p>
+            <a:pPr>
+              <a:spcAft>
+                <a:spcPts val="1400"/>
+              </a:spcAft>
+            </a:pPr>
+            <a:r>
+              <a:rPr sz="2000" b="1" i="0">
+                <a:solidFill>
+                  <a:srgbClr val="2E75B6"/>
+                </a:solidFill>
+                <a:latin typeface="PingFang SC" panose="020B0400000000000000" charset="-122"/>
+                <a:ea typeface="PingFang SC" panose="020B0400000000000000" charset="-122"/>
+              </a:rPr>
+              <a:t>▪ </a:t>
+            </a:r>
+            <a:r>
+              <a:rPr sz="2000" b="0" i="0">
+                <a:solidFill>
+                  <a:srgbClr val="262626"/>
+                </a:solidFill>
+                <a:latin typeface="PingFang SC" panose="020B0400000000000000" charset="-122"/>
+                <a:ea typeface="PingFang SC" panose="020B0400000000000000" charset="-122"/>
+              </a:rPr>
               <a:t>可迁移 3：</a:t>
             </a:r>
             <a:r>
               <a:rPr sz="2000" b="1" i="0">
                 <a:solidFill>
-                  <a:srgbClr val="2E75B6"/>
-                </a:solidFill>
-                <a:latin typeface="PingFang SC" panose="020B0400000000000000" charset="-122"/>
-                <a:ea typeface="PingFang SC" panose="020B0400000000000000" charset="-122"/>
-              </a:rPr>
-              <a:t>负数先 +MOD 再取模</a:t>
+                  <a:srgbClr val="C55A11"/>
+                </a:solidFill>
+                <a:latin typeface="PingFang SC" panose="020B0400000000000000" charset="-122"/>
+                <a:ea typeface="PingFang SC" panose="020B0400000000000000" charset="-122"/>
+              </a:rPr>
+              <a:t>挖 0 细节让 |E₂| ≠ |E₁|</a:t>
             </a:r>
             <a:r>
               <a:rPr sz="2000" b="0" i="0">
@@ -10184,27 +10046,7 @@
                 <a:latin typeface="PingFang SC" panose="020B0400000000000000" charset="-122"/>
                 <a:ea typeface="PingFang SC" panose="020B0400000000000000" charset="-122"/>
               </a:rPr>
-              <a:t>；MOD² &lt; 2</a:t>
-            </a:r>
-            <a:r>
-              <a:rPr sz="2000" b="0" i="0" baseline="30000">
-                <a:solidFill>
-                  <a:srgbClr val="262626"/>
-                </a:solidFill>
-                <a:latin typeface="PingFang SC" panose="020B0400000000000000" charset="-122"/>
-                <a:ea typeface="PingFang SC" panose="020B0400000000000000" charset="-122"/>
-              </a:rPr>
-              <a:t>63</a:t>
-            </a:r>
-            <a:r>
-              <a:rPr sz="2000" b="0" i="0">
-                <a:solidFill>
-                  <a:srgbClr val="262626"/>
-                </a:solidFill>
-                <a:latin typeface="PingFang SC" panose="020B0400000000000000" charset="-122"/>
-                <a:ea typeface="PingFang SC" panose="020B0400000000000000" charset="-122"/>
-              </a:rPr>
-              <a:t>，long long 安全</a:t>
+              <a:t>；负数先+MOD 再取模</a:t>
             </a:r>
             <a:endParaRPr sz="2000" b="0" i="0">
               <a:solidFill>
@@ -10727,7 +10569,7 @@
                 <a:latin typeface="PingFang SC" panose="020B0400000000000000" charset="-122"/>
                 <a:ea typeface="PingFang SC" panose="020B0400000000000000" charset="-122"/>
               </a:rPr>
-              <a:t>：按位 DP 的 O(N) 不可行 ⇒ </a:t>
+              <a:t>：按位 DP 不可行 ⇒ </a:t>
             </a:r>
             <a:r>
               <a:rPr sz="2100" b="1" i="0">
@@ -10758,7 +10600,7 @@
         <p:spPr>
           <a:xfrm>
             <a:off x="548640" y="5760720"/>
-            <a:ext cx="11155680" cy="457200"/>
+            <a:ext cx="11155680" cy="285115"/>
           </a:xfrm>
           <a:prstGeom prst="rect">
             <a:avLst/>
@@ -10780,7 +10622,27 @@
                 <a:latin typeface="PingFang SC" panose="020B0400000000000000" charset="-122"/>
                 <a:ea typeface="PingFang SC" panose="020B0400000000000000" charset="-122"/>
               </a:rPr>
-              <a:t>直觉提示：条件完全由 a、b 的二进制位决定 —— 几何问题其实是位运算问题</a:t>
+              <a:t>条件完全由 a、b 的二进制位决定 —— </a:t>
+            </a:r>
+            <a:r>
+              <a:rPr lang="zh-CN" sz="1500" b="0" i="0">
+                <a:solidFill>
+                  <a:srgbClr val="7F7F7F"/>
+                </a:solidFill>
+                <a:latin typeface="PingFang SC" panose="020B0400000000000000" charset="-122"/>
+                <a:ea typeface="PingFang SC" panose="020B0400000000000000" charset="-122"/>
+              </a:rPr>
+              <a:t>转化为</a:t>
+            </a:r>
+            <a:r>
+              <a:rPr sz="1500" b="0" i="0">
+                <a:solidFill>
+                  <a:srgbClr val="7F7F7F"/>
+                </a:solidFill>
+                <a:latin typeface="PingFang SC" panose="020B0400000000000000" charset="-122"/>
+                <a:ea typeface="PingFang SC" panose="020B0400000000000000" charset="-122"/>
+              </a:rPr>
+              <a:t>位运算问题</a:t>
             </a:r>
             <a:endParaRPr sz="1500" b="0" i="0">
               <a:solidFill>
@@ -10902,7 +10764,7 @@
                 <a:latin typeface="PingFang SC" panose="020B0400000000000000" charset="-122"/>
                 <a:ea typeface="PingFang SC" panose="020B0400000000000000" charset="-122"/>
               </a:rPr>
-              <a:t>关键观察：两条异或不等式</a:t>
+              <a:t>关键观察：a + b ≥ a ⊕ b（四种位情况）</a:t>
             </a:r>
             <a:endParaRPr sz="2700" b="1" i="0">
               <a:solidFill>
@@ -10958,16 +10820,795 @@
           </a:p>
         </p:txBody>
       </p:sp>
-      <p:sp>
-        <p:nvSpPr>
-          <p:cNvPr id="4" name="Rounded Rectangle 3"/>
+      <p:graphicFrame>
+        <p:nvGraphicFramePr>
+          <p:cNvPr id="4" name="Table 3"/>
+          <p:cNvGraphicFramePr>
+            <a:graphicFrameLocks noGrp="1"/>
+          </p:cNvGraphicFramePr>
+          <p:nvPr/>
+        </p:nvGraphicFramePr>
+        <p:xfrm>
+          <a:off x="822960" y="1417320"/>
+          <a:ext cx="6400800" cy="2743200"/>
+        </p:xfrm>
+        <a:graphic>
+          <a:graphicData uri="http://schemas.openxmlformats.org/drawingml/2006/table">
+            <a:tbl>
+              <a:tblPr>
+                <a:tableStyleId>{5C22544A-7EE6-4342-B048-85BDC9FD1C3A}</a:tableStyleId>
+              </a:tblPr>
+              <a:tblGrid>
+                <a:gridCol w="1371600"/>
+                <a:gridCol w="1463040"/>
+                <a:gridCol w="1463040"/>
+                <a:gridCol w="2103120"/>
+              </a:tblGrid>
+              <a:tr h="548640">
+                <a:tc>
+                  <a:txBody>
+                    <a:bodyPr/>
+                    <a:lstStyle/>
+                    <a:p>
+                      <a:pPr algn="ctr"/>
+                      <a:r>
+                        <a:rPr sz="1500" b="1" i="0">
+                          <a:solidFill>
+                            <a:srgbClr val="1F3864"/>
+                          </a:solidFill>
+                          <a:latin typeface="PingFang SC" panose="020B0400000000000000" charset="-122"/>
+                          <a:ea typeface="PingFang SC" panose="020B0400000000000000" charset="-122"/>
+                        </a:rPr>
+                        <a:t>(aᵢ, bᵢ)</a:t>
+                      </a:r>
+                      <a:endParaRPr sz="1500" b="1" i="0">
+                        <a:solidFill>
+                          <a:srgbClr val="1F3864"/>
+                        </a:solidFill>
+                        <a:latin typeface="PingFang SC" panose="020B0400000000000000" charset="-122"/>
+                        <a:ea typeface="PingFang SC" panose="020B0400000000000000" charset="-122"/>
+                      </a:endParaRPr>
+                    </a:p>
+                  </a:txBody>
+                  <a:tcPr marR="54864" marT="18288" marB="18288" anchor="ctr">
+                    <a:solidFill>
+                      <a:srgbClr val="DCE9F7"/>
+                    </a:solidFill>
+                  </a:tcPr>
+                </a:tc>
+                <a:tc>
+                  <a:txBody>
+                    <a:bodyPr/>
+                    <a:lstStyle/>
+                    <a:p>
+                      <a:pPr algn="ctr"/>
+                      <a:r>
+                        <a:rPr sz="1500" b="1" i="0">
+                          <a:solidFill>
+                            <a:srgbClr val="1F3864"/>
+                          </a:solidFill>
+                          <a:latin typeface="PingFang SC" panose="020B0400000000000000" charset="-122"/>
+                          <a:ea typeface="PingFang SC" panose="020B0400000000000000" charset="-122"/>
+                        </a:rPr>
+                        <a:t>加法 aᵢ + bᵢ</a:t>
+                      </a:r>
+                      <a:endParaRPr sz="1500" b="1" i="0">
+                        <a:solidFill>
+                          <a:srgbClr val="1F3864"/>
+                        </a:solidFill>
+                        <a:latin typeface="PingFang SC" panose="020B0400000000000000" charset="-122"/>
+                        <a:ea typeface="PingFang SC" panose="020B0400000000000000" charset="-122"/>
+                      </a:endParaRPr>
+                    </a:p>
+                  </a:txBody>
+                  <a:tcPr marR="54864" marT="18288" marB="18288" anchor="ctr">
+                    <a:solidFill>
+                      <a:srgbClr val="DCE9F7"/>
+                    </a:solidFill>
+                  </a:tcPr>
+                </a:tc>
+                <a:tc>
+                  <a:txBody>
+                    <a:bodyPr/>
+                    <a:lstStyle/>
+                    <a:p>
+                      <a:pPr algn="ctr"/>
+                      <a:r>
+                        <a:rPr sz="1500" b="1" i="0">
+                          <a:solidFill>
+                            <a:srgbClr val="1F3864"/>
+                          </a:solidFill>
+                          <a:latin typeface="PingFang SC" panose="020B0400000000000000" charset="-122"/>
+                          <a:ea typeface="PingFang SC" panose="020B0400000000000000" charset="-122"/>
+                        </a:rPr>
+                        <a:t>异或 aᵢ ⊕ bᵢ</a:t>
+                      </a:r>
+                      <a:endParaRPr sz="1500" b="1" i="0">
+                        <a:solidFill>
+                          <a:srgbClr val="1F3864"/>
+                        </a:solidFill>
+                        <a:latin typeface="PingFang SC" panose="020B0400000000000000" charset="-122"/>
+                        <a:ea typeface="PingFang SC" panose="020B0400000000000000" charset="-122"/>
+                      </a:endParaRPr>
+                    </a:p>
+                  </a:txBody>
+                  <a:tcPr marR="54864" marT="18288" marB="18288" anchor="ctr">
+                    <a:solidFill>
+                      <a:srgbClr val="DCE9F7"/>
+                    </a:solidFill>
+                  </a:tcPr>
+                </a:tc>
+                <a:tc>
+                  <a:txBody>
+                    <a:bodyPr/>
+                    <a:lstStyle/>
+                    <a:p>
+                      <a:pPr algn="ctr"/>
+                      <a:r>
+                        <a:rPr sz="1500" b="1" i="0">
+                          <a:solidFill>
+                            <a:srgbClr val="1F3864"/>
+                          </a:solidFill>
+                          <a:latin typeface="PingFang SC" panose="020B0400000000000000" charset="-122"/>
+                          <a:ea typeface="PingFang SC" panose="020B0400000000000000" charset="-122"/>
+                        </a:rPr>
+                        <a:t>结论</a:t>
+                      </a:r>
+                      <a:endParaRPr sz="1500" b="1" i="0">
+                        <a:solidFill>
+                          <a:srgbClr val="1F3864"/>
+                        </a:solidFill>
+                        <a:latin typeface="PingFang SC" panose="020B0400000000000000" charset="-122"/>
+                        <a:ea typeface="PingFang SC" panose="020B0400000000000000" charset="-122"/>
+                      </a:endParaRPr>
+                    </a:p>
+                  </a:txBody>
+                  <a:tcPr marR="54864" marT="18288" marB="18288" anchor="ctr">
+                    <a:solidFill>
+                      <a:srgbClr val="DCE9F7"/>
+                    </a:solidFill>
+                  </a:tcPr>
+                </a:tc>
+              </a:tr>
+              <a:tr h="548640">
+                <a:tc>
+                  <a:txBody>
+                    <a:bodyPr/>
+                    <a:lstStyle/>
+                    <a:p>
+                      <a:pPr algn="ctr"/>
+                      <a:r>
+                        <a:rPr sz="1600" b="0" i="0">
+                          <a:solidFill>
+                            <a:srgbClr val="262626"/>
+                          </a:solidFill>
+                          <a:latin typeface="PingFang SC" panose="020B0400000000000000" charset="-122"/>
+                          <a:ea typeface="PingFang SC" panose="020B0400000000000000" charset="-122"/>
+                        </a:rPr>
+                        <a:t>0 0</a:t>
+                      </a:r>
+                      <a:endParaRPr sz="1600" b="0" i="0">
+                        <a:solidFill>
+                          <a:srgbClr val="262626"/>
+                        </a:solidFill>
+                        <a:latin typeface="PingFang SC" panose="020B0400000000000000" charset="-122"/>
+                        <a:ea typeface="PingFang SC" panose="020B0400000000000000" charset="-122"/>
+                      </a:endParaRPr>
+                    </a:p>
+                  </a:txBody>
+                  <a:tcPr marR="54864" marT="18288" marB="18288" anchor="ctr">
+                    <a:solidFill>
+                      <a:srgbClr val="FFFFFF"/>
+                    </a:solidFill>
+                  </a:tcPr>
+                </a:tc>
+                <a:tc>
+                  <a:txBody>
+                    <a:bodyPr/>
+                    <a:lstStyle/>
+                    <a:p>
+                      <a:pPr algn="ctr"/>
+                      <a:r>
+                        <a:rPr sz="1600" b="0" i="0">
+                          <a:solidFill>
+                            <a:srgbClr val="262626"/>
+                          </a:solidFill>
+                          <a:latin typeface="PingFang SC" panose="020B0400000000000000" charset="-122"/>
+                          <a:ea typeface="PingFang SC" panose="020B0400000000000000" charset="-122"/>
+                        </a:rPr>
+                        <a:t>0</a:t>
+                      </a:r>
+                      <a:endParaRPr sz="1600" b="0" i="0">
+                        <a:solidFill>
+                          <a:srgbClr val="262626"/>
+                        </a:solidFill>
+                        <a:latin typeface="PingFang SC" panose="020B0400000000000000" charset="-122"/>
+                        <a:ea typeface="PingFang SC" panose="020B0400000000000000" charset="-122"/>
+                      </a:endParaRPr>
+                    </a:p>
+                  </a:txBody>
+                  <a:tcPr marR="54864" marT="18288" marB="18288" anchor="ctr">
+                    <a:solidFill>
+                      <a:srgbClr val="FFFFFF"/>
+                    </a:solidFill>
+                  </a:tcPr>
+                </a:tc>
+                <a:tc>
+                  <a:txBody>
+                    <a:bodyPr/>
+                    <a:lstStyle/>
+                    <a:p>
+                      <a:pPr algn="ctr"/>
+                      <a:r>
+                        <a:rPr sz="1600" b="0" i="0">
+                          <a:solidFill>
+                            <a:srgbClr val="262626"/>
+                          </a:solidFill>
+                          <a:latin typeface="PingFang SC" panose="020B0400000000000000" charset="-122"/>
+                          <a:ea typeface="PingFang SC" panose="020B0400000000000000" charset="-122"/>
+                        </a:rPr>
+                        <a:t>0</a:t>
+                      </a:r>
+                      <a:endParaRPr sz="1600" b="0" i="0">
+                        <a:solidFill>
+                          <a:srgbClr val="262626"/>
+                        </a:solidFill>
+                        <a:latin typeface="PingFang SC" panose="020B0400000000000000" charset="-122"/>
+                        <a:ea typeface="PingFang SC" panose="020B0400000000000000" charset="-122"/>
+                      </a:endParaRPr>
+                    </a:p>
+                  </a:txBody>
+                  <a:tcPr marR="54864" marT="18288" marB="18288" anchor="ctr">
+                    <a:solidFill>
+                      <a:srgbClr val="FFFFFF"/>
+                    </a:solidFill>
+                  </a:tcPr>
+                </a:tc>
+                <a:tc>
+                  <a:txBody>
+                    <a:bodyPr/>
+                    <a:lstStyle/>
+                    <a:p>
+                      <a:pPr algn="ctr"/>
+                      <a:r>
+                        <a:rPr sz="1600" b="0" i="0">
+                          <a:solidFill>
+                            <a:srgbClr val="262626"/>
+                          </a:solidFill>
+                          <a:latin typeface="PingFang SC" panose="020B0400000000000000" charset="-122"/>
+                          <a:ea typeface="PingFang SC" panose="020B0400000000000000" charset="-122"/>
+                        </a:rPr>
+                        <a:t>相等</a:t>
+                      </a:r>
+                      <a:endParaRPr sz="1600" b="0" i="0">
+                        <a:solidFill>
+                          <a:srgbClr val="262626"/>
+                        </a:solidFill>
+                        <a:latin typeface="PingFang SC" panose="020B0400000000000000" charset="-122"/>
+                        <a:ea typeface="PingFang SC" panose="020B0400000000000000" charset="-122"/>
+                      </a:endParaRPr>
+                    </a:p>
+                  </a:txBody>
+                  <a:tcPr marR="54864" marT="18288" marB="18288" anchor="ctr">
+                    <a:solidFill>
+                      <a:srgbClr val="FFFFFF"/>
+                    </a:solidFill>
+                  </a:tcPr>
+                </a:tc>
+              </a:tr>
+              <a:tr h="548640">
+                <a:tc>
+                  <a:txBody>
+                    <a:bodyPr/>
+                    <a:lstStyle/>
+                    <a:p>
+                      <a:pPr algn="ctr"/>
+                      <a:r>
+                        <a:rPr sz="1600" b="0" i="0">
+                          <a:solidFill>
+                            <a:srgbClr val="262626"/>
+                          </a:solidFill>
+                          <a:latin typeface="PingFang SC" panose="020B0400000000000000" charset="-122"/>
+                          <a:ea typeface="PingFang SC" panose="020B0400000000000000" charset="-122"/>
+                        </a:rPr>
+                        <a:t>0 1</a:t>
+                      </a:r>
+                      <a:endParaRPr sz="1600" b="0" i="0">
+                        <a:solidFill>
+                          <a:srgbClr val="262626"/>
+                        </a:solidFill>
+                        <a:latin typeface="PingFang SC" panose="020B0400000000000000" charset="-122"/>
+                        <a:ea typeface="PingFang SC" panose="020B0400000000000000" charset="-122"/>
+                      </a:endParaRPr>
+                    </a:p>
+                  </a:txBody>
+                  <a:tcPr marR="54864" marT="18288" marB="18288" anchor="ctr">
+                    <a:solidFill>
+                      <a:srgbClr val="FFFFFF"/>
+                    </a:solidFill>
+                  </a:tcPr>
+                </a:tc>
+                <a:tc>
+                  <a:txBody>
+                    <a:bodyPr/>
+                    <a:lstStyle/>
+                    <a:p>
+                      <a:pPr algn="ctr"/>
+                      <a:r>
+                        <a:rPr sz="1600" b="0" i="0">
+                          <a:solidFill>
+                            <a:srgbClr val="262626"/>
+                          </a:solidFill>
+                          <a:latin typeface="PingFang SC" panose="020B0400000000000000" charset="-122"/>
+                          <a:ea typeface="PingFang SC" panose="020B0400000000000000" charset="-122"/>
+                        </a:rPr>
+                        <a:t>1</a:t>
+                      </a:r>
+                      <a:endParaRPr sz="1600" b="0" i="0">
+                        <a:solidFill>
+                          <a:srgbClr val="262626"/>
+                        </a:solidFill>
+                        <a:latin typeface="PingFang SC" panose="020B0400000000000000" charset="-122"/>
+                        <a:ea typeface="PingFang SC" panose="020B0400000000000000" charset="-122"/>
+                      </a:endParaRPr>
+                    </a:p>
+                  </a:txBody>
+                  <a:tcPr marR="54864" marT="18288" marB="18288" anchor="ctr">
+                    <a:solidFill>
+                      <a:srgbClr val="FFFFFF"/>
+                    </a:solidFill>
+                  </a:tcPr>
+                </a:tc>
+                <a:tc>
+                  <a:txBody>
+                    <a:bodyPr/>
+                    <a:lstStyle/>
+                    <a:p>
+                      <a:pPr algn="ctr"/>
+                      <a:r>
+                        <a:rPr sz="1600" b="0" i="0">
+                          <a:solidFill>
+                            <a:srgbClr val="262626"/>
+                          </a:solidFill>
+                          <a:latin typeface="PingFang SC" panose="020B0400000000000000" charset="-122"/>
+                          <a:ea typeface="PingFang SC" panose="020B0400000000000000" charset="-122"/>
+                        </a:rPr>
+                        <a:t>1</a:t>
+                      </a:r>
+                      <a:endParaRPr sz="1600" b="0" i="0">
+                        <a:solidFill>
+                          <a:srgbClr val="262626"/>
+                        </a:solidFill>
+                        <a:latin typeface="PingFang SC" panose="020B0400000000000000" charset="-122"/>
+                        <a:ea typeface="PingFang SC" panose="020B0400000000000000" charset="-122"/>
+                      </a:endParaRPr>
+                    </a:p>
+                  </a:txBody>
+                  <a:tcPr marR="54864" marT="18288" marB="18288" anchor="ctr">
+                    <a:solidFill>
+                      <a:srgbClr val="FFFFFF"/>
+                    </a:solidFill>
+                  </a:tcPr>
+                </a:tc>
+                <a:tc>
+                  <a:txBody>
+                    <a:bodyPr/>
+                    <a:lstStyle/>
+                    <a:p>
+                      <a:pPr algn="ctr"/>
+                      <a:r>
+                        <a:rPr sz="1600" b="0" i="0">
+                          <a:solidFill>
+                            <a:srgbClr val="262626"/>
+                          </a:solidFill>
+                          <a:latin typeface="PingFang SC" panose="020B0400000000000000" charset="-122"/>
+                          <a:ea typeface="PingFang SC" panose="020B0400000000000000" charset="-122"/>
+                        </a:rPr>
+                        <a:t>相等</a:t>
+                      </a:r>
+                      <a:endParaRPr sz="1600" b="0" i="0">
+                        <a:solidFill>
+                          <a:srgbClr val="262626"/>
+                        </a:solidFill>
+                        <a:latin typeface="PingFang SC" panose="020B0400000000000000" charset="-122"/>
+                        <a:ea typeface="PingFang SC" panose="020B0400000000000000" charset="-122"/>
+                      </a:endParaRPr>
+                    </a:p>
+                  </a:txBody>
+                  <a:tcPr marR="54864" marT="18288" marB="18288" anchor="ctr">
+                    <a:solidFill>
+                      <a:srgbClr val="FFFFFF"/>
+                    </a:solidFill>
+                  </a:tcPr>
+                </a:tc>
+              </a:tr>
+              <a:tr h="548640">
+                <a:tc>
+                  <a:txBody>
+                    <a:bodyPr/>
+                    <a:lstStyle/>
+                    <a:p>
+                      <a:pPr algn="ctr"/>
+                      <a:r>
+                        <a:rPr sz="1600" b="0" i="0">
+                          <a:solidFill>
+                            <a:srgbClr val="262626"/>
+                          </a:solidFill>
+                          <a:latin typeface="PingFang SC" panose="020B0400000000000000" charset="-122"/>
+                          <a:ea typeface="PingFang SC" panose="020B0400000000000000" charset="-122"/>
+                        </a:rPr>
+                        <a:t>1 0</a:t>
+                      </a:r>
+                      <a:endParaRPr sz="1600" b="0" i="0">
+                        <a:solidFill>
+                          <a:srgbClr val="262626"/>
+                        </a:solidFill>
+                        <a:latin typeface="PingFang SC" panose="020B0400000000000000" charset="-122"/>
+                        <a:ea typeface="PingFang SC" panose="020B0400000000000000" charset="-122"/>
+                      </a:endParaRPr>
+                    </a:p>
+                  </a:txBody>
+                  <a:tcPr marR="54864" marT="18288" marB="18288" anchor="ctr">
+                    <a:solidFill>
+                      <a:srgbClr val="FFFFFF"/>
+                    </a:solidFill>
+                  </a:tcPr>
+                </a:tc>
+                <a:tc>
+                  <a:txBody>
+                    <a:bodyPr/>
+                    <a:lstStyle/>
+                    <a:p>
+                      <a:pPr algn="ctr"/>
+                      <a:r>
+                        <a:rPr sz="1600" b="0" i="0">
+                          <a:solidFill>
+                            <a:srgbClr val="262626"/>
+                          </a:solidFill>
+                          <a:latin typeface="PingFang SC" panose="020B0400000000000000" charset="-122"/>
+                          <a:ea typeface="PingFang SC" panose="020B0400000000000000" charset="-122"/>
+                        </a:rPr>
+                        <a:t>1</a:t>
+                      </a:r>
+                      <a:endParaRPr sz="1600" b="0" i="0">
+                        <a:solidFill>
+                          <a:srgbClr val="262626"/>
+                        </a:solidFill>
+                        <a:latin typeface="PingFang SC" panose="020B0400000000000000" charset="-122"/>
+                        <a:ea typeface="PingFang SC" panose="020B0400000000000000" charset="-122"/>
+                      </a:endParaRPr>
+                    </a:p>
+                  </a:txBody>
+                  <a:tcPr marR="54864" marT="18288" marB="18288" anchor="ctr">
+                    <a:solidFill>
+                      <a:srgbClr val="FFFFFF"/>
+                    </a:solidFill>
+                  </a:tcPr>
+                </a:tc>
+                <a:tc>
+                  <a:txBody>
+                    <a:bodyPr/>
+                    <a:lstStyle/>
+                    <a:p>
+                      <a:pPr algn="ctr"/>
+                      <a:r>
+                        <a:rPr sz="1600" b="0" i="0">
+                          <a:solidFill>
+                            <a:srgbClr val="262626"/>
+                          </a:solidFill>
+                          <a:latin typeface="PingFang SC" panose="020B0400000000000000" charset="-122"/>
+                          <a:ea typeface="PingFang SC" panose="020B0400000000000000" charset="-122"/>
+                        </a:rPr>
+                        <a:t>1</a:t>
+                      </a:r>
+                      <a:endParaRPr sz="1600" b="0" i="0">
+                        <a:solidFill>
+                          <a:srgbClr val="262626"/>
+                        </a:solidFill>
+                        <a:latin typeface="PingFang SC" panose="020B0400000000000000" charset="-122"/>
+                        <a:ea typeface="PingFang SC" panose="020B0400000000000000" charset="-122"/>
+                      </a:endParaRPr>
+                    </a:p>
+                  </a:txBody>
+                  <a:tcPr marR="54864" marT="18288" marB="18288" anchor="ctr">
+                    <a:solidFill>
+                      <a:srgbClr val="FFFFFF"/>
+                    </a:solidFill>
+                  </a:tcPr>
+                </a:tc>
+                <a:tc>
+                  <a:txBody>
+                    <a:bodyPr/>
+                    <a:lstStyle/>
+                    <a:p>
+                      <a:pPr algn="ctr"/>
+                      <a:r>
+                        <a:rPr sz="1600" b="0" i="0">
+                          <a:solidFill>
+                            <a:srgbClr val="262626"/>
+                          </a:solidFill>
+                          <a:latin typeface="PingFang SC" panose="020B0400000000000000" charset="-122"/>
+                          <a:ea typeface="PingFang SC" panose="020B0400000000000000" charset="-122"/>
+                        </a:rPr>
+                        <a:t>相等</a:t>
+                      </a:r>
+                      <a:endParaRPr sz="1600" b="0" i="0">
+                        <a:solidFill>
+                          <a:srgbClr val="262626"/>
+                        </a:solidFill>
+                        <a:latin typeface="PingFang SC" panose="020B0400000000000000" charset="-122"/>
+                        <a:ea typeface="PingFang SC" panose="020B0400000000000000" charset="-122"/>
+                      </a:endParaRPr>
+                    </a:p>
+                  </a:txBody>
+                  <a:tcPr marR="54864" marT="18288" marB="18288" anchor="ctr">
+                    <a:solidFill>
+                      <a:srgbClr val="FFFFFF"/>
+                    </a:solidFill>
+                  </a:tcPr>
+                </a:tc>
+              </a:tr>
+              <a:tr h="548640">
+                <a:tc>
+                  <a:txBody>
+                    <a:bodyPr/>
+                    <a:lstStyle/>
+                    <a:p>
+                      <a:pPr algn="ctr"/>
+                      <a:r>
+                        <a:rPr sz="1600" b="1" i="0">
+                          <a:solidFill>
+                            <a:srgbClr val="C55A11"/>
+                          </a:solidFill>
+                          <a:latin typeface="PingFang SC" panose="020B0400000000000000" charset="-122"/>
+                          <a:ea typeface="PingFang SC" panose="020B0400000000000000" charset="-122"/>
+                        </a:rPr>
+                        <a:t>1 1</a:t>
+                      </a:r>
+                      <a:endParaRPr sz="1600" b="1" i="0">
+                        <a:solidFill>
+                          <a:srgbClr val="C55A11"/>
+                        </a:solidFill>
+                        <a:latin typeface="PingFang SC" panose="020B0400000000000000" charset="-122"/>
+                        <a:ea typeface="PingFang SC" panose="020B0400000000000000" charset="-122"/>
+                      </a:endParaRPr>
+                    </a:p>
+                  </a:txBody>
+                  <a:tcPr marR="54864" marT="18288" marB="18288" anchor="ctr">
+                    <a:solidFill>
+                      <a:srgbClr val="FCE4D6"/>
+                    </a:solidFill>
+                  </a:tcPr>
+                </a:tc>
+                <a:tc>
+                  <a:txBody>
+                    <a:bodyPr/>
+                    <a:lstStyle/>
+                    <a:p>
+                      <a:pPr algn="ctr"/>
+                      <a:r>
+                        <a:rPr sz="1600" b="1" i="0">
+                          <a:solidFill>
+                            <a:srgbClr val="C55A11"/>
+                          </a:solidFill>
+                          <a:latin typeface="PingFang SC" panose="020B0400000000000000" charset="-122"/>
+                          <a:ea typeface="PingFang SC" panose="020B0400000000000000" charset="-122"/>
+                        </a:rPr>
+                        <a:t>2</a:t>
+                      </a:r>
+                      <a:endParaRPr lang="en-US" altLang="zh-CN" sz="1600" b="1" i="0">
+                        <a:solidFill>
+                          <a:srgbClr val="C55A11"/>
+                        </a:solidFill>
+                        <a:latin typeface="PingFang SC" panose="020B0400000000000000" charset="-122"/>
+                        <a:ea typeface="PingFang SC" panose="020B0400000000000000" charset="-122"/>
+                      </a:endParaRPr>
+                    </a:p>
+                  </a:txBody>
+                  <a:tcPr marR="54864" marT="18288" marB="18288" anchor="ctr">
+                    <a:solidFill>
+                      <a:srgbClr val="FCE4D6"/>
+                    </a:solidFill>
+                  </a:tcPr>
+                </a:tc>
+                <a:tc>
+                  <a:txBody>
+                    <a:bodyPr/>
+                    <a:lstStyle/>
+                    <a:p>
+                      <a:pPr algn="ctr"/>
+                      <a:r>
+                        <a:rPr sz="1600" b="1" i="0">
+                          <a:solidFill>
+                            <a:srgbClr val="C55A11"/>
+                          </a:solidFill>
+                          <a:latin typeface="PingFang SC" panose="020B0400000000000000" charset="-122"/>
+                          <a:ea typeface="PingFang SC" panose="020B0400000000000000" charset="-122"/>
+                        </a:rPr>
+                        <a:t>0</a:t>
+                      </a:r>
+                      <a:endParaRPr sz="1600" b="1" i="0">
+                        <a:solidFill>
+                          <a:srgbClr val="C55A11"/>
+                        </a:solidFill>
+                        <a:latin typeface="PingFang SC" panose="020B0400000000000000" charset="-122"/>
+                        <a:ea typeface="PingFang SC" panose="020B0400000000000000" charset="-122"/>
+                      </a:endParaRPr>
+                    </a:p>
+                  </a:txBody>
+                  <a:tcPr marR="54864" marT="18288" marB="18288" anchor="ctr">
+                    <a:solidFill>
+                      <a:srgbClr val="FCE4D6"/>
+                    </a:solidFill>
+                  </a:tcPr>
+                </a:tc>
+                <a:tc>
+                  <a:txBody>
+                    <a:bodyPr/>
+                    <a:lstStyle/>
+                    <a:p>
+                      <a:pPr algn="ctr"/>
+                      <a:r>
+                        <a:rPr sz="1600" b="1" i="0">
+                          <a:solidFill>
+                            <a:srgbClr val="C55A11"/>
+                          </a:solidFill>
+                          <a:latin typeface="PingFang SC" panose="020B0400000000000000" charset="-122"/>
+                          <a:ea typeface="PingFang SC" panose="020B0400000000000000" charset="-122"/>
+                        </a:rPr>
+                        <a:t>和 &gt; 异或</a:t>
+                      </a:r>
+                      <a:endParaRPr sz="1600" b="1" i="0">
+                        <a:solidFill>
+                          <a:srgbClr val="C55A11"/>
+                        </a:solidFill>
+                        <a:latin typeface="PingFang SC" panose="020B0400000000000000" charset="-122"/>
+                        <a:ea typeface="PingFang SC" panose="020B0400000000000000" charset="-122"/>
+                      </a:endParaRPr>
+                    </a:p>
+                  </a:txBody>
+                  <a:tcPr marR="54864" marT="18288" marB="18288" anchor="ctr">
+                    <a:solidFill>
+                      <a:srgbClr val="FCE4D6"/>
+                    </a:solidFill>
+                  </a:tcPr>
+                </a:tc>
+              </a:tr>
+            </a:tbl>
+          </a:graphicData>
+        </a:graphic>
+      </p:graphicFrame>
+      <p:sp>
+        <p:nvSpPr>
+          <p:cNvPr id="5" name="TextBox 4"/>
+          <p:cNvSpPr txBox="1"/>
+          <p:nvPr/>
+        </p:nvSpPr>
+        <p:spPr>
+          <a:xfrm>
+            <a:off x="7452360" y="1600200"/>
+            <a:ext cx="4206240" cy="788035"/>
+          </a:xfrm>
+          <a:prstGeom prst="rect">
+            <a:avLst/>
+          </a:prstGeom>
+          <a:noFill/>
+        </p:spPr>
+        <p:txBody>
+          <a:bodyPr wrap="square" lIns="54864" tIns="27432" rIns="54864" bIns="27432">
+            <a:spAutoFit/>
+          </a:bodyPr>
+          <a:lstStyle/>
+          <a:p>
+            <a:pPr>
+              <a:spcAft>
+                <a:spcPts val="1400"/>
+              </a:spcAft>
+            </a:pPr>
+            <a:r>
+              <a:rPr sz="1800" b="1" i="0">
+                <a:solidFill>
+                  <a:srgbClr val="2E75B6"/>
+                </a:solidFill>
+                <a:latin typeface="PingFang SC" panose="020B0400000000000000" charset="-122"/>
+                <a:ea typeface="PingFang SC" panose="020B0400000000000000" charset="-122"/>
+              </a:rPr>
+              <a:t>▪ </a:t>
+            </a:r>
+            <a:r>
+              <a:rPr sz="1800" b="0" i="0">
+                <a:solidFill>
+                  <a:srgbClr val="262626"/>
+                </a:solidFill>
+                <a:latin typeface="PingFang SC" panose="020B0400000000000000" charset="-122"/>
+                <a:ea typeface="PingFang SC" panose="020B0400000000000000" charset="-122"/>
+              </a:rPr>
+              <a:t>只有 </a:t>
+            </a:r>
+            <a:r>
+              <a:rPr sz="1800" b="1" i="0">
+                <a:solidFill>
+                  <a:srgbClr val="2E75B6"/>
+                </a:solidFill>
+                <a:latin typeface="PingFang SC" panose="020B0400000000000000" charset="-122"/>
+                <a:ea typeface="PingFang SC" panose="020B0400000000000000" charset="-122"/>
+              </a:rPr>
+              <a:t>“11”</a:t>
+            </a:r>
+            <a:r>
+              <a:rPr sz="1800" b="0" i="0">
+                <a:solidFill>
+                  <a:srgbClr val="262626"/>
+                </a:solidFill>
+                <a:latin typeface="PingFang SC" panose="020B0400000000000000" charset="-122"/>
+                <a:ea typeface="PingFang SC" panose="020B0400000000000000" charset="-122"/>
+              </a:rPr>
+              <a:t> 这一行让和变大</a:t>
+            </a:r>
+            <a:endParaRPr sz="1800" b="0" i="0">
+              <a:solidFill>
+                <a:srgbClr val="262626"/>
+              </a:solidFill>
+              <a:latin typeface="PingFang SC" panose="020B0400000000000000" charset="-122"/>
+              <a:ea typeface="PingFang SC" panose="020B0400000000000000" charset="-122"/>
+            </a:endParaRPr>
+          </a:p>
+          <a:p>
+            <a:pPr>
+              <a:spcAft>
+                <a:spcPts val="1400"/>
+              </a:spcAft>
+            </a:pPr>
+            <a:r>
+              <a:rPr sz="1800" b="1" i="0">
+                <a:solidFill>
+                  <a:srgbClr val="2E75B6"/>
+                </a:solidFill>
+                <a:latin typeface="PingFang SC" panose="020B0400000000000000" charset="-122"/>
+                <a:ea typeface="PingFang SC" panose="020B0400000000000000" charset="-122"/>
+              </a:rPr>
+              <a:t>▪ </a:t>
+            </a:r>
+            <a:r>
+              <a:rPr sz="1800" b="0" i="0">
+                <a:solidFill>
+                  <a:srgbClr val="262626"/>
+                </a:solidFill>
+                <a:latin typeface="PingFang SC" panose="020B0400000000000000" charset="-122"/>
+                <a:ea typeface="PingFang SC" panose="020B0400000000000000" charset="-122"/>
+              </a:rPr>
+              <a:t>等价恒等式：</a:t>
+            </a:r>
+            <a:r>
+              <a:rPr sz="1800" b="1" i="0">
+                <a:solidFill>
+                  <a:srgbClr val="2E75B6"/>
+                </a:solidFill>
+                <a:latin typeface="PingFang SC" panose="020B0400000000000000" charset="-122"/>
+                <a:ea typeface="PingFang SC" panose="020B0400000000000000" charset="-122"/>
+              </a:rPr>
+              <a:t>a + b = a ⊕ b + 2(a &amp; b)</a:t>
+            </a:r>
+            <a:endParaRPr sz="1800" b="1" i="0">
+              <a:solidFill>
+                <a:srgbClr val="2E75B6"/>
+              </a:solidFill>
+              <a:latin typeface="PingFang SC" panose="020B0400000000000000" charset="-122"/>
+              <a:ea typeface="PingFang SC" panose="020B0400000000000000" charset="-122"/>
+            </a:endParaRPr>
+          </a:p>
+        </p:txBody>
+      </p:sp>
+      <p:sp>
+        <p:nvSpPr>
+          <p:cNvPr id="6" name="Rounded Rectangle 5"/>
           <p:cNvSpPr/>
           <p:nvPr/>
         </p:nvSpPr>
         <p:spPr>
           <a:xfrm>
-            <a:off x="822960" y="1280160"/>
-            <a:ext cx="10515600" cy="1051560"/>
+            <a:off x="822960" y="4480560"/>
+            <a:ext cx="10835640" cy="1371600"/>
           </a:xfrm>
           <a:prstGeom prst="roundRect">
             <a:avLst/>
@@ -10995,118 +11636,31 @@
           </a:fontRef>
         </p:style>
         <p:txBody>
-          <a:bodyPr wrap="square" lIns="274320" rtlCol="0" anchor="ctr"/>
+          <a:bodyPr wrap="square" lIns="365760" rtlCol="0" anchor="ctr"/>
           <a:lstStyle/>
           <a:p>
             <a:pPr algn="ctr"/>
             <a:r>
               <a:rPr sz="2200" b="1" i="0">
                 <a:solidFill>
-                  <a:srgbClr val="1F3864"/>
-                </a:solidFill>
-                <a:latin typeface="PingFang SC" panose="020B0400000000000000" charset="-122"/>
-                <a:ea typeface="PingFang SC" panose="020B0400000000000000" charset="-122"/>
-              </a:rPr>
-              <a:t>记 c = a ⊕ b，对任意正整数 a、b 恒成立两条不等式：</a:t>
+                  <a:srgbClr val="262626"/>
+                </a:solidFill>
+                <a:latin typeface="PingFang SC" panose="020B0400000000000000" charset="-122"/>
+                <a:ea typeface="PingFang SC" panose="020B0400000000000000" charset="-122"/>
+              </a:rPr>
+              <a:t>a + b ≥ a ⊕ b　取等 ⟺ 没有“11”位 ⟺ </a:t>
+            </a:r>
+            <a:r>
+              <a:rPr sz="2200" b="1" i="0">
+                <a:solidFill>
+                  <a:srgbClr val="2E75B6"/>
+                </a:solidFill>
+                <a:latin typeface="PingFang SC" panose="020B0400000000000000" charset="-122"/>
+                <a:ea typeface="PingFang SC" panose="020B0400000000000000" charset="-122"/>
+              </a:rPr>
+              <a:t>a &amp; b = 0</a:t>
             </a:r>
             <a:endParaRPr sz="2200" b="1" i="0">
-              <a:solidFill>
-                <a:srgbClr val="1F3864"/>
-              </a:solidFill>
-              <a:latin typeface="PingFang SC" panose="020B0400000000000000" charset="-122"/>
-              <a:ea typeface="PingFang SC" panose="020B0400000000000000" charset="-122"/>
-            </a:endParaRPr>
-          </a:p>
-        </p:txBody>
-      </p:sp>
-      <p:sp>
-        <p:nvSpPr>
-          <p:cNvPr id="5" name="TextBox 4"/>
-          <p:cNvSpPr txBox="1"/>
-          <p:nvPr/>
-        </p:nvSpPr>
-        <p:spPr>
-          <a:xfrm>
-            <a:off x="822960" y="2743200"/>
-            <a:ext cx="10515600" cy="3017520"/>
-          </a:xfrm>
-          <a:prstGeom prst="rect">
-            <a:avLst/>
-          </a:prstGeom>
-          <a:noFill/>
-        </p:spPr>
-        <p:txBody>
-          <a:bodyPr wrap="square" lIns="54864" tIns="27432" rIns="54864" bIns="27432">
-            <a:spAutoFit/>
-          </a:bodyPr>
-          <a:lstStyle/>
-          <a:p>
-            <a:pPr>
-              <a:spcAft>
-                <a:spcPts val="1400"/>
-              </a:spcAft>
-            </a:pPr>
-            <a:r>
-              <a:rPr sz="2000" b="1" i="0">
-                <a:solidFill>
-                  <a:srgbClr val="2E75B6"/>
-                </a:solidFill>
-                <a:latin typeface="PingFang SC" panose="020B0400000000000000" charset="-122"/>
-                <a:ea typeface="PingFang SC" panose="020B0400000000000000" charset="-122"/>
-              </a:rPr>
-              <a:t>▪ </a:t>
-            </a:r>
-            <a:r>
-              <a:rPr sz="2000" b="1" i="0">
-                <a:solidFill>
-                  <a:srgbClr val="2E75B6"/>
-                </a:solidFill>
-                <a:latin typeface="PingFang SC" panose="020B0400000000000000" charset="-122"/>
-                <a:ea typeface="PingFang SC" panose="020B0400000000000000" charset="-122"/>
-              </a:rPr>
-              <a:t>① 上界　c ≤ a + b</a:t>
-            </a:r>
-            <a:r>
-              <a:rPr sz="2000" b="0" i="0">
-                <a:solidFill>
-                  <a:srgbClr val="262626"/>
-                </a:solidFill>
-                <a:latin typeface="PingFang SC" panose="020B0400000000000000" charset="-122"/>
-                <a:ea typeface="PingFang SC" panose="020B0400000000000000" charset="-122"/>
-              </a:rPr>
-              <a:t>：因为 </a:t>
-            </a:r>
-            <a:r>
-              <a:rPr sz="2000" b="1" i="0">
-                <a:solidFill>
-                  <a:srgbClr val="262626"/>
-                </a:solidFill>
-                <a:latin typeface="PingFang SC" panose="020B0400000000000000" charset="-122"/>
-                <a:ea typeface="PingFang SC" panose="020B0400000000000000" charset="-122"/>
-              </a:rPr>
-              <a:t>a + b = a ⊕ b + 2(a &amp; b)</a:t>
-            </a:r>
-            <a:r>
-              <a:rPr sz="2000" b="0" i="0">
-                <a:solidFill>
-                  <a:srgbClr val="262626"/>
-                </a:solidFill>
-                <a:latin typeface="PingFang SC" panose="020B0400000000000000" charset="-122"/>
-                <a:ea typeface="PingFang SC" panose="020B0400000000000000" charset="-122"/>
-              </a:rPr>
-              <a:t>，取等 ⟺ </a:t>
-            </a:r>
-            <a:r>
-              <a:rPr sz="2000" b="1" i="0">
-                <a:solidFill>
-                  <a:srgbClr val="2E75B6"/>
-                </a:solidFill>
-                <a:latin typeface="PingFang SC" panose="020B0400000000000000" charset="-122"/>
-                <a:ea typeface="PingFang SC" panose="020B0400000000000000" charset="-122"/>
-              </a:rPr>
-              <a:t>a &amp; b = 0</a:t>
-            </a:r>
-            <a:endParaRPr sz="2000" b="1" i="0">
               <a:solidFill>
                 <a:srgbClr val="2E75B6"/>
               </a:solidFill>
@@ -11115,151 +11669,44 @@
             </a:endParaRPr>
           </a:p>
           <a:p>
-            <a:pPr>
-              <a:spcAft>
-                <a:spcPts val="1400"/>
-              </a:spcAft>
+            <a:pPr algn="ctr">
+              <a:spcBef>
+                <a:spcPts val="800"/>
+              </a:spcBef>
             </a:pPr>
             <a:r>
-              <a:rPr sz="2000" b="1" i="0">
+              <a:rPr sz="1700" b="0" i="0">
+                <a:solidFill>
+                  <a:srgbClr val="262626"/>
+                </a:solidFill>
+                <a:latin typeface="PingFang SC" panose="020B0400000000000000" charset="-122"/>
+                <a:ea typeface="PingFang SC" panose="020B0400000000000000" charset="-122"/>
+              </a:rPr>
+              <a:t>严格大于 ⟺ 至少一位“11” ⟺ </a:t>
+            </a:r>
+            <a:r>
+              <a:rPr sz="1700" b="1" i="0">
                 <a:solidFill>
                   <a:srgbClr val="2E75B6"/>
                 </a:solidFill>
                 <a:latin typeface="PingFang SC" panose="020B0400000000000000" charset="-122"/>
                 <a:ea typeface="PingFang SC" panose="020B0400000000000000" charset="-122"/>
               </a:rPr>
-              <a:t>▪ </a:t>
-            </a:r>
-            <a:r>
-              <a:rPr sz="2000" b="1" i="0">
-                <a:solidFill>
-                  <a:srgbClr val="2E75B6"/>
-                </a:solidFill>
-                <a:latin typeface="PingFang SC" panose="020B0400000000000000" charset="-122"/>
-                <a:ea typeface="PingFang SC" panose="020B0400000000000000" charset="-122"/>
-              </a:rPr>
-              <a:t>② 下界　c ≥ |a − b|</a:t>
-            </a:r>
-            <a:r>
-              <a:rPr sz="2000" b="0" i="0">
+              <a:t>a &amp; b ≠ 0</a:t>
+            </a:r>
+            <a:r>
+              <a:rPr sz="1700" b="0" i="0">
                 <a:solidFill>
                   <a:srgbClr val="262626"/>
                 </a:solidFill>
                 <a:latin typeface="PingFang SC" panose="020B0400000000000000" charset="-122"/>
                 <a:ea typeface="PingFang SC" panose="020B0400000000000000" charset="-122"/>
               </a:rPr>
-              <a:t>：不妨 a ≥ b，c − (a−b) = 2(b − a&amp;b) ≥ 0，取等 ⟺ </a:t>
-            </a:r>
-            <a:r>
-              <a:rPr sz="2000" b="1" i="0">
-                <a:solidFill>
-                  <a:srgbClr val="2E75B6"/>
-                </a:solidFill>
-                <a:latin typeface="PingFang SC" panose="020B0400000000000000" charset="-122"/>
-                <a:ea typeface="PingFang SC" panose="020B0400000000000000" charset="-122"/>
-              </a:rPr>
-              <a:t>b ⊆ a</a:t>
-            </a:r>
-            <a:r>
-              <a:rPr sz="2000" b="0" i="0">
-                <a:solidFill>
-                  <a:srgbClr val="262626"/>
-                </a:solidFill>
-                <a:latin typeface="PingFang SC" panose="020B0400000000000000" charset="-122"/>
-                <a:ea typeface="PingFang SC" panose="020B0400000000000000" charset="-122"/>
-              </a:rPr>
-              <a:t>（按位包含）</a:t>
-            </a:r>
-            <a:endParaRPr sz="2000" b="0" i="0">
+              <a:t> —— “和 与 异或 谁大”只由 a &amp; b 是否为 0 决定</a:t>
+            </a:r>
+            <a:endParaRPr sz="1700" b="0" i="0">
               <a:solidFill>
                 <a:srgbClr val="262626"/>
-              </a:solidFill>
-              <a:latin typeface="PingFang SC" panose="020B0400000000000000" charset="-122"/>
-              <a:ea typeface="PingFang SC" panose="020B0400000000000000" charset="-122"/>
-            </a:endParaRPr>
-          </a:p>
-          <a:p>
-            <a:pPr>
-              <a:spcAft>
-                <a:spcPts val="1400"/>
-              </a:spcAft>
-            </a:pPr>
-            <a:r>
-              <a:rPr sz="2000" b="1" i="0">
-                <a:solidFill>
-                  <a:srgbClr val="2E75B6"/>
-                </a:solidFill>
-                <a:latin typeface="PingFang SC" panose="020B0400000000000000" charset="-122"/>
-                <a:ea typeface="PingFang SC" panose="020B0400000000000000" charset="-122"/>
-              </a:rPr>
-              <a:t>▪ </a:t>
-            </a:r>
-            <a:r>
-              <a:rPr sz="2000" b="0" i="0">
-                <a:solidFill>
-                  <a:srgbClr val="262626"/>
-                </a:solidFill>
-                <a:latin typeface="PingFang SC" panose="020B0400000000000000" charset="-122"/>
-                <a:ea typeface="PingFang SC" panose="020B0400000000000000" charset="-122"/>
-              </a:rPr>
-              <a:t>对称地，a ≤ b 时取等 ⟺ </a:t>
-            </a:r>
-            <a:r>
-              <a:rPr sz="2000" b="1" i="0">
-                <a:solidFill>
-                  <a:srgbClr val="2E75B6"/>
-                </a:solidFill>
-                <a:latin typeface="PingFang SC" panose="020B0400000000000000" charset="-122"/>
-                <a:ea typeface="PingFang SC" panose="020B0400000000000000" charset="-122"/>
-              </a:rPr>
-              <a:t>a ⊆ b</a:t>
-            </a:r>
-            <a:endParaRPr sz="2000" b="1" i="0">
-              <a:solidFill>
-                <a:srgbClr val="2E75B6"/>
-              </a:solidFill>
-              <a:latin typeface="PingFang SC" panose="020B0400000000000000" charset="-122"/>
-              <a:ea typeface="PingFang SC" panose="020B0400000000000000" charset="-122"/>
-            </a:endParaRPr>
-          </a:p>
-        </p:txBody>
-      </p:sp>
-      <p:sp>
-        <p:nvSpPr>
-          <p:cNvPr id="6" name="TextBox 5"/>
-          <p:cNvSpPr txBox="1"/>
-          <p:nvPr/>
-        </p:nvSpPr>
-        <p:spPr>
-          <a:xfrm>
-            <a:off x="822960" y="5806440"/>
-            <a:ext cx="10515600" cy="502920"/>
-          </a:xfrm>
-          <a:prstGeom prst="rect">
-            <a:avLst/>
-          </a:prstGeom>
-          <a:noFill/>
-        </p:spPr>
-        <p:txBody>
-          <a:bodyPr wrap="square" lIns="54864" tIns="27432" rIns="54864" bIns="27432">
-            <a:spAutoFit/>
-          </a:bodyPr>
-          <a:lstStyle/>
-          <a:p>
-            <a:pPr algn="ctr"/>
-            <a:r>
-              <a:rPr sz="1700" b="1" i="0">
-                <a:solidFill>
-                  <a:srgbClr val="C55A11"/>
-                </a:solidFill>
-                <a:latin typeface="PingFang SC" panose="020B0400000000000000" charset="-122"/>
-                <a:ea typeface="PingFang SC" panose="020B0400000000000000" charset="-122"/>
-              </a:rPr>
-              <a:t>推论：三角形不等式只在“取等”处失败 —— 退化 ⟺ 有一条边恰好等于另外两条边之和</a:t>
-            </a:r>
-            <a:endParaRPr sz="1700" b="1" i="0">
-              <a:solidFill>
-                <a:srgbClr val="C55A11"/>
               </a:solidFill>
               <a:latin typeface="PingFang SC" panose="020B0400000000000000" charset="-122"/>
               <a:ea typeface="PingFang SC" panose="020B0400000000000000" charset="-122"/>
@@ -11377,7 +11824,7 @@
                 <a:latin typeface="PingFang SC" panose="020B0400000000000000" charset="-122"/>
                 <a:ea typeface="PingFang SC" panose="020B0400000000000000" charset="-122"/>
               </a:rPr>
-              <a:t>转化：退化 ⟺ 三个条件之一</a:t>
+              <a:t>异或的性质：做两次相同运算无效果</a:t>
             </a:r>
             <a:endParaRPr sz="2700" b="1" i="0">
               <a:solidFill>
@@ -11435,764 +11882,14 @@
       </p:sp>
       <p:sp>
         <p:nvSpPr>
-          <p:cNvPr id="4" name="TextBox 3"/>
-          <p:cNvSpPr txBox="1"/>
+          <p:cNvPr id="4" name="Rounded Rectangle 3"/>
+          <p:cNvSpPr/>
           <p:nvPr/>
         </p:nvSpPr>
         <p:spPr>
           <a:xfrm>
-            <a:off x="548640" y="1188720"/>
-            <a:ext cx="11155680" cy="457200"/>
-          </a:xfrm>
-          <a:prstGeom prst="rect">
-            <a:avLst/>
-          </a:prstGeom>
-          <a:noFill/>
-        </p:spPr>
-        <p:txBody>
-          <a:bodyPr wrap="square" lIns="54864" tIns="27432" rIns="54864" bIns="27432">
-            <a:spAutoFit/>
-          </a:bodyPr>
-          <a:lstStyle/>
-          <a:p>
-            <a:pPr algn="l"/>
-            <a:r>
-              <a:rPr sz="1900" b="0" i="0">
-                <a:solidFill>
-                  <a:srgbClr val="262626"/>
-                </a:solidFill>
-                <a:latin typeface="PingFang SC" panose="020B0400000000000000" charset="-122"/>
-                <a:ea typeface="PingFang SC" panose="020B0400000000000000" charset="-122"/>
-              </a:rPr>
-              <a:t>记 c = a ⊕ b。构不成非退化三角形 ⟺ 下列三者之一成立（对应一次“取等”）：</a:t>
-            </a:r>
-            <a:endParaRPr sz="1900" b="0" i="0">
-              <a:solidFill>
-                <a:srgbClr val="262626"/>
-              </a:solidFill>
-              <a:latin typeface="PingFang SC" panose="020B0400000000000000" charset="-122"/>
-              <a:ea typeface="PingFang SC" panose="020B0400000000000000" charset="-122"/>
-            </a:endParaRPr>
-          </a:p>
-        </p:txBody>
-      </p:sp>
-      <p:sp>
-        <p:nvSpPr>
-          <p:cNvPr id="5" name="Rounded Rectangle 4"/>
-          <p:cNvSpPr/>
-          <p:nvPr/>
-        </p:nvSpPr>
-        <p:spPr>
-          <a:xfrm>
-            <a:off x="548640" y="1828800"/>
-            <a:ext cx="2834640" cy="868680"/>
-          </a:xfrm>
-          <a:prstGeom prst="roundRect">
-            <a:avLst/>
-          </a:prstGeom>
-          <a:solidFill>
-            <a:srgbClr val="FCE4D6"/>
-          </a:solidFill>
-          <a:ln w="15240">
-            <a:solidFill>
-              <a:srgbClr val="C55A11"/>
-            </a:solidFill>
-          </a:ln>
-          <a:effectLst/>
-        </p:spPr>
-        <p:style>
-          <a:lnRef idx="1">
-            <a:schemeClr val="accent1"/>
-          </a:lnRef>
-          <a:fillRef idx="3">
-            <a:schemeClr val="accent1"/>
-          </a:fillRef>
-          <a:effectRef idx="2">
-            <a:schemeClr val="accent1"/>
-          </a:effectRef>
-          <a:fontRef idx="minor">
-            <a:schemeClr val="lt1"/>
-          </a:fontRef>
-        </p:style>
-        <p:txBody>
-          <a:bodyPr rtlCol="0" anchor="ctr"/>
-          <a:lstStyle/>
-          <a:p>
-            <a:pPr algn="ctr"/>
-          </a:p>
-        </p:txBody>
-      </p:sp>
-      <p:sp>
-        <p:nvSpPr>
-          <p:cNvPr id="6" name="TextBox 5"/>
-          <p:cNvSpPr txBox="1"/>
-          <p:nvPr/>
-        </p:nvSpPr>
-        <p:spPr>
-          <a:xfrm>
-            <a:off x="548640" y="2011680"/>
-            <a:ext cx="2834640" cy="502920"/>
-          </a:xfrm>
-          <a:prstGeom prst="rect">
-            <a:avLst/>
-          </a:prstGeom>
-          <a:noFill/>
-        </p:spPr>
-        <p:txBody>
-          <a:bodyPr wrap="square" lIns="54864" tIns="27432" rIns="54864" bIns="27432">
-            <a:spAutoFit/>
-          </a:bodyPr>
-          <a:lstStyle/>
-          <a:p>
-            <a:pPr algn="ctr"/>
-            <a:r>
-              <a:rPr sz="2000" b="1" i="0">
-                <a:solidFill>
-                  <a:srgbClr val="C55A11"/>
-                </a:solidFill>
-                <a:latin typeface="PingFang SC" panose="020B0400000000000000" charset="-122"/>
-                <a:ea typeface="PingFang SC" panose="020B0400000000000000" charset="-122"/>
-              </a:rPr>
-              <a:t>c = a + b</a:t>
-            </a:r>
-            <a:endParaRPr sz="2000" b="1" i="0">
-              <a:solidFill>
-                <a:srgbClr val="C55A11"/>
-              </a:solidFill>
-              <a:latin typeface="PingFang SC" panose="020B0400000000000000" charset="-122"/>
-              <a:ea typeface="PingFang SC" panose="020B0400000000000000" charset="-122"/>
-            </a:endParaRPr>
-          </a:p>
-        </p:txBody>
-      </p:sp>
-      <p:sp>
-        <p:nvSpPr>
-          <p:cNvPr id="7" name="Rounded Rectangle 6"/>
-          <p:cNvSpPr/>
-          <p:nvPr/>
-        </p:nvSpPr>
-        <p:spPr>
-          <a:xfrm>
-            <a:off x="3566160" y="1828800"/>
-            <a:ext cx="4572000" cy="868680"/>
-          </a:xfrm>
-          <a:prstGeom prst="roundRect">
-            <a:avLst/>
-          </a:prstGeom>
-          <a:solidFill>
-            <a:srgbClr val="EDEDED"/>
-          </a:solidFill>
-          <a:ln>
-            <a:noFill/>
-          </a:ln>
-          <a:effectLst/>
-        </p:spPr>
-        <p:style>
-          <a:lnRef idx="1">
-            <a:schemeClr val="accent1"/>
-          </a:lnRef>
-          <a:fillRef idx="3">
-            <a:schemeClr val="accent1"/>
-          </a:fillRef>
-          <a:effectRef idx="2">
-            <a:schemeClr val="accent1"/>
-          </a:effectRef>
-          <a:fontRef idx="minor">
-            <a:schemeClr val="lt1"/>
-          </a:fontRef>
-        </p:style>
-        <p:txBody>
-          <a:bodyPr rtlCol="0" anchor="ctr"/>
-          <a:lstStyle/>
-          <a:p>
-            <a:pPr algn="ctr"/>
-          </a:p>
-        </p:txBody>
-      </p:sp>
-      <p:sp>
-        <p:nvSpPr>
-          <p:cNvPr id="8" name="TextBox 7"/>
-          <p:cNvSpPr txBox="1"/>
-          <p:nvPr/>
-        </p:nvSpPr>
-        <p:spPr>
-          <a:xfrm>
-            <a:off x="3566160" y="2011680"/>
-            <a:ext cx="4572000" cy="502920"/>
-          </a:xfrm>
-          <a:prstGeom prst="rect">
-            <a:avLst/>
-          </a:prstGeom>
-          <a:noFill/>
-        </p:spPr>
-        <p:txBody>
-          <a:bodyPr wrap="square" lIns="54864" tIns="27432" rIns="54864" bIns="27432">
-            <a:spAutoFit/>
-          </a:bodyPr>
-          <a:lstStyle/>
-          <a:p>
-            <a:pPr algn="ctr"/>
-            <a:r>
-              <a:rPr sz="2000" b="1" i="0">
-                <a:solidFill>
-                  <a:srgbClr val="262626"/>
-                </a:solidFill>
-                <a:latin typeface="PingFang SC" panose="020B0400000000000000" charset="-122"/>
-                <a:ea typeface="PingFang SC" panose="020B0400000000000000" charset="-122"/>
-              </a:rPr>
-              <a:t>⟺　</a:t>
-            </a:r>
-            <a:r>
-              <a:rPr sz="2000" b="1" i="0">
-                <a:solidFill>
-                  <a:srgbClr val="2E75B6"/>
-                </a:solidFill>
-                <a:latin typeface="PingFang SC" panose="020B0400000000000000" charset="-122"/>
-                <a:ea typeface="PingFang SC" panose="020B0400000000000000" charset="-122"/>
-              </a:rPr>
-              <a:t>a &amp; b = 0</a:t>
-            </a:r>
-            <a:endParaRPr sz="2000" b="1" i="0">
-              <a:solidFill>
-                <a:srgbClr val="2E75B6"/>
-              </a:solidFill>
-              <a:latin typeface="PingFang SC" panose="020B0400000000000000" charset="-122"/>
-              <a:ea typeface="PingFang SC" panose="020B0400000000000000" charset="-122"/>
-            </a:endParaRPr>
-          </a:p>
-        </p:txBody>
-      </p:sp>
-      <p:sp>
-        <p:nvSpPr>
-          <p:cNvPr id="9" name="TextBox 8"/>
-          <p:cNvSpPr txBox="1"/>
-          <p:nvPr/>
-        </p:nvSpPr>
-        <p:spPr>
-          <a:xfrm>
-            <a:off x="8321040" y="2011680"/>
-            <a:ext cx="3383280" cy="502920"/>
-          </a:xfrm>
-          <a:prstGeom prst="rect">
-            <a:avLst/>
-          </a:prstGeom>
-          <a:noFill/>
-        </p:spPr>
-        <p:txBody>
-          <a:bodyPr wrap="square" lIns="54864" tIns="27432" rIns="54864" bIns="27432">
-            <a:spAutoFit/>
-          </a:bodyPr>
-          <a:lstStyle/>
-          <a:p>
-            <a:pPr algn="ctr"/>
-            <a:r>
-              <a:rPr sz="1500" b="0" i="0">
-                <a:solidFill>
-                  <a:srgbClr val="7F7F7F"/>
-                </a:solidFill>
-                <a:latin typeface="PingFang SC" panose="020B0400000000000000" charset="-122"/>
-                <a:ea typeface="PingFang SC" panose="020B0400000000000000" charset="-122"/>
-              </a:rPr>
-              <a:t>上界取等</a:t>
-            </a:r>
-            <a:endParaRPr sz="1500" b="0" i="0">
-              <a:solidFill>
-                <a:srgbClr val="7F7F7F"/>
-              </a:solidFill>
-              <a:latin typeface="PingFang SC" panose="020B0400000000000000" charset="-122"/>
-              <a:ea typeface="PingFang SC" panose="020B0400000000000000" charset="-122"/>
-            </a:endParaRPr>
-          </a:p>
-        </p:txBody>
-      </p:sp>
-      <p:sp>
-        <p:nvSpPr>
-          <p:cNvPr id="10" name="Rounded Rectangle 9"/>
-          <p:cNvSpPr/>
-          <p:nvPr/>
-        </p:nvSpPr>
-        <p:spPr>
-          <a:xfrm>
-            <a:off x="548640" y="2880360"/>
-            <a:ext cx="2834640" cy="868680"/>
-          </a:xfrm>
-          <a:prstGeom prst="roundRect">
-            <a:avLst/>
-          </a:prstGeom>
-          <a:solidFill>
-            <a:srgbClr val="FCE4D6"/>
-          </a:solidFill>
-          <a:ln w="15240">
-            <a:solidFill>
-              <a:srgbClr val="C55A11"/>
-            </a:solidFill>
-          </a:ln>
-          <a:effectLst/>
-        </p:spPr>
-        <p:style>
-          <a:lnRef idx="1">
-            <a:schemeClr val="accent1"/>
-          </a:lnRef>
-          <a:fillRef idx="3">
-            <a:schemeClr val="accent1"/>
-          </a:fillRef>
-          <a:effectRef idx="2">
-            <a:schemeClr val="accent1"/>
-          </a:effectRef>
-          <a:fontRef idx="minor">
-            <a:schemeClr val="lt1"/>
-          </a:fontRef>
-        </p:style>
-        <p:txBody>
-          <a:bodyPr rtlCol="0" anchor="ctr"/>
-          <a:lstStyle/>
-          <a:p>
-            <a:pPr algn="ctr"/>
-          </a:p>
-        </p:txBody>
-      </p:sp>
-      <p:sp>
-        <p:nvSpPr>
-          <p:cNvPr id="11" name="TextBox 10"/>
-          <p:cNvSpPr txBox="1"/>
-          <p:nvPr/>
-        </p:nvSpPr>
-        <p:spPr>
-          <a:xfrm>
-            <a:off x="548640" y="3063240"/>
-            <a:ext cx="2834640" cy="502920"/>
-          </a:xfrm>
-          <a:prstGeom prst="rect">
-            <a:avLst/>
-          </a:prstGeom>
-          <a:noFill/>
-        </p:spPr>
-        <p:txBody>
-          <a:bodyPr wrap="square" lIns="54864" tIns="27432" rIns="54864" bIns="27432">
-            <a:spAutoFit/>
-          </a:bodyPr>
-          <a:lstStyle/>
-          <a:p>
-            <a:pPr algn="ctr"/>
-            <a:r>
-              <a:rPr sz="2000" b="1" i="0">
-                <a:solidFill>
-                  <a:srgbClr val="C55A11"/>
-                </a:solidFill>
-                <a:latin typeface="PingFang SC" panose="020B0400000000000000" charset="-122"/>
-                <a:ea typeface="PingFang SC" panose="020B0400000000000000" charset="-122"/>
-              </a:rPr>
-              <a:t>b = a + c</a:t>
-            </a:r>
-            <a:endParaRPr sz="2000" b="1" i="0">
-              <a:solidFill>
-                <a:srgbClr val="C55A11"/>
-              </a:solidFill>
-              <a:latin typeface="PingFang SC" panose="020B0400000000000000" charset="-122"/>
-              <a:ea typeface="PingFang SC" panose="020B0400000000000000" charset="-122"/>
-            </a:endParaRPr>
-          </a:p>
-        </p:txBody>
-      </p:sp>
-      <p:sp>
-        <p:nvSpPr>
-          <p:cNvPr id="12" name="Rounded Rectangle 11"/>
-          <p:cNvSpPr/>
-          <p:nvPr/>
-        </p:nvSpPr>
-        <p:spPr>
-          <a:xfrm>
-            <a:off x="3566160" y="2880360"/>
-            <a:ext cx="4572000" cy="868680"/>
-          </a:xfrm>
-          <a:prstGeom prst="roundRect">
-            <a:avLst/>
-          </a:prstGeom>
-          <a:solidFill>
-            <a:srgbClr val="EDEDED"/>
-          </a:solidFill>
-          <a:ln>
-            <a:noFill/>
-          </a:ln>
-          <a:effectLst/>
-        </p:spPr>
-        <p:style>
-          <a:lnRef idx="1">
-            <a:schemeClr val="accent1"/>
-          </a:lnRef>
-          <a:fillRef idx="3">
-            <a:schemeClr val="accent1"/>
-          </a:fillRef>
-          <a:effectRef idx="2">
-            <a:schemeClr val="accent1"/>
-          </a:effectRef>
-          <a:fontRef idx="minor">
-            <a:schemeClr val="lt1"/>
-          </a:fontRef>
-        </p:style>
-        <p:txBody>
-          <a:bodyPr rtlCol="0" anchor="ctr"/>
-          <a:lstStyle/>
-          <a:p>
-            <a:pPr algn="ctr"/>
-          </a:p>
-        </p:txBody>
-      </p:sp>
-      <p:sp>
-        <p:nvSpPr>
-          <p:cNvPr id="13" name="TextBox 12"/>
-          <p:cNvSpPr txBox="1"/>
-          <p:nvPr/>
-        </p:nvSpPr>
-        <p:spPr>
-          <a:xfrm>
-            <a:off x="3566160" y="3063240"/>
-            <a:ext cx="4572000" cy="502920"/>
-          </a:xfrm>
-          <a:prstGeom prst="rect">
-            <a:avLst/>
-          </a:prstGeom>
-          <a:noFill/>
-        </p:spPr>
-        <p:txBody>
-          <a:bodyPr wrap="square" lIns="54864" tIns="27432" rIns="54864" bIns="27432">
-            <a:spAutoFit/>
-          </a:bodyPr>
-          <a:lstStyle/>
-          <a:p>
-            <a:pPr algn="ctr"/>
-            <a:r>
-              <a:rPr sz="2000" b="1" i="0">
-                <a:solidFill>
-                  <a:srgbClr val="262626"/>
-                </a:solidFill>
-                <a:latin typeface="PingFang SC" panose="020B0400000000000000" charset="-122"/>
-                <a:ea typeface="PingFang SC" panose="020B0400000000000000" charset="-122"/>
-              </a:rPr>
-              <a:t>⟺　</a:t>
-            </a:r>
-            <a:r>
-              <a:rPr sz="2000" b="1" i="0">
-                <a:solidFill>
-                  <a:srgbClr val="2E75B6"/>
-                </a:solidFill>
-                <a:latin typeface="PingFang SC" panose="020B0400000000000000" charset="-122"/>
-                <a:ea typeface="PingFang SC" panose="020B0400000000000000" charset="-122"/>
-              </a:rPr>
-              <a:t>a ⊆ b</a:t>
-            </a:r>
-            <a:r>
-              <a:rPr sz="2000" b="1" i="0">
-                <a:solidFill>
-                  <a:srgbClr val="262626"/>
-                </a:solidFill>
-                <a:latin typeface="PingFang SC" panose="020B0400000000000000" charset="-122"/>
-                <a:ea typeface="PingFang SC" panose="020B0400000000000000" charset="-122"/>
-              </a:rPr>
-              <a:t>（按位）</a:t>
-            </a:r>
-            <a:endParaRPr sz="2000" b="1" i="0">
-              <a:solidFill>
-                <a:srgbClr val="262626"/>
-              </a:solidFill>
-              <a:latin typeface="PingFang SC" panose="020B0400000000000000" charset="-122"/>
-              <a:ea typeface="PingFang SC" panose="020B0400000000000000" charset="-122"/>
-            </a:endParaRPr>
-          </a:p>
-        </p:txBody>
-      </p:sp>
-      <p:sp>
-        <p:nvSpPr>
-          <p:cNvPr id="14" name="TextBox 13"/>
-          <p:cNvSpPr txBox="1"/>
-          <p:nvPr/>
-        </p:nvSpPr>
-        <p:spPr>
-          <a:xfrm>
-            <a:off x="8321040" y="3063240"/>
-            <a:ext cx="3383280" cy="502920"/>
-          </a:xfrm>
-          <a:prstGeom prst="rect">
-            <a:avLst/>
-          </a:prstGeom>
-          <a:noFill/>
-        </p:spPr>
-        <p:txBody>
-          <a:bodyPr wrap="square" lIns="54864" tIns="27432" rIns="54864" bIns="27432">
-            <a:spAutoFit/>
-          </a:bodyPr>
-          <a:lstStyle/>
-          <a:p>
-            <a:pPr algn="ctr"/>
-            <a:r>
-              <a:rPr sz="1500" b="0" i="0">
-                <a:solidFill>
-                  <a:srgbClr val="7F7F7F"/>
-                </a:solidFill>
-                <a:latin typeface="PingFang SC" panose="020B0400000000000000" charset="-122"/>
-                <a:ea typeface="PingFang SC" panose="020B0400000000000000" charset="-122"/>
-              </a:rPr>
-              <a:t>下界取等</a:t>
-            </a:r>
-            <a:endParaRPr sz="1500" b="0" i="0">
-              <a:solidFill>
-                <a:srgbClr val="7F7F7F"/>
-              </a:solidFill>
-              <a:latin typeface="PingFang SC" panose="020B0400000000000000" charset="-122"/>
-              <a:ea typeface="PingFang SC" panose="020B0400000000000000" charset="-122"/>
-            </a:endParaRPr>
-          </a:p>
-        </p:txBody>
-      </p:sp>
-      <p:sp>
-        <p:nvSpPr>
-          <p:cNvPr id="15" name="Rounded Rectangle 14"/>
-          <p:cNvSpPr/>
-          <p:nvPr/>
-        </p:nvSpPr>
-        <p:spPr>
-          <a:xfrm>
-            <a:off x="548640" y="3931920"/>
-            <a:ext cx="2834640" cy="868680"/>
-          </a:xfrm>
-          <a:prstGeom prst="roundRect">
-            <a:avLst/>
-          </a:prstGeom>
-          <a:solidFill>
-            <a:srgbClr val="FCE4D6"/>
-          </a:solidFill>
-          <a:ln w="15240">
-            <a:solidFill>
-              <a:srgbClr val="C55A11"/>
-            </a:solidFill>
-          </a:ln>
-          <a:effectLst/>
-        </p:spPr>
-        <p:style>
-          <a:lnRef idx="1">
-            <a:schemeClr val="accent1"/>
-          </a:lnRef>
-          <a:fillRef idx="3">
-            <a:schemeClr val="accent1"/>
-          </a:fillRef>
-          <a:effectRef idx="2">
-            <a:schemeClr val="accent1"/>
-          </a:effectRef>
-          <a:fontRef idx="minor">
-            <a:schemeClr val="lt1"/>
-          </a:fontRef>
-        </p:style>
-        <p:txBody>
-          <a:bodyPr rtlCol="0" anchor="ctr"/>
-          <a:lstStyle/>
-          <a:p>
-            <a:pPr algn="ctr"/>
-          </a:p>
-        </p:txBody>
-      </p:sp>
-      <p:sp>
-        <p:nvSpPr>
-          <p:cNvPr id="16" name="TextBox 15"/>
-          <p:cNvSpPr txBox="1"/>
-          <p:nvPr/>
-        </p:nvSpPr>
-        <p:spPr>
-          <a:xfrm>
-            <a:off x="548640" y="4114800"/>
-            <a:ext cx="2834640" cy="502920"/>
-          </a:xfrm>
-          <a:prstGeom prst="rect">
-            <a:avLst/>
-          </a:prstGeom>
-          <a:noFill/>
-        </p:spPr>
-        <p:txBody>
-          <a:bodyPr wrap="square" lIns="54864" tIns="27432" rIns="54864" bIns="27432">
-            <a:spAutoFit/>
-          </a:bodyPr>
-          <a:lstStyle/>
-          <a:p>
-            <a:pPr algn="ctr"/>
-            <a:r>
-              <a:rPr sz="2000" b="1" i="0">
-                <a:solidFill>
-                  <a:srgbClr val="C55A11"/>
-                </a:solidFill>
-                <a:latin typeface="PingFang SC" panose="020B0400000000000000" charset="-122"/>
-                <a:ea typeface="PingFang SC" panose="020B0400000000000000" charset="-122"/>
-              </a:rPr>
-              <a:t>a = b + c</a:t>
-            </a:r>
-            <a:endParaRPr sz="2000" b="1" i="0">
-              <a:solidFill>
-                <a:srgbClr val="C55A11"/>
-              </a:solidFill>
-              <a:latin typeface="PingFang SC" panose="020B0400000000000000" charset="-122"/>
-              <a:ea typeface="PingFang SC" panose="020B0400000000000000" charset="-122"/>
-            </a:endParaRPr>
-          </a:p>
-        </p:txBody>
-      </p:sp>
-      <p:sp>
-        <p:nvSpPr>
-          <p:cNvPr id="17" name="Rounded Rectangle 16"/>
-          <p:cNvSpPr/>
-          <p:nvPr/>
-        </p:nvSpPr>
-        <p:spPr>
-          <a:xfrm>
-            <a:off x="3566160" y="3931920"/>
-            <a:ext cx="4572000" cy="868680"/>
-          </a:xfrm>
-          <a:prstGeom prst="roundRect">
-            <a:avLst/>
-          </a:prstGeom>
-          <a:solidFill>
-            <a:srgbClr val="EDEDED"/>
-          </a:solidFill>
-          <a:ln>
-            <a:noFill/>
-          </a:ln>
-          <a:effectLst/>
-        </p:spPr>
-        <p:style>
-          <a:lnRef idx="1">
-            <a:schemeClr val="accent1"/>
-          </a:lnRef>
-          <a:fillRef idx="3">
-            <a:schemeClr val="accent1"/>
-          </a:fillRef>
-          <a:effectRef idx="2">
-            <a:schemeClr val="accent1"/>
-          </a:effectRef>
-          <a:fontRef idx="minor">
-            <a:schemeClr val="lt1"/>
-          </a:fontRef>
-        </p:style>
-        <p:txBody>
-          <a:bodyPr rtlCol="0" anchor="ctr"/>
-          <a:lstStyle/>
-          <a:p>
-            <a:pPr algn="ctr"/>
-          </a:p>
-        </p:txBody>
-      </p:sp>
-      <p:sp>
-        <p:nvSpPr>
-          <p:cNvPr id="18" name="TextBox 17"/>
-          <p:cNvSpPr txBox="1"/>
-          <p:nvPr/>
-        </p:nvSpPr>
-        <p:spPr>
-          <a:xfrm>
-            <a:off x="3566160" y="4114800"/>
-            <a:ext cx="4572000" cy="502920"/>
-          </a:xfrm>
-          <a:prstGeom prst="rect">
-            <a:avLst/>
-          </a:prstGeom>
-          <a:noFill/>
-        </p:spPr>
-        <p:txBody>
-          <a:bodyPr wrap="square" lIns="54864" tIns="27432" rIns="54864" bIns="27432">
-            <a:spAutoFit/>
-          </a:bodyPr>
-          <a:lstStyle/>
-          <a:p>
-            <a:pPr algn="ctr"/>
-            <a:r>
-              <a:rPr sz="2000" b="1" i="0">
-                <a:solidFill>
-                  <a:srgbClr val="262626"/>
-                </a:solidFill>
-                <a:latin typeface="PingFang SC" panose="020B0400000000000000" charset="-122"/>
-                <a:ea typeface="PingFang SC" panose="020B0400000000000000" charset="-122"/>
-              </a:rPr>
-              <a:t>⟺　</a:t>
-            </a:r>
-            <a:r>
-              <a:rPr sz="2000" b="1" i="0">
-                <a:solidFill>
-                  <a:srgbClr val="2E75B6"/>
-                </a:solidFill>
-                <a:latin typeface="PingFang SC" panose="020B0400000000000000" charset="-122"/>
-                <a:ea typeface="PingFang SC" panose="020B0400000000000000" charset="-122"/>
-              </a:rPr>
-              <a:t>b ⊆ a</a:t>
-            </a:r>
-            <a:r>
-              <a:rPr sz="2000" b="1" i="0">
-                <a:solidFill>
-                  <a:srgbClr val="262626"/>
-                </a:solidFill>
-                <a:latin typeface="PingFang SC" panose="020B0400000000000000" charset="-122"/>
-                <a:ea typeface="PingFang SC" panose="020B0400000000000000" charset="-122"/>
-              </a:rPr>
-              <a:t>（按位）</a:t>
-            </a:r>
-            <a:endParaRPr sz="2000" b="1" i="0">
-              <a:solidFill>
-                <a:srgbClr val="262626"/>
-              </a:solidFill>
-              <a:latin typeface="PingFang SC" panose="020B0400000000000000" charset="-122"/>
-              <a:ea typeface="PingFang SC" panose="020B0400000000000000" charset="-122"/>
-            </a:endParaRPr>
-          </a:p>
-        </p:txBody>
-      </p:sp>
-      <p:sp>
-        <p:nvSpPr>
-          <p:cNvPr id="19" name="TextBox 18"/>
-          <p:cNvSpPr txBox="1"/>
-          <p:nvPr/>
-        </p:nvSpPr>
-        <p:spPr>
-          <a:xfrm>
-            <a:off x="8321040" y="4114800"/>
-            <a:ext cx="3383280" cy="502920"/>
-          </a:xfrm>
-          <a:prstGeom prst="rect">
-            <a:avLst/>
-          </a:prstGeom>
-          <a:noFill/>
-        </p:spPr>
-        <p:txBody>
-          <a:bodyPr wrap="square" lIns="54864" tIns="27432" rIns="54864" bIns="27432">
-            <a:spAutoFit/>
-          </a:bodyPr>
-          <a:lstStyle/>
-          <a:p>
-            <a:pPr algn="ctr"/>
-            <a:r>
-              <a:rPr sz="1500" b="0" i="0">
-                <a:solidFill>
-                  <a:srgbClr val="7F7F7F"/>
-                </a:solidFill>
-                <a:latin typeface="PingFang SC" panose="020B0400000000000000" charset="-122"/>
-                <a:ea typeface="PingFang SC" panose="020B0400000000000000" charset="-122"/>
-              </a:rPr>
-              <a:t>下界取等，对称</a:t>
-            </a:r>
-            <a:endParaRPr sz="1500" b="0" i="0">
-              <a:solidFill>
-                <a:srgbClr val="7F7F7F"/>
-              </a:solidFill>
-              <a:latin typeface="PingFang SC" panose="020B0400000000000000" charset="-122"/>
-              <a:ea typeface="PingFang SC" panose="020B0400000000000000" charset="-122"/>
-            </a:endParaRPr>
-          </a:p>
-        </p:txBody>
-      </p:sp>
-      <p:sp>
-        <p:nvSpPr>
-          <p:cNvPr id="20" name="Rounded Rectangle 19"/>
-          <p:cNvSpPr/>
-          <p:nvPr/>
-        </p:nvSpPr>
-        <p:spPr>
-          <a:xfrm>
-            <a:off x="548640" y="5074920"/>
-            <a:ext cx="11155680" cy="914400"/>
+            <a:off x="822960" y="1280160"/>
+            <a:ext cx="10515600" cy="960120"/>
           </a:xfrm>
           <a:prstGeom prst="roundRect">
             <a:avLst/>
@@ -12220,61 +11917,108 @@
           </a:fontRef>
         </p:style>
         <p:txBody>
-          <a:bodyPr wrap="square" lIns="274320" rtlCol="0" anchor="ctr"/>
+          <a:bodyPr wrap="square" lIns="365760" rtlCol="0" anchor="ctr"/>
           <a:lstStyle/>
           <a:p>
             <a:pPr algn="ctr"/>
             <a:r>
-              <a:rPr sz="2200" b="1" i="0">
+              <a:rPr sz="2400" b="1" i="0">
+                <a:solidFill>
+                  <a:srgbClr val="1F3864"/>
+                </a:solidFill>
+                <a:latin typeface="PingFang SC" panose="020B0400000000000000" charset="-122"/>
+                <a:ea typeface="PingFang SC" panose="020B0400000000000000" charset="-122"/>
+              </a:rPr>
+              <a:t>x ⊕ y ⊕ y = x　——　同一个数异或两次，等于没做</a:t>
+            </a:r>
+            <a:endParaRPr sz="2400" b="1" i="0">
+              <a:solidFill>
+                <a:srgbClr val="1F3864"/>
+              </a:solidFill>
+              <a:latin typeface="PingFang SC" panose="020B0400000000000000" charset="-122"/>
+              <a:ea typeface="PingFang SC" panose="020B0400000000000000" charset="-122"/>
+            </a:endParaRPr>
+          </a:p>
+        </p:txBody>
+      </p:sp>
+      <p:sp>
+        <p:nvSpPr>
+          <p:cNvPr id="5" name="TextBox 4"/>
+          <p:cNvSpPr txBox="1"/>
+          <p:nvPr/>
+        </p:nvSpPr>
+        <p:spPr>
+          <a:xfrm>
+            <a:off x="822960" y="2560320"/>
+            <a:ext cx="10515600" cy="1828800"/>
+          </a:xfrm>
+          <a:prstGeom prst="rect">
+            <a:avLst/>
+          </a:prstGeom>
+          <a:noFill/>
+        </p:spPr>
+        <p:txBody>
+          <a:bodyPr wrap="square" lIns="54864" tIns="27432" rIns="54864" bIns="27432">
+            <a:spAutoFit/>
+          </a:bodyPr>
+          <a:lstStyle/>
+          <a:p>
+            <a:pPr>
+              <a:spcAft>
+                <a:spcPts val="1400"/>
+              </a:spcAft>
+            </a:pPr>
+            <a:r>
+              <a:rPr sz="2100" b="1" i="0">
+                <a:solidFill>
+                  <a:srgbClr val="2E75B6"/>
+                </a:solidFill>
+                <a:latin typeface="PingFang SC" panose="020B0400000000000000" charset="-122"/>
+                <a:ea typeface="PingFang SC" panose="020B0400000000000000" charset="-122"/>
+              </a:rPr>
+              <a:t>▪ </a:t>
+            </a:r>
+            <a:r>
+              <a:rPr sz="2100" b="0" i="0">
                 <a:solidFill>
                   <a:srgbClr val="262626"/>
                 </a:solidFill>
                 <a:latin typeface="PingFang SC" panose="020B0400000000000000" charset="-122"/>
                 <a:ea typeface="PingFang SC" panose="020B0400000000000000" charset="-122"/>
               </a:rPr>
-              <a:t>非退化</a:t>
-            </a:r>
-            <a:r>
-              <a:rPr sz="2200" b="1" i="0">
+              <a:t>应用到本题：c = a ⊕ b，两边同时 ⊕ b ⇒ </a:t>
+            </a:r>
+            <a:r>
+              <a:rPr sz="2100" b="1" i="0">
+                <a:solidFill>
+                  <a:srgbClr val="2E75B6"/>
+                </a:solidFill>
+                <a:latin typeface="PingFang SC" panose="020B0400000000000000" charset="-122"/>
+                <a:ea typeface="PingFang SC" panose="020B0400000000000000" charset="-122"/>
+              </a:rPr>
+              <a:t>a = b ⊕ c</a:t>
+            </a:r>
+            <a:r>
+              <a:rPr sz="2100" b="0" i="0">
                 <a:solidFill>
                   <a:srgbClr val="262626"/>
                 </a:solidFill>
                 <a:latin typeface="PingFang SC" panose="020B0400000000000000" charset="-122"/>
                 <a:ea typeface="PingFang SC" panose="020B0400000000000000" charset="-122"/>
               </a:rPr>
-              <a:t> ⟺ 三个条件同时不成立：</a:t>
-            </a:r>
-            <a:r>
-              <a:rPr sz="2200" b="1" i="0">
+              <a:t>；两边同时 ⊕ a ⇒ </a:t>
+            </a:r>
+            <a:r>
+              <a:rPr sz="2100" b="1" i="0">
                 <a:solidFill>
                   <a:srgbClr val="2E75B6"/>
                 </a:solidFill>
                 <a:latin typeface="PingFang SC" panose="020B0400000000000000" charset="-122"/>
                 <a:ea typeface="PingFang SC" panose="020B0400000000000000" charset="-122"/>
               </a:rPr>
-              <a:t>a &amp; b ≠ 0</a:t>
-            </a:r>
-            <a:r>
-              <a:rPr sz="2200" b="1" i="0">
-                <a:solidFill>
-                  <a:srgbClr val="262626"/>
-                </a:solidFill>
-                <a:latin typeface="PingFang SC" panose="020B0400000000000000" charset="-122"/>
-                <a:ea typeface="PingFang SC" panose="020B0400000000000000" charset="-122"/>
-              </a:rPr>
-              <a:t> 且 </a:t>
-            </a:r>
-            <a:r>
-              <a:rPr sz="2200" b="1" i="0">
-                <a:solidFill>
-                  <a:srgbClr val="2E75B6"/>
-                </a:solidFill>
-                <a:latin typeface="PingFang SC" panose="020B0400000000000000" charset="-122"/>
-                <a:ea typeface="PingFang SC" panose="020B0400000000000000" charset="-122"/>
-              </a:rPr>
-              <a:t>a、b 按位互不包含</a:t>
-            </a:r>
-            <a:endParaRPr sz="2200" b="1" i="0">
+              <a:t>b = a ⊕ c</a:t>
+            </a:r>
+            <a:endParaRPr sz="2100" b="1" i="0">
               <a:solidFill>
                 <a:srgbClr val="2E75B6"/>
               </a:solidFill>
@@ -12282,11 +12026,270 @@
               <a:ea typeface="PingFang SC" panose="020B0400000000000000" charset="-122"/>
             </a:endParaRPr>
           </a:p>
-        </p:txBody>
-      </p:sp>
-      <p:sp>
-        <p:nvSpPr>
-          <p:cNvPr id="21" name="TextBox 20"/>
+          <a:p>
+            <a:pPr>
+              <a:spcAft>
+                <a:spcPts val="1400"/>
+              </a:spcAft>
+            </a:pPr>
+            <a:r>
+              <a:rPr sz="2100" b="1" i="0">
+                <a:solidFill>
+                  <a:srgbClr val="2E75B6"/>
+                </a:solidFill>
+                <a:latin typeface="PingFang SC" panose="020B0400000000000000" charset="-122"/>
+                <a:ea typeface="PingFang SC" panose="020B0400000000000000" charset="-122"/>
+              </a:rPr>
+              <a:t>▪ </a:t>
+            </a:r>
+            <a:r>
+              <a:rPr sz="2100" b="0" i="0">
+                <a:solidFill>
+                  <a:srgbClr val="262626"/>
+                </a:solidFill>
+                <a:latin typeface="PingFang SC" panose="020B0400000000000000" charset="-122"/>
+                <a:ea typeface="PingFang SC" panose="020B0400000000000000" charset="-122"/>
+              </a:rPr>
+              <a:t>三个数 a、b、c 两两都能通过异或互相转化 ⇒ (a,b)、(b,c)、(a,c) 三组</a:t>
+            </a:r>
+            <a:r>
+              <a:rPr sz="2100" b="1" i="0">
+                <a:solidFill>
+                  <a:srgbClr val="2E75B6"/>
+                </a:solidFill>
+                <a:latin typeface="PingFang SC" panose="020B0400000000000000" charset="-122"/>
+                <a:ea typeface="PingFang SC" panose="020B0400000000000000" charset="-122"/>
+              </a:rPr>
+              <a:t>地位完全对等</a:t>
+            </a:r>
+            <a:endParaRPr sz="2100" b="1" i="0">
+              <a:solidFill>
+                <a:srgbClr val="2E75B6"/>
+              </a:solidFill>
+              <a:latin typeface="PingFang SC" panose="020B0400000000000000" charset="-122"/>
+              <a:ea typeface="PingFang SC" panose="020B0400000000000000" charset="-122"/>
+            </a:endParaRPr>
+          </a:p>
+        </p:txBody>
+      </p:sp>
+      <p:sp>
+        <p:nvSpPr>
+          <p:cNvPr id="6" name="Rounded Rectangle 5"/>
+          <p:cNvSpPr/>
+          <p:nvPr/>
+        </p:nvSpPr>
+        <p:spPr>
+          <a:xfrm>
+            <a:off x="822960" y="4572000"/>
+            <a:ext cx="10515600" cy="1051560"/>
+          </a:xfrm>
+          <a:prstGeom prst="roundRect">
+            <a:avLst/>
+          </a:prstGeom>
+          <a:solidFill>
+            <a:srgbClr val="FCE4D6"/>
+          </a:solidFill>
+          <a:ln>
+            <a:noFill/>
+          </a:ln>
+          <a:effectLst/>
+        </p:spPr>
+        <p:style>
+          <a:lnRef idx="1">
+            <a:schemeClr val="accent1"/>
+          </a:lnRef>
+          <a:fillRef idx="3">
+            <a:schemeClr val="accent1"/>
+          </a:fillRef>
+          <a:effectRef idx="2">
+            <a:schemeClr val="accent1"/>
+          </a:effectRef>
+          <a:fontRef idx="minor">
+            <a:schemeClr val="lt1"/>
+          </a:fontRef>
+        </p:style>
+        <p:txBody>
+          <a:bodyPr wrap="square" lIns="365760" rtlCol="0" anchor="ctr"/>
+          <a:lstStyle/>
+          <a:p>
+            <a:pPr algn="ctr"/>
+            <a:r>
+              <a:rPr sz="2000" b="1" i="0">
+                <a:solidFill>
+                  <a:srgbClr val="C55A11"/>
+                </a:solidFill>
+                <a:latin typeface="PingFang SC" panose="020B0400000000000000" charset="-122"/>
+                <a:ea typeface="PingFang SC" panose="020B0400000000000000" charset="-122"/>
+              </a:rPr>
+              <a:t>不需要</a:t>
+            </a:r>
+            <a:r>
+              <a:rPr lang="zh-CN" sz="2000" b="1" i="0">
+                <a:solidFill>
+                  <a:srgbClr val="C55A11"/>
+                </a:solidFill>
+                <a:latin typeface="PingFang SC" panose="020B0400000000000000" charset="-122"/>
+                <a:ea typeface="PingFang SC" panose="020B0400000000000000" charset="-122"/>
+              </a:rPr>
+              <a:t>讨论</a:t>
+            </a:r>
+            <a:r>
+              <a:rPr sz="2000" b="1" i="0">
+                <a:solidFill>
+                  <a:srgbClr val="C55A11"/>
+                </a:solidFill>
+                <a:latin typeface="PingFang SC" panose="020B0400000000000000" charset="-122"/>
+                <a:ea typeface="PingFang SC" panose="020B0400000000000000" charset="-122"/>
+              </a:rPr>
+              <a:t>三</a:t>
+            </a:r>
+            <a:r>
+              <a:rPr lang="zh-CN" sz="2000" b="1" i="0">
+                <a:solidFill>
+                  <a:srgbClr val="C55A11"/>
+                </a:solidFill>
+                <a:latin typeface="PingFang SC" panose="020B0400000000000000" charset="-122"/>
+                <a:ea typeface="PingFang SC" panose="020B0400000000000000" charset="-122"/>
+              </a:rPr>
+              <a:t>条</a:t>
+            </a:r>
+            <a:r>
+              <a:rPr sz="2000" b="1" i="0">
+                <a:solidFill>
+                  <a:srgbClr val="C55A11"/>
+                </a:solidFill>
+                <a:latin typeface="PingFang SC" panose="020B0400000000000000" charset="-122"/>
+                <a:ea typeface="PingFang SC" panose="020B0400000000000000" charset="-122"/>
+              </a:rPr>
+              <a:t>边谁最长：直接列</a:t>
+            </a:r>
+            <a:r>
+              <a:rPr lang="zh-CN" sz="2000" b="1" i="0">
+                <a:solidFill>
+                  <a:srgbClr val="C55A11"/>
+                </a:solidFill>
+                <a:latin typeface="PingFang SC" panose="020B0400000000000000" charset="-122"/>
+                <a:ea typeface="PingFang SC" panose="020B0400000000000000" charset="-122"/>
+              </a:rPr>
+              <a:t>出</a:t>
+            </a:r>
+            <a:r>
+              <a:rPr sz="2000" b="1" i="0">
+                <a:solidFill>
+                  <a:srgbClr val="C55A11"/>
+                </a:solidFill>
+                <a:latin typeface="PingFang SC" panose="020B0400000000000000" charset="-122"/>
+                <a:ea typeface="PingFang SC" panose="020B0400000000000000" charset="-122"/>
+              </a:rPr>
+              <a:t>三条不等式 a+b &gt; c、b+c &gt; a、a+c &gt; b，</a:t>
+            </a:r>
+            <a:endParaRPr sz="2000" b="1" i="0">
+              <a:solidFill>
+                <a:srgbClr val="C55A11"/>
+              </a:solidFill>
+              <a:latin typeface="PingFang SC" panose="020B0400000000000000" charset="-122"/>
+              <a:ea typeface="PingFang SC" panose="020B0400000000000000" charset="-122"/>
+            </a:endParaRPr>
+          </a:p>
+          <a:p>
+            <a:pPr algn="ctr">
+              <a:spcBef>
+                <a:spcPts val="400"/>
+              </a:spcBef>
+            </a:pPr>
+            <a:r>
+              <a:rPr lang="zh-CN" sz="2000" b="1" i="0">
+                <a:solidFill>
+                  <a:srgbClr val="C55A11"/>
+                </a:solidFill>
+                <a:latin typeface="PingFang SC" panose="020B0400000000000000" charset="-122"/>
+                <a:ea typeface="PingFang SC" panose="020B0400000000000000" charset="-122"/>
+              </a:rPr>
+              <a:t>对于</a:t>
+            </a:r>
+            <a:r>
+              <a:rPr sz="2000" b="1" i="0">
+                <a:solidFill>
+                  <a:srgbClr val="C55A11"/>
+                </a:solidFill>
+                <a:latin typeface="PingFang SC" panose="020B0400000000000000" charset="-122"/>
+                <a:ea typeface="PingFang SC" panose="020B0400000000000000" charset="-122"/>
+              </a:rPr>
+              <a:t>每一条都用</a:t>
+            </a:r>
+            <a:r>
+              <a:rPr lang="zh-CN" sz="2000" b="1" i="0">
+                <a:solidFill>
+                  <a:srgbClr val="C55A11"/>
+                </a:solidFill>
+                <a:latin typeface="PingFang SC" panose="020B0400000000000000" charset="-122"/>
+                <a:ea typeface="PingFang SC" panose="020B0400000000000000" charset="-122"/>
+              </a:rPr>
+              <a:t>刚才的方法</a:t>
+            </a:r>
+            <a:r>
+              <a:rPr sz="2000" b="1" i="0">
+                <a:solidFill>
+                  <a:srgbClr val="C55A11"/>
+                </a:solidFill>
+                <a:latin typeface="PingFang SC" panose="020B0400000000000000" charset="-122"/>
+                <a:ea typeface="PingFang SC" panose="020B0400000000000000" charset="-122"/>
+              </a:rPr>
+              <a:t>判断 —— </a:t>
+            </a:r>
+            <a:r>
+              <a:rPr lang="zh-CN" sz="2000" b="1" i="0">
+                <a:solidFill>
+                  <a:srgbClr val="C55A11"/>
+                </a:solidFill>
+                <a:latin typeface="PingFang SC" panose="020B0400000000000000" charset="-122"/>
+                <a:ea typeface="PingFang SC" panose="020B0400000000000000" charset="-122"/>
+              </a:rPr>
+              <a:t>不等式左边</a:t>
+            </a:r>
+            <a:r>
+              <a:rPr sz="2000" b="1" i="0">
+                <a:solidFill>
+                  <a:srgbClr val="C55A11"/>
+                </a:solidFill>
+                <a:latin typeface="PingFang SC" panose="020B0400000000000000" charset="-122"/>
+                <a:ea typeface="PingFang SC" panose="020B0400000000000000" charset="-122"/>
+              </a:rPr>
+              <a:t>的两个数是否至少有一位</a:t>
+            </a:r>
+            <a:r>
+              <a:rPr lang="zh-CN" sz="2000" b="1" i="0">
+                <a:solidFill>
+                  <a:srgbClr val="C55A11"/>
+                </a:solidFill>
+                <a:latin typeface="PingFang SC" panose="020B0400000000000000" charset="-122"/>
+                <a:ea typeface="PingFang SC" panose="020B0400000000000000" charset="-122"/>
+              </a:rPr>
+              <a:t>都为</a:t>
+            </a:r>
+            <a:r>
+              <a:rPr lang="en-US" altLang="zh-CN" sz="2000" b="1" i="0">
+                <a:solidFill>
+                  <a:srgbClr val="C55A11"/>
+                </a:solidFill>
+                <a:latin typeface="PingFang SC" panose="020B0400000000000000" charset="-122"/>
+                <a:ea typeface="PingFang SC" panose="020B0400000000000000" charset="-122"/>
+              </a:rPr>
+              <a:t>1</a:t>
+            </a:r>
+            <a:endParaRPr sz="2000" b="1" i="0">
+              <a:solidFill>
+                <a:srgbClr val="C55A11"/>
+              </a:solidFill>
+              <a:latin typeface="PingFang SC" panose="020B0400000000000000" charset="-122"/>
+              <a:ea typeface="PingFang SC" panose="020B0400000000000000" charset="-122"/>
+            </a:endParaRPr>
+          </a:p>
+        </p:txBody>
+      </p:sp>
+      <p:sp>
+        <p:nvSpPr>
+          <p:cNvPr id="7" name="TextBox 6"/>
           <p:cNvSpPr txBox="1"/>
           <p:nvPr/>
         </p:nvSpPr>
@@ -12394,7 +12397,7 @@
                 <a:latin typeface="PingFang SC" panose="020B0400000000000000" charset="-122"/>
                 <a:ea typeface="PingFang SC" panose="020B0400000000000000" charset="-122"/>
               </a:rPr>
-              <a:t>容斥框架</a:t>
+              <a:t>转化：三条不等式 → 三个位条件</a:t>
             </a:r>
             <a:endParaRPr sz="2700" b="1" i="0">
               <a:solidFill>
@@ -12458,8 +12461,8 @@
         </p:nvSpPr>
         <p:spPr>
           <a:xfrm>
-            <a:off x="548640" y="1234440"/>
-            <a:ext cx="11155680" cy="457200"/>
+            <a:off x="548640" y="1170432"/>
+            <a:ext cx="11155680" cy="346710"/>
           </a:xfrm>
           <a:prstGeom prst="rect">
             <a:avLst/>
@@ -12474,6 +12477,16 @@
           <a:p>
             <a:pPr algn="l"/>
             <a:r>
+              <a:rPr lang="zh-CN" sz="1900" b="0" i="0">
+                <a:solidFill>
+                  <a:srgbClr val="262626"/>
+                </a:solidFill>
+                <a:latin typeface="PingFang SC" panose="020B0400000000000000" charset="-122"/>
+                <a:ea typeface="PingFang SC" panose="020B0400000000000000" charset="-122"/>
+              </a:rPr>
+              <a:t>对于</a:t>
+            </a:r>
+            <a:r>
               <a:rPr sz="1900" b="0" i="0">
                 <a:solidFill>
                   <a:srgbClr val="262626"/>
@@ -12481,7 +12494,27 @@
                 <a:latin typeface="PingFang SC" panose="020B0400000000000000" charset="-122"/>
                 <a:ea typeface="PingFang SC" panose="020B0400000000000000" charset="-122"/>
               </a:rPr>
-              <a:t>把三个“坏条件”定义为三个坏事件（按位）：</a:t>
+              <a:t>三条不等式</a:t>
+            </a:r>
+            <a:r>
+              <a:rPr lang="zh-CN" sz="1900" b="0" i="0">
+                <a:solidFill>
+                  <a:srgbClr val="262626"/>
+                </a:solidFill>
+                <a:latin typeface="PingFang SC" panose="020B0400000000000000" charset="-122"/>
+                <a:ea typeface="PingFang SC" panose="020B0400000000000000" charset="-122"/>
+              </a:rPr>
+              <a:t>，</a:t>
+            </a:r>
+            <a:r>
+              <a:rPr sz="1900" b="0" i="0">
+                <a:solidFill>
+                  <a:srgbClr val="262626"/>
+                </a:solidFill>
+                <a:latin typeface="PingFang SC" panose="020B0400000000000000" charset="-122"/>
+                <a:ea typeface="PingFang SC" panose="020B0400000000000000" charset="-122"/>
+              </a:rPr>
+              <a:t>逐条用“四种情况小表”判断：</a:t>
             </a:r>
             <a:endParaRPr sz="1900" b="0" i="0">
               <a:solidFill>
@@ -12501,8 +12534,8 @@
         </p:nvSpPr>
         <p:spPr>
           <a:xfrm>
-            <a:off x="548640" y="1783080"/>
-            <a:ext cx="3566160" cy="868680"/>
+            <a:off x="548640" y="1691640"/>
+            <a:ext cx="2377440" cy="868680"/>
           </a:xfrm>
           <a:prstGeom prst="roundRect">
             <a:avLst/>
@@ -12547,8 +12580,8 @@
         </p:nvSpPr>
         <p:spPr>
           <a:xfrm>
-            <a:off x="548640" y="1984248"/>
-            <a:ext cx="3566160" cy="502920"/>
+            <a:off x="548640" y="1892808"/>
+            <a:ext cx="2377440" cy="502920"/>
           </a:xfrm>
           <a:prstGeom prst="rect">
             <a:avLst/>
@@ -12563,16 +12596,16 @@
           <a:p>
             <a:pPr algn="ctr"/>
             <a:r>
-              <a:rPr sz="2000" b="1" i="0">
+              <a:rPr sz="1900" b="1" i="0">
                 <a:solidFill>
                   <a:srgbClr val="C55A11"/>
                 </a:solidFill>
                 <a:latin typeface="PingFang SC" panose="020B0400000000000000" charset="-122"/>
                 <a:ea typeface="PingFang SC" panose="020B0400000000000000" charset="-122"/>
               </a:rPr>
-              <a:t>E₁ = { a &amp; b = 0 }</a:t>
-            </a:r>
-            <a:endParaRPr sz="2000" b="1" i="0">
+              <a:t>a + b &gt; c</a:t>
+            </a:r>
+            <a:endParaRPr sz="1900" b="1" i="0">
               <a:solidFill>
                 <a:srgbClr val="C55A11"/>
               </a:solidFill>
@@ -12590,8 +12623,204 @@
         </p:nvSpPr>
         <p:spPr>
           <a:xfrm>
-            <a:off x="4343400" y="1783080"/>
-            <a:ext cx="3566160" cy="868680"/>
+            <a:off x="3108960" y="1691640"/>
+            <a:ext cx="3291840" cy="868680"/>
+          </a:xfrm>
+          <a:prstGeom prst="roundRect">
+            <a:avLst/>
+          </a:prstGeom>
+          <a:solidFill>
+            <a:srgbClr val="EDEDED"/>
+          </a:solidFill>
+          <a:ln>
+            <a:noFill/>
+          </a:ln>
+          <a:effectLst/>
+        </p:spPr>
+        <p:style>
+          <a:lnRef idx="1">
+            <a:schemeClr val="accent1"/>
+          </a:lnRef>
+          <a:fillRef idx="3">
+            <a:schemeClr val="accent1"/>
+          </a:fillRef>
+          <a:effectRef idx="2">
+            <a:schemeClr val="accent1"/>
+          </a:effectRef>
+          <a:fontRef idx="minor">
+            <a:schemeClr val="lt1"/>
+          </a:fontRef>
+        </p:style>
+        <p:txBody>
+          <a:bodyPr rtlCol="0" anchor="ctr"/>
+          <a:lstStyle/>
+          <a:p>
+            <a:pPr algn="ctr"/>
+          </a:p>
+        </p:txBody>
+      </p:sp>
+      <p:sp>
+        <p:nvSpPr>
+          <p:cNvPr id="8" name="TextBox 7"/>
+          <p:cNvSpPr txBox="1"/>
+          <p:nvPr/>
+        </p:nvSpPr>
+        <p:spPr>
+          <a:xfrm>
+            <a:off x="3108960" y="1892808"/>
+            <a:ext cx="3291840" cy="300355"/>
+          </a:xfrm>
+          <a:prstGeom prst="rect">
+            <a:avLst/>
+          </a:prstGeom>
+          <a:noFill/>
+        </p:spPr>
+        <p:txBody>
+          <a:bodyPr wrap="square" lIns="54864" tIns="27432" rIns="54864" bIns="27432">
+            <a:spAutoFit/>
+          </a:bodyPr>
+          <a:lstStyle/>
+          <a:p>
+            <a:pPr algn="ctr"/>
+            <a:r>
+              <a:rPr sz="1600" b="1">
+                <a:solidFill>
+                  <a:srgbClr val="262626"/>
+                </a:solidFill>
+                <a:latin typeface="PingFang SC" panose="020B0400000000000000" charset="-122"/>
+                <a:ea typeface="PingFang SC" panose="020B0400000000000000" charset="-122"/>
+                <a:sym typeface="+mn-ea"/>
+              </a:rPr>
+              <a:t>⟺</a:t>
+            </a:r>
+            <a:r>
+              <a:rPr sz="1600" b="1" i="0">
+                <a:solidFill>
+                  <a:srgbClr val="262626"/>
+                </a:solidFill>
+                <a:latin typeface="PingFang SC" panose="020B0400000000000000" charset="-122"/>
+                <a:ea typeface="PingFang SC" panose="020B0400000000000000" charset="-122"/>
+              </a:rPr>
+              <a:t>(a, b) 有一位“11”</a:t>
+            </a:r>
+            <a:endParaRPr sz="1600" b="1" i="0">
+              <a:solidFill>
+                <a:srgbClr val="262626"/>
+              </a:solidFill>
+              <a:latin typeface="PingFang SC" panose="020B0400000000000000" charset="-122"/>
+              <a:ea typeface="PingFang SC" panose="020B0400000000000000" charset="-122"/>
+            </a:endParaRPr>
+          </a:p>
+        </p:txBody>
+      </p:sp>
+      <p:sp>
+        <p:nvSpPr>
+          <p:cNvPr id="9" name="Rounded Rectangle 8"/>
+          <p:cNvSpPr/>
+          <p:nvPr/>
+        </p:nvSpPr>
+        <p:spPr>
+          <a:xfrm>
+            <a:off x="6583680" y="1691640"/>
+            <a:ext cx="5120640" cy="868680"/>
+          </a:xfrm>
+          <a:prstGeom prst="roundRect">
+            <a:avLst/>
+          </a:prstGeom>
+          <a:solidFill>
+            <a:srgbClr val="EDEDED"/>
+          </a:solidFill>
+          <a:ln>
+            <a:noFill/>
+          </a:ln>
+          <a:effectLst/>
+        </p:spPr>
+        <p:style>
+          <a:lnRef idx="1">
+            <a:schemeClr val="accent1"/>
+          </a:lnRef>
+          <a:fillRef idx="3">
+            <a:schemeClr val="accent1"/>
+          </a:fillRef>
+          <a:effectRef idx="2">
+            <a:schemeClr val="accent1"/>
+          </a:effectRef>
+          <a:fontRef idx="minor">
+            <a:schemeClr val="lt1"/>
+          </a:fontRef>
+        </p:style>
+        <p:txBody>
+          <a:bodyPr rtlCol="0" anchor="ctr"/>
+          <a:lstStyle/>
+          <a:p>
+            <a:pPr algn="ctr"/>
+          </a:p>
+        </p:txBody>
+      </p:sp>
+      <p:sp>
+        <p:nvSpPr>
+          <p:cNvPr id="10" name="TextBox 9"/>
+          <p:cNvSpPr txBox="1"/>
+          <p:nvPr/>
+        </p:nvSpPr>
+        <p:spPr>
+          <a:xfrm>
+            <a:off x="6583680" y="1874520"/>
+            <a:ext cx="5120640" cy="346710"/>
+          </a:xfrm>
+          <a:prstGeom prst="rect">
+            <a:avLst/>
+          </a:prstGeom>
+          <a:noFill/>
+        </p:spPr>
+        <p:txBody>
+          <a:bodyPr wrap="square" lIns="54864" tIns="27432" rIns="54864" bIns="27432">
+            <a:spAutoFit/>
+          </a:bodyPr>
+          <a:lstStyle/>
+          <a:p>
+            <a:pPr algn="ctr"/>
+            <a:r>
+              <a:rPr sz="1900" b="1" i="0">
+                <a:solidFill>
+                  <a:srgbClr val="262626"/>
+                </a:solidFill>
+                <a:latin typeface="PingFang SC" panose="020B0400000000000000" charset="-122"/>
+                <a:ea typeface="PingFang SC" panose="020B0400000000000000" charset="-122"/>
+              </a:rPr>
+              <a:t>⟺　</a:t>
+            </a:r>
+            <a:r>
+              <a:rPr sz="1900" b="1">
+                <a:solidFill>
+                  <a:srgbClr val="262626"/>
+                </a:solidFill>
+                <a:latin typeface="PingFang SC" panose="020B0400000000000000" charset="-122"/>
+                <a:ea typeface="PingFang SC" panose="020B0400000000000000" charset="-122"/>
+                <a:sym typeface="+mn-ea"/>
+              </a:rPr>
+              <a:t>(a, b) 有一位“11”</a:t>
+            </a:r>
+            <a:endParaRPr sz="1900" b="1" i="0">
+              <a:solidFill>
+                <a:srgbClr val="2E75B6"/>
+              </a:solidFill>
+              <a:latin typeface="PingFang SC" panose="020B0400000000000000" charset="-122"/>
+              <a:ea typeface="PingFang SC" panose="020B0400000000000000" charset="-122"/>
+            </a:endParaRPr>
+          </a:p>
+        </p:txBody>
+      </p:sp>
+      <p:sp>
+        <p:nvSpPr>
+          <p:cNvPr id="11" name="Rounded Rectangle 10"/>
+          <p:cNvSpPr/>
+          <p:nvPr/>
+        </p:nvSpPr>
+        <p:spPr>
+          <a:xfrm>
+            <a:off x="548640" y="2715768"/>
+            <a:ext cx="2377440" cy="868680"/>
           </a:xfrm>
           <a:prstGeom prst="roundRect">
             <a:avLst/>
@@ -12630,14 +12859,14 @@
       </p:sp>
       <p:sp>
         <p:nvSpPr>
-          <p:cNvPr id="8" name="TextBox 7"/>
+          <p:cNvPr id="12" name="TextBox 11"/>
           <p:cNvSpPr txBox="1"/>
           <p:nvPr/>
         </p:nvSpPr>
         <p:spPr>
           <a:xfrm>
-            <a:off x="4343400" y="1984248"/>
-            <a:ext cx="3566160" cy="502920"/>
+            <a:off x="548640" y="2916936"/>
+            <a:ext cx="2377440" cy="502920"/>
           </a:xfrm>
           <a:prstGeom prst="rect">
             <a:avLst/>
@@ -12652,16 +12881,16 @@
           <a:p>
             <a:pPr algn="ctr"/>
             <a:r>
-              <a:rPr sz="2000" b="1" i="0">
+              <a:rPr sz="1900" b="1" i="0">
                 <a:solidFill>
                   <a:srgbClr val="C55A11"/>
                 </a:solidFill>
                 <a:latin typeface="PingFang SC" panose="020B0400000000000000" charset="-122"/>
                 <a:ea typeface="PingFang SC" panose="020B0400000000000000" charset="-122"/>
               </a:rPr>
-              <a:t>E₂ = { a ⊆ b }</a:t>
-            </a:r>
-            <a:endParaRPr sz="2000" b="1" i="0">
+              <a:t>b + c &gt; a</a:t>
+            </a:r>
+            <a:endParaRPr sz="1900" b="1" i="0">
               <a:solidFill>
                 <a:srgbClr val="C55A11"/>
               </a:solidFill>
@@ -12673,14 +12902,242 @@
       </p:sp>
       <p:sp>
         <p:nvSpPr>
-          <p:cNvPr id="9" name="Rounded Rectangle 8"/>
+          <p:cNvPr id="13" name="Rounded Rectangle 12"/>
           <p:cNvSpPr/>
           <p:nvPr/>
         </p:nvSpPr>
         <p:spPr>
           <a:xfrm>
-            <a:off x="8138160" y="1783080"/>
-            <a:ext cx="3566160" cy="868680"/>
+            <a:off x="3108960" y="2715768"/>
+            <a:ext cx="3291840" cy="868680"/>
+          </a:xfrm>
+          <a:prstGeom prst="roundRect">
+            <a:avLst/>
+          </a:prstGeom>
+          <a:solidFill>
+            <a:srgbClr val="EDEDED"/>
+          </a:solidFill>
+          <a:ln>
+            <a:noFill/>
+          </a:ln>
+          <a:effectLst/>
+        </p:spPr>
+        <p:style>
+          <a:lnRef idx="1">
+            <a:schemeClr val="accent1"/>
+          </a:lnRef>
+          <a:fillRef idx="3">
+            <a:schemeClr val="accent1"/>
+          </a:fillRef>
+          <a:effectRef idx="2">
+            <a:schemeClr val="accent1"/>
+          </a:effectRef>
+          <a:fontRef idx="minor">
+            <a:schemeClr val="lt1"/>
+          </a:fontRef>
+        </p:style>
+        <p:txBody>
+          <a:bodyPr rtlCol="0" anchor="ctr"/>
+          <a:lstStyle/>
+          <a:p>
+            <a:pPr algn="ctr"/>
+          </a:p>
+        </p:txBody>
+      </p:sp>
+      <p:sp>
+        <p:nvSpPr>
+          <p:cNvPr id="14" name="TextBox 13"/>
+          <p:cNvSpPr txBox="1"/>
+          <p:nvPr/>
+        </p:nvSpPr>
+        <p:spPr>
+          <a:xfrm>
+            <a:off x="3108960" y="2916936"/>
+            <a:ext cx="3291840" cy="300355"/>
+          </a:xfrm>
+          <a:prstGeom prst="rect">
+            <a:avLst/>
+          </a:prstGeom>
+          <a:noFill/>
+        </p:spPr>
+        <p:txBody>
+          <a:bodyPr wrap="square" lIns="54864" tIns="27432" rIns="54864" bIns="27432">
+            <a:spAutoFit/>
+          </a:bodyPr>
+          <a:lstStyle/>
+          <a:p>
+            <a:pPr algn="ctr"/>
+            <a:r>
+              <a:rPr sz="1600" b="1">
+                <a:solidFill>
+                  <a:srgbClr val="262626"/>
+                </a:solidFill>
+                <a:latin typeface="PingFang SC" panose="020B0400000000000000" charset="-122"/>
+                <a:ea typeface="PingFang SC" panose="020B0400000000000000" charset="-122"/>
+                <a:sym typeface="+mn-ea"/>
+              </a:rPr>
+              <a:t>⟺</a:t>
+            </a:r>
+            <a:r>
+              <a:rPr sz="1600" b="1" i="0">
+                <a:solidFill>
+                  <a:srgbClr val="262626"/>
+                </a:solidFill>
+                <a:latin typeface="PingFang SC" panose="020B0400000000000000" charset="-122"/>
+                <a:ea typeface="PingFang SC" panose="020B0400000000000000" charset="-122"/>
+              </a:rPr>
+              <a:t>(b, c) 有一位“11”</a:t>
+            </a:r>
+            <a:endParaRPr sz="1600" b="1" i="0">
+              <a:solidFill>
+                <a:srgbClr val="262626"/>
+              </a:solidFill>
+              <a:latin typeface="PingFang SC" panose="020B0400000000000000" charset="-122"/>
+              <a:ea typeface="PingFang SC" panose="020B0400000000000000" charset="-122"/>
+            </a:endParaRPr>
+          </a:p>
+        </p:txBody>
+      </p:sp>
+      <p:sp>
+        <p:nvSpPr>
+          <p:cNvPr id="15" name="Rounded Rectangle 14"/>
+          <p:cNvSpPr/>
+          <p:nvPr/>
+        </p:nvSpPr>
+        <p:spPr>
+          <a:xfrm>
+            <a:off x="6583680" y="2715768"/>
+            <a:ext cx="5120640" cy="868680"/>
+          </a:xfrm>
+          <a:prstGeom prst="roundRect">
+            <a:avLst/>
+          </a:prstGeom>
+          <a:solidFill>
+            <a:srgbClr val="EDEDED"/>
+          </a:solidFill>
+          <a:ln>
+            <a:noFill/>
+          </a:ln>
+          <a:effectLst/>
+        </p:spPr>
+        <p:style>
+          <a:lnRef idx="1">
+            <a:schemeClr val="accent1"/>
+          </a:lnRef>
+          <a:fillRef idx="3">
+            <a:schemeClr val="accent1"/>
+          </a:fillRef>
+          <a:effectRef idx="2">
+            <a:schemeClr val="accent1"/>
+          </a:effectRef>
+          <a:fontRef idx="minor">
+            <a:schemeClr val="lt1"/>
+          </a:fontRef>
+        </p:style>
+        <p:txBody>
+          <a:bodyPr rtlCol="0" anchor="ctr"/>
+          <a:lstStyle/>
+          <a:p>
+            <a:pPr algn="ctr"/>
+          </a:p>
+        </p:txBody>
+      </p:sp>
+      <p:sp>
+        <p:nvSpPr>
+          <p:cNvPr id="16" name="TextBox 15"/>
+          <p:cNvSpPr txBox="1"/>
+          <p:nvPr/>
+        </p:nvSpPr>
+        <p:spPr>
+          <a:xfrm>
+            <a:off x="6583680" y="2898648"/>
+            <a:ext cx="5120640" cy="638810"/>
+          </a:xfrm>
+          <a:prstGeom prst="rect">
+            <a:avLst/>
+          </a:prstGeom>
+          <a:noFill/>
+        </p:spPr>
+        <p:txBody>
+          <a:bodyPr wrap="square" lIns="54864" tIns="27432" rIns="54864" bIns="27432">
+            <a:spAutoFit/>
+          </a:bodyPr>
+          <a:lstStyle/>
+          <a:p>
+            <a:pPr algn="ctr"/>
+            <a:r>
+              <a:rPr sz="1900" b="1" i="0">
+                <a:solidFill>
+                  <a:srgbClr val="262626"/>
+                </a:solidFill>
+                <a:latin typeface="PingFang SC" panose="020B0400000000000000" charset="-122"/>
+                <a:ea typeface="PingFang SC" panose="020B0400000000000000" charset="-122"/>
+              </a:rPr>
+              <a:t>⟺　</a:t>
+            </a:r>
+            <a:r>
+              <a:rPr sz="1900" b="1">
+                <a:solidFill>
+                  <a:srgbClr val="262626"/>
+                </a:solidFill>
+                <a:latin typeface="PingFang SC" panose="020B0400000000000000" charset="-122"/>
+                <a:ea typeface="PingFang SC" panose="020B0400000000000000" charset="-122"/>
+                <a:sym typeface="+mn-ea"/>
+              </a:rPr>
+              <a:t>(a, b) 有一位“</a:t>
+            </a:r>
+            <a:r>
+              <a:rPr lang="en-US" sz="1900" b="1">
+                <a:solidFill>
+                  <a:srgbClr val="262626"/>
+                </a:solidFill>
+                <a:latin typeface="PingFang SC" panose="020B0400000000000000" charset="-122"/>
+                <a:ea typeface="PingFang SC" panose="020B0400000000000000" charset="-122"/>
+                <a:sym typeface="+mn-ea"/>
+              </a:rPr>
+              <a:t>0</a:t>
+            </a:r>
+            <a:r>
+              <a:rPr sz="1900" b="1">
+                <a:solidFill>
+                  <a:srgbClr val="262626"/>
+                </a:solidFill>
+                <a:latin typeface="PingFang SC" panose="020B0400000000000000" charset="-122"/>
+                <a:ea typeface="PingFang SC" panose="020B0400000000000000" charset="-122"/>
+                <a:sym typeface="+mn-ea"/>
+              </a:rPr>
+              <a:t>1”</a:t>
+            </a:r>
+            <a:endParaRPr sz="1900" b="1" i="0">
+              <a:solidFill>
+                <a:srgbClr val="262626"/>
+              </a:solidFill>
+              <a:latin typeface="PingFang SC" panose="020B0400000000000000" charset="-122"/>
+              <a:ea typeface="PingFang SC" panose="020B0400000000000000" charset="-122"/>
+            </a:endParaRPr>
+          </a:p>
+          <a:p>
+            <a:pPr algn="ctr"/>
+            <a:endParaRPr sz="1900" b="1" i="0">
+              <a:solidFill>
+                <a:srgbClr val="2E75B6"/>
+              </a:solidFill>
+              <a:latin typeface="PingFang SC" panose="020B0400000000000000" charset="-122"/>
+              <a:ea typeface="PingFang SC" panose="020B0400000000000000" charset="-122"/>
+            </a:endParaRPr>
+          </a:p>
+        </p:txBody>
+      </p:sp>
+      <p:sp>
+        <p:nvSpPr>
+          <p:cNvPr id="17" name="Rounded Rectangle 16"/>
+          <p:cNvSpPr/>
+          <p:nvPr/>
+        </p:nvSpPr>
+        <p:spPr>
+          <a:xfrm>
+            <a:off x="548640" y="3739896"/>
+            <a:ext cx="2377440" cy="868680"/>
           </a:xfrm>
           <a:prstGeom prst="roundRect">
             <a:avLst/>
@@ -12719,14 +13176,14 @@
       </p:sp>
       <p:sp>
         <p:nvSpPr>
-          <p:cNvPr id="10" name="TextBox 9"/>
+          <p:cNvPr id="18" name="TextBox 17"/>
           <p:cNvSpPr txBox="1"/>
           <p:nvPr/>
         </p:nvSpPr>
         <p:spPr>
           <a:xfrm>
-            <a:off x="8138160" y="1984248"/>
-            <a:ext cx="3566160" cy="502920"/>
+            <a:off x="548640" y="3941063"/>
+            <a:ext cx="2377440" cy="502920"/>
           </a:xfrm>
           <a:prstGeom prst="rect">
             <a:avLst/>
@@ -12741,16 +13198,16 @@
           <a:p>
             <a:pPr algn="ctr"/>
             <a:r>
-              <a:rPr sz="2000" b="1" i="0">
+              <a:rPr sz="1900" b="1" i="0">
                 <a:solidFill>
                   <a:srgbClr val="C55A11"/>
                 </a:solidFill>
                 <a:latin typeface="PingFang SC" panose="020B0400000000000000" charset="-122"/>
                 <a:ea typeface="PingFang SC" panose="020B0400000000000000" charset="-122"/>
               </a:rPr>
-              <a:t>E₃ = { b ⊆ a }</a:t>
-            </a:r>
-            <a:endParaRPr sz="2000" b="1" i="0">
+              <a:t>a + c &gt; b</a:t>
+            </a:r>
+            <a:endParaRPr sz="1900" b="1" i="0">
               <a:solidFill>
                 <a:srgbClr val="C55A11"/>
               </a:solidFill>
@@ -12762,14 +13219,58 @@
       </p:sp>
       <p:sp>
         <p:nvSpPr>
-          <p:cNvPr id="11" name="TextBox 10"/>
+          <p:cNvPr id="19" name="Rounded Rectangle 18"/>
+          <p:cNvSpPr/>
+          <p:nvPr/>
+        </p:nvSpPr>
+        <p:spPr>
+          <a:xfrm>
+            <a:off x="3108960" y="3739896"/>
+            <a:ext cx="3291840" cy="868680"/>
+          </a:xfrm>
+          <a:prstGeom prst="roundRect">
+            <a:avLst/>
+          </a:prstGeom>
+          <a:solidFill>
+            <a:srgbClr val="EDEDED"/>
+          </a:solidFill>
+          <a:ln>
+            <a:noFill/>
+          </a:ln>
+          <a:effectLst/>
+        </p:spPr>
+        <p:style>
+          <a:lnRef idx="1">
+            <a:schemeClr val="accent1"/>
+          </a:lnRef>
+          <a:fillRef idx="3">
+            <a:schemeClr val="accent1"/>
+          </a:fillRef>
+          <a:effectRef idx="2">
+            <a:schemeClr val="accent1"/>
+          </a:effectRef>
+          <a:fontRef idx="minor">
+            <a:schemeClr val="lt1"/>
+          </a:fontRef>
+        </p:style>
+        <p:txBody>
+          <a:bodyPr rtlCol="0" anchor="ctr"/>
+          <a:lstStyle/>
+          <a:p>
+            <a:pPr algn="ctr"/>
+          </a:p>
+        </p:txBody>
+      </p:sp>
+      <p:sp>
+        <p:nvSpPr>
+          <p:cNvPr id="20" name="TextBox 19"/>
           <p:cNvSpPr txBox="1"/>
           <p:nvPr/>
         </p:nvSpPr>
         <p:spPr>
           <a:xfrm>
-            <a:off x="548640" y="2926080"/>
-            <a:ext cx="11155680" cy="457200"/>
+            <a:off x="3108960" y="3941063"/>
+            <a:ext cx="3291840" cy="300355"/>
           </a:xfrm>
           <a:prstGeom prst="rect">
             <a:avLst/>
@@ -12782,58 +13283,29 @@
           </a:bodyPr>
           <a:lstStyle/>
           <a:p>
-            <a:pPr algn="l"/>
-            <a:r>
-              <a:rPr sz="1900" b="0" i="0">
+            <a:pPr algn="ctr"/>
+            <a:r>
+              <a:rPr sz="1600" b="1">
                 <a:solidFill>
                   <a:srgbClr val="262626"/>
                 </a:solidFill>
                 <a:latin typeface="PingFang SC" panose="020B0400000000000000" charset="-122"/>
                 <a:ea typeface="PingFang SC" panose="020B0400000000000000" charset="-122"/>
-              </a:rPr>
-              <a:t>全体对数 (2</a:t>
-            </a:r>
-            <a:r>
-              <a:rPr sz="1900" b="0" i="0" baseline="30000">
+                <a:sym typeface="+mn-ea"/>
+              </a:rPr>
+              <a:t>⟺</a:t>
+            </a:r>
+            <a:r>
+              <a:rPr sz="1600" b="1" i="0">
                 <a:solidFill>
                   <a:srgbClr val="262626"/>
                 </a:solidFill>
                 <a:latin typeface="PingFang SC" panose="020B0400000000000000" charset="-122"/>
                 <a:ea typeface="PingFang SC" panose="020B0400000000000000" charset="-122"/>
               </a:rPr>
-              <a:t>N</a:t>
-            </a:r>
-            <a:r>
-              <a:rPr sz="1900" b="0" i="0">
-                <a:solidFill>
-                  <a:srgbClr val="262626"/>
-                </a:solidFill>
-                <a:latin typeface="PingFang SC" panose="020B0400000000000000" charset="-122"/>
-                <a:ea typeface="PingFang SC" panose="020B0400000000000000" charset="-122"/>
-              </a:rPr>
-              <a:t> − 1)² = </a:t>
-            </a:r>
-            <a:r>
-              <a:rPr sz="1900" b="1" i="0">
-                <a:solidFill>
-                  <a:srgbClr val="2E75B6"/>
-                </a:solidFill>
-                <a:latin typeface="PingFang SC" panose="020B0400000000000000" charset="-122"/>
-                <a:ea typeface="PingFang SC" panose="020B0400000000000000" charset="-122"/>
-              </a:rPr>
-              <a:t>4^{N} − 2^{N+1} + 1</a:t>
-            </a:r>
-            <a:r>
-              <a:rPr sz="1900" b="0" i="0">
-                <a:solidFill>
-                  <a:srgbClr val="262626"/>
-                </a:solidFill>
-                <a:latin typeface="PingFang SC" panose="020B0400000000000000" charset="-122"/>
-                <a:ea typeface="PingFang SC" panose="020B0400000000000000" charset="-122"/>
-              </a:rPr>
-              <a:t>，答案 = 全体 − 坏事件并集：</a:t>
-            </a:r>
-            <a:endParaRPr sz="1900" b="0" i="0">
+              <a:t>(a, c) 有一位“11”</a:t>
+            </a:r>
+            <a:endParaRPr sz="1600" b="1" i="0">
               <a:solidFill>
                 <a:srgbClr val="262626"/>
               </a:solidFill>
@@ -12845,14 +13317,144 @@
       </p:sp>
       <p:sp>
         <p:nvSpPr>
-          <p:cNvPr id="12" name="Rounded Rectangle 11"/>
+          <p:cNvPr id="21" name="Rounded Rectangle 20"/>
           <p:cNvSpPr/>
           <p:nvPr/>
         </p:nvSpPr>
         <p:spPr>
           <a:xfrm>
-            <a:off x="822960" y="3520440"/>
-            <a:ext cx="10515600" cy="1005840"/>
+            <a:off x="6583680" y="3739896"/>
+            <a:ext cx="5120640" cy="868680"/>
+          </a:xfrm>
+          <a:prstGeom prst="roundRect">
+            <a:avLst/>
+          </a:prstGeom>
+          <a:solidFill>
+            <a:srgbClr val="EDEDED"/>
+          </a:solidFill>
+          <a:ln>
+            <a:noFill/>
+          </a:ln>
+          <a:effectLst/>
+        </p:spPr>
+        <p:style>
+          <a:lnRef idx="1">
+            <a:schemeClr val="accent1"/>
+          </a:lnRef>
+          <a:fillRef idx="3">
+            <a:schemeClr val="accent1"/>
+          </a:fillRef>
+          <a:effectRef idx="2">
+            <a:schemeClr val="accent1"/>
+          </a:effectRef>
+          <a:fontRef idx="minor">
+            <a:schemeClr val="lt1"/>
+          </a:fontRef>
+        </p:style>
+        <p:txBody>
+          <a:bodyPr rtlCol="0" anchor="ctr"/>
+          <a:lstStyle/>
+          <a:p>
+            <a:pPr algn="ctr"/>
+          </a:p>
+        </p:txBody>
+      </p:sp>
+      <p:sp>
+        <p:nvSpPr>
+          <p:cNvPr id="22" name="TextBox 21"/>
+          <p:cNvSpPr txBox="1"/>
+          <p:nvPr/>
+        </p:nvSpPr>
+        <p:spPr>
+          <a:xfrm>
+            <a:off x="6583680" y="3922776"/>
+            <a:ext cx="5120640" cy="638810"/>
+          </a:xfrm>
+          <a:prstGeom prst="rect">
+            <a:avLst/>
+          </a:prstGeom>
+          <a:noFill/>
+        </p:spPr>
+        <p:txBody>
+          <a:bodyPr wrap="square" lIns="54864" tIns="27432" rIns="54864" bIns="27432">
+            <a:spAutoFit/>
+          </a:bodyPr>
+          <a:lstStyle/>
+          <a:p>
+            <a:pPr algn="ctr"/>
+            <a:r>
+              <a:rPr sz="1900" b="1" i="0">
+                <a:solidFill>
+                  <a:srgbClr val="262626"/>
+                </a:solidFill>
+                <a:latin typeface="PingFang SC" panose="020B0400000000000000" charset="-122"/>
+                <a:ea typeface="PingFang SC" panose="020B0400000000000000" charset="-122"/>
+              </a:rPr>
+              <a:t>⟺　</a:t>
+            </a:r>
+            <a:r>
+              <a:rPr sz="1900" b="1">
+                <a:solidFill>
+                  <a:srgbClr val="262626"/>
+                </a:solidFill>
+                <a:latin typeface="PingFang SC" panose="020B0400000000000000" charset="-122"/>
+                <a:ea typeface="PingFang SC" panose="020B0400000000000000" charset="-122"/>
+                <a:sym typeface="+mn-ea"/>
+              </a:rPr>
+              <a:t>(a, b) 有一位“1</a:t>
+            </a:r>
+            <a:r>
+              <a:rPr lang="en-US" sz="1900" b="1">
+                <a:solidFill>
+                  <a:srgbClr val="262626"/>
+                </a:solidFill>
+                <a:latin typeface="PingFang SC" panose="020B0400000000000000" charset="-122"/>
+                <a:ea typeface="PingFang SC" panose="020B0400000000000000" charset="-122"/>
+                <a:sym typeface="+mn-ea"/>
+              </a:rPr>
+              <a:t>0</a:t>
+            </a:r>
+            <a:r>
+              <a:rPr sz="1900" b="1">
+                <a:solidFill>
+                  <a:srgbClr val="262626"/>
+                </a:solidFill>
+                <a:latin typeface="PingFang SC" panose="020B0400000000000000" charset="-122"/>
+                <a:ea typeface="PingFang SC" panose="020B0400000000000000" charset="-122"/>
+                <a:sym typeface="+mn-ea"/>
+              </a:rPr>
+              <a:t>”</a:t>
+            </a:r>
+            <a:endParaRPr sz="1900" b="1" i="0">
+              <a:solidFill>
+                <a:srgbClr val="262626"/>
+              </a:solidFill>
+              <a:latin typeface="PingFang SC" panose="020B0400000000000000" charset="-122"/>
+              <a:ea typeface="PingFang SC" panose="020B0400000000000000" charset="-122"/>
+            </a:endParaRPr>
+          </a:p>
+          <a:p>
+            <a:pPr algn="ctr"/>
+            <a:endParaRPr sz="1900" b="1" i="0">
+              <a:solidFill>
+                <a:srgbClr val="2E75B6"/>
+              </a:solidFill>
+              <a:latin typeface="PingFang SC" panose="020B0400000000000000" charset="-122"/>
+              <a:ea typeface="PingFang SC" panose="020B0400000000000000" charset="-122"/>
+            </a:endParaRPr>
+          </a:p>
+        </p:txBody>
+      </p:sp>
+      <p:sp>
+        <p:nvSpPr>
+          <p:cNvPr id="24" name="Rounded Rectangle 23"/>
+          <p:cNvSpPr/>
+          <p:nvPr/>
+        </p:nvSpPr>
+        <p:spPr>
+          <a:xfrm>
+            <a:off x="548640" y="5440680"/>
+            <a:ext cx="11155680" cy="822960"/>
           </a:xfrm>
           <a:prstGeom prst="roundRect">
             <a:avLst/>
@@ -12880,76 +13482,143 @@
           </a:fontRef>
         </p:style>
         <p:txBody>
-          <a:bodyPr wrap="square" lIns="274320" rtlCol="0" anchor="ctr"/>
+          <a:bodyPr wrap="square" lIns="365760" rtlCol="0" anchor="ctr"/>
           <a:lstStyle/>
           <a:p>
             <a:pPr algn="ctr"/>
             <a:r>
-              <a:rPr sz="2600" b="1" i="0">
-                <a:solidFill>
-                  <a:srgbClr val="1F3864"/>
-                </a:solidFill>
-                <a:latin typeface="PingFang SC" panose="020B0400000000000000" charset="-122"/>
-                <a:ea typeface="PingFang SC" panose="020B0400000000000000" charset="-122"/>
-              </a:rPr>
-              <a:t>Ans = (2^N − 1)² − |E₁ ∪ E₂ ∪ E₃|</a:t>
-            </a:r>
-            <a:endParaRPr sz="2600" b="1" i="0">
-              <a:solidFill>
-                <a:srgbClr val="1F3864"/>
-              </a:solidFill>
-              <a:latin typeface="PingFang SC" panose="020B0400000000000000" charset="-122"/>
-              <a:ea typeface="PingFang SC" panose="020B0400000000000000" charset="-122"/>
-            </a:endParaRPr>
-          </a:p>
-        </p:txBody>
-      </p:sp>
-      <p:sp>
-        <p:nvSpPr>
-          <p:cNvPr id="13" name="TextBox 12"/>
-          <p:cNvSpPr txBox="1"/>
-          <p:nvPr/>
-        </p:nvSpPr>
-        <p:spPr>
-          <a:xfrm>
-            <a:off x="548640" y="4892040"/>
-            <a:ext cx="11155680" cy="457200"/>
-          </a:xfrm>
-          <a:prstGeom prst="rect">
-            <a:avLst/>
-          </a:prstGeom>
-          <a:noFill/>
-        </p:spPr>
-        <p:txBody>
-          <a:bodyPr wrap="square" lIns="54864" tIns="27432" rIns="54864" bIns="27432">
-            <a:spAutoFit/>
-          </a:bodyPr>
-          <a:lstStyle/>
-          <a:p>
-            <a:pPr algn="l"/>
-            <a:r>
-              <a:rPr sz="1900" b="0" i="0">
+              <a:rPr lang="en-US" altLang="zh-CN" sz="2100" b="1" i="0">
                 <a:solidFill>
                   <a:srgbClr val="262626"/>
                 </a:solidFill>
                 <a:latin typeface="PingFang SC" panose="020B0400000000000000" charset="-122"/>
                 <a:ea typeface="PingFang SC" panose="020B0400000000000000" charset="-122"/>
               </a:rPr>
-              <a:t>下面逐个计算 |E₁|、|E₂|、|E₃| 与两两交集。</a:t>
-            </a:r>
-            <a:endParaRPr sz="1900" b="0" i="0">
+              <a:t>存在以a、b、</a:t>
+            </a:r>
+            <a:r>
+              <a:rPr lang="en-US" altLang="zh-CN" sz="2100" b="1">
+                <a:solidFill>
+                  <a:srgbClr val="262626"/>
+                </a:solidFill>
+                <a:latin typeface="PingFang SC" panose="020B0400000000000000" charset="-122"/>
+                <a:ea typeface="PingFang SC" panose="020B0400000000000000" charset="-122"/>
+                <a:sym typeface="+mn-ea"/>
+              </a:rPr>
+              <a:t>c为边长</a:t>
+            </a:r>
+            <a:r>
+              <a:rPr lang="en-US" altLang="zh-CN" sz="2100" b="1" i="0">
+                <a:solidFill>
+                  <a:srgbClr val="262626"/>
+                </a:solidFill>
+                <a:latin typeface="PingFang SC" panose="020B0400000000000000" charset="-122"/>
+                <a:ea typeface="PingFang SC" panose="020B0400000000000000" charset="-122"/>
+              </a:rPr>
+              <a:t>的非退化三角形</a:t>
+            </a:r>
+            <a:r>
+              <a:rPr lang="en-US" altLang="zh-CN" sz="2100" b="1">
+                <a:solidFill>
+                  <a:srgbClr val="262626"/>
+                </a:solidFill>
+                <a:latin typeface="PingFang SC" panose="020B0400000000000000" charset="-122"/>
+                <a:ea typeface="PingFang SC" panose="020B0400000000000000" charset="-122"/>
+                <a:sym typeface="+mn-ea"/>
+              </a:rPr>
+              <a:t>⟺</a:t>
+            </a:r>
+            <a:r>
+              <a:rPr lang="en-US" altLang="zh-CN" sz="2100" b="1">
+                <a:solidFill>
+                  <a:srgbClr val="262626"/>
+                </a:solidFill>
+                <a:latin typeface="PingFang SC" panose="020B0400000000000000" charset="-122"/>
+                <a:ea typeface="PingFang SC" panose="020B0400000000000000" charset="-122"/>
+                <a:sym typeface="+mn-ea"/>
+              </a:rPr>
+              <a:t>(a, b) </a:t>
+            </a:r>
+            <a:r>
+              <a:rPr lang="zh-CN" altLang="en-US" sz="2100" b="1">
+                <a:solidFill>
+                  <a:srgbClr val="262626"/>
+                </a:solidFill>
+                <a:latin typeface="PingFang SC" panose="020B0400000000000000" charset="-122"/>
+                <a:ea typeface="PingFang SC" panose="020B0400000000000000" charset="-122"/>
+                <a:sym typeface="+mn-ea"/>
+              </a:rPr>
+              <a:t>至少存在</a:t>
+            </a:r>
+            <a:r>
+              <a:rPr lang="en-US" altLang="zh-CN" sz="2100" b="1">
+                <a:solidFill>
+                  <a:srgbClr val="262626"/>
+                </a:solidFill>
+                <a:latin typeface="PingFang SC" panose="020B0400000000000000" charset="-122"/>
+                <a:ea typeface="PingFang SC" panose="020B0400000000000000" charset="-122"/>
+                <a:sym typeface="+mn-ea"/>
+              </a:rPr>
+              <a:t>一位“11”</a:t>
+            </a:r>
+            <a:r>
+              <a:rPr lang="zh-CN" altLang="en-US" sz="2100" b="1">
+                <a:solidFill>
+                  <a:srgbClr val="262626"/>
+                </a:solidFill>
+                <a:latin typeface="PingFang SC" panose="020B0400000000000000" charset="-122"/>
+                <a:ea typeface="PingFang SC" panose="020B0400000000000000" charset="-122"/>
+                <a:sym typeface="+mn-ea"/>
+              </a:rPr>
+              <a:t>、</a:t>
+            </a:r>
+            <a:r>
+              <a:rPr lang="en-US" altLang="zh-CN" sz="2100" b="1">
+                <a:solidFill>
+                  <a:srgbClr val="262626"/>
+                </a:solidFill>
+                <a:latin typeface="PingFang SC" panose="020B0400000000000000" charset="-122"/>
+                <a:ea typeface="PingFang SC" panose="020B0400000000000000" charset="-122"/>
+                <a:sym typeface="+mn-ea"/>
+              </a:rPr>
+              <a:t>一位“01”</a:t>
+            </a:r>
+            <a:r>
+              <a:rPr lang="zh-CN" altLang="en-US" sz="2100" b="1">
+                <a:solidFill>
+                  <a:srgbClr val="262626"/>
+                </a:solidFill>
+                <a:latin typeface="PingFang SC" panose="020B0400000000000000" charset="-122"/>
+                <a:ea typeface="PingFang SC" panose="020B0400000000000000" charset="-122"/>
+                <a:sym typeface="+mn-ea"/>
+              </a:rPr>
+              <a:t>和</a:t>
+            </a:r>
+            <a:r>
+              <a:rPr lang="en-US" altLang="zh-CN" sz="2100" b="1">
+                <a:solidFill>
+                  <a:srgbClr val="262626"/>
+                </a:solidFill>
+                <a:latin typeface="PingFang SC" panose="020B0400000000000000" charset="-122"/>
+                <a:ea typeface="PingFang SC" panose="020B0400000000000000" charset="-122"/>
+                <a:sym typeface="+mn-ea"/>
+              </a:rPr>
+              <a:t>一位“10”</a:t>
+            </a:r>
+            <a:endParaRPr lang="zh-CN" altLang="en-US" sz="2100" b="1">
               <a:solidFill>
                 <a:srgbClr val="262626"/>
               </a:solidFill>
               <a:latin typeface="PingFang SC" panose="020B0400000000000000" charset="-122"/>
               <a:ea typeface="PingFang SC" panose="020B0400000000000000" charset="-122"/>
+              <a:sym typeface="+mn-ea"/>
             </a:endParaRPr>
           </a:p>
         </p:txBody>
       </p:sp>
       <p:sp>
         <p:nvSpPr>
-          <p:cNvPr id="14" name="TextBox 13"/>
+          <p:cNvPr id="25" name="TextBox 24"/>
           <p:cNvSpPr txBox="1"/>
           <p:nvPr/>
         </p:nvSpPr>
@@ -13057,47 +13726,7 @@
                 <a:latin typeface="PingFang SC" panose="020B0400000000000000" charset="-122"/>
                 <a:ea typeface="PingFang SC" panose="020B0400000000000000" charset="-122"/>
               </a:rPr>
-              <a:t>计数 ①：|E₁| = 3</a:t>
-            </a:r>
-            <a:r>
-              <a:rPr sz="2700" b="1" i="0" baseline="30000">
-                <a:solidFill>
-                  <a:srgbClr val="FFFFFF"/>
-                </a:solidFill>
-                <a:latin typeface="PingFang SC" panose="020B0400000000000000" charset="-122"/>
-                <a:ea typeface="PingFang SC" panose="020B0400000000000000" charset="-122"/>
-              </a:rPr>
-              <a:t>N</a:t>
-            </a:r>
-            <a:r>
-              <a:rPr sz="2700" b="1" i="0">
-                <a:solidFill>
-                  <a:srgbClr val="FFFFFF"/>
-                </a:solidFill>
-                <a:latin typeface="PingFang SC" panose="020B0400000000000000" charset="-122"/>
-                <a:ea typeface="PingFang SC" panose="020B0400000000000000" charset="-122"/>
-              </a:rPr>
-              <a:t> − 2</a:t>
-            </a:r>
-            <a:r>
-              <a:rPr sz="2700" b="1" i="0" baseline="30000">
-                <a:solidFill>
-                  <a:srgbClr val="FFFFFF"/>
-                </a:solidFill>
-                <a:latin typeface="PingFang SC" panose="020B0400000000000000" charset="-122"/>
-                <a:ea typeface="PingFang SC" panose="020B0400000000000000" charset="-122"/>
-              </a:rPr>
-              <a:t>N+1</a:t>
-            </a:r>
-            <a:r>
-              <a:rPr sz="2700" b="1" i="0">
-                <a:solidFill>
-                  <a:srgbClr val="FFFFFF"/>
-                </a:solidFill>
-                <a:latin typeface="PingFang SC" panose="020B0400000000000000" charset="-122"/>
-                <a:ea typeface="PingFang SC" panose="020B0400000000000000" charset="-122"/>
-              </a:rPr>
-              <a:t> + 1</a:t>
+              <a:t>容斥框架</a:t>
             </a:r>
             <a:endParaRPr sz="2700" b="1" i="0">
               <a:solidFill>
@@ -13162,6 +13791,530 @@
         <p:spPr>
           <a:xfrm>
             <a:off x="548640" y="1234440"/>
+            <a:ext cx="11155680" cy="346710"/>
+          </a:xfrm>
+          <a:prstGeom prst="rect">
+            <a:avLst/>
+          </a:prstGeom>
+          <a:noFill/>
+        </p:spPr>
+        <p:txBody>
+          <a:bodyPr wrap="square" lIns="54864" tIns="27432" rIns="54864" bIns="27432">
+            <a:spAutoFit/>
+          </a:bodyPr>
+          <a:lstStyle/>
+          <a:p>
+            <a:pPr algn="l"/>
+            <a:r>
+              <a:rPr sz="1900" b="0" i="0">
+                <a:solidFill>
+                  <a:srgbClr val="262626"/>
+                </a:solidFill>
+                <a:latin typeface="PingFang SC" panose="020B0400000000000000" charset="-122"/>
+                <a:ea typeface="PingFang SC" panose="020B0400000000000000" charset="-122"/>
+              </a:rPr>
+              <a:t>把</a:t>
+            </a:r>
+            <a:r>
+              <a:rPr lang="zh-CN" sz="1900" b="0" i="0">
+                <a:solidFill>
+                  <a:srgbClr val="262626"/>
+                </a:solidFill>
+                <a:latin typeface="PingFang SC" panose="020B0400000000000000" charset="-122"/>
+                <a:ea typeface="PingFang SC" panose="020B0400000000000000" charset="-122"/>
+              </a:rPr>
+              <a:t>上述</a:t>
+            </a:r>
+            <a:r>
+              <a:rPr sz="1900" b="0" i="0">
+                <a:solidFill>
+                  <a:srgbClr val="262626"/>
+                </a:solidFill>
+                <a:latin typeface="PingFang SC" panose="020B0400000000000000" charset="-122"/>
+                <a:ea typeface="PingFang SC" panose="020B0400000000000000" charset="-122"/>
+              </a:rPr>
+              <a:t>三个“条件”定义为三个事件</a:t>
+            </a:r>
+            <a:r>
+              <a:rPr lang="zh-CN" sz="1900" b="0" i="0">
+                <a:solidFill>
+                  <a:srgbClr val="262626"/>
+                </a:solidFill>
+                <a:latin typeface="PingFang SC" panose="020B0400000000000000" charset="-122"/>
+                <a:ea typeface="PingFang SC" panose="020B0400000000000000" charset="-122"/>
+              </a:rPr>
+              <a:t>：</a:t>
+            </a:r>
+            <a:endParaRPr lang="zh-CN" sz="1900" b="0" i="0">
+              <a:solidFill>
+                <a:srgbClr val="262626"/>
+              </a:solidFill>
+              <a:latin typeface="PingFang SC" panose="020B0400000000000000" charset="-122"/>
+              <a:ea typeface="PingFang SC" panose="020B0400000000000000" charset="-122"/>
+            </a:endParaRPr>
+          </a:p>
+        </p:txBody>
+      </p:sp>
+      <p:sp>
+        <p:nvSpPr>
+          <p:cNvPr id="5" name="Rounded Rectangle 4"/>
+          <p:cNvSpPr/>
+          <p:nvPr/>
+        </p:nvSpPr>
+        <p:spPr>
+          <a:xfrm>
+            <a:off x="548640" y="1783080"/>
+            <a:ext cx="3566160" cy="1143000"/>
+          </a:xfrm>
+          <a:prstGeom prst="roundRect">
+            <a:avLst/>
+          </a:prstGeom>
+          <a:solidFill>
+            <a:srgbClr val="FCE4D6"/>
+          </a:solidFill>
+          <a:ln w="15240">
+            <a:solidFill>
+              <a:srgbClr val="C55A11"/>
+            </a:solidFill>
+          </a:ln>
+          <a:effectLst/>
+        </p:spPr>
+        <p:style>
+          <a:lnRef idx="1">
+            <a:schemeClr val="accent1"/>
+          </a:lnRef>
+          <a:fillRef idx="3">
+            <a:schemeClr val="accent1"/>
+          </a:fillRef>
+          <a:effectRef idx="2">
+            <a:schemeClr val="accent1"/>
+          </a:effectRef>
+          <a:fontRef idx="minor">
+            <a:schemeClr val="lt1"/>
+          </a:fontRef>
+        </p:style>
+        <p:txBody>
+          <a:bodyPr rtlCol="0" anchor="ctr"/>
+          <a:lstStyle/>
+          <a:p>
+            <a:pPr algn="ctr"/>
+          </a:p>
+        </p:txBody>
+      </p:sp>
+      <p:sp>
+        <p:nvSpPr>
+          <p:cNvPr id="6" name="TextBox 5"/>
+          <p:cNvSpPr txBox="1"/>
+          <p:nvPr/>
+        </p:nvSpPr>
+        <p:spPr>
+          <a:xfrm>
+            <a:off x="594360" y="1901952"/>
+            <a:ext cx="3474720" cy="914400"/>
+          </a:xfrm>
+          <a:prstGeom prst="rect">
+            <a:avLst/>
+          </a:prstGeom>
+          <a:noFill/>
+        </p:spPr>
+        <p:txBody>
+          <a:bodyPr wrap="square" lIns="54864" tIns="27432" rIns="54864" bIns="27432">
+            <a:spAutoFit/>
+          </a:bodyPr>
+          <a:lstStyle/>
+          <a:p>
+            <a:pPr algn="ctr"/>
+            <a:r>
+              <a:rPr sz="1900" b="1" i="0">
+                <a:solidFill>
+                  <a:srgbClr val="C55A11"/>
+                </a:solidFill>
+                <a:latin typeface="PingFang SC" panose="020B0400000000000000" charset="-122"/>
+                <a:ea typeface="PingFang SC" panose="020B0400000000000000" charset="-122"/>
+              </a:rPr>
+              <a:t>E₁ = { a &amp; b = 0 }</a:t>
+            </a:r>
+            <a:endParaRPr sz="1900" b="1" i="0">
+              <a:solidFill>
+                <a:srgbClr val="C55A11"/>
+              </a:solidFill>
+              <a:latin typeface="PingFang SC" panose="020B0400000000000000" charset="-122"/>
+              <a:ea typeface="PingFang SC" panose="020B0400000000000000" charset="-122"/>
+            </a:endParaRPr>
+          </a:p>
+        </p:txBody>
+      </p:sp>
+      <p:sp>
+        <p:nvSpPr>
+          <p:cNvPr id="7" name="Rounded Rectangle 6"/>
+          <p:cNvSpPr/>
+          <p:nvPr/>
+        </p:nvSpPr>
+        <p:spPr>
+          <a:xfrm>
+            <a:off x="4343400" y="1783080"/>
+            <a:ext cx="3566160" cy="1143000"/>
+          </a:xfrm>
+          <a:prstGeom prst="roundRect">
+            <a:avLst/>
+          </a:prstGeom>
+          <a:solidFill>
+            <a:srgbClr val="FCE4D6"/>
+          </a:solidFill>
+          <a:ln w="15240">
+            <a:solidFill>
+              <a:srgbClr val="C55A11"/>
+            </a:solidFill>
+          </a:ln>
+          <a:effectLst/>
+        </p:spPr>
+        <p:style>
+          <a:lnRef idx="1">
+            <a:schemeClr val="accent1"/>
+          </a:lnRef>
+          <a:fillRef idx="3">
+            <a:schemeClr val="accent1"/>
+          </a:fillRef>
+          <a:effectRef idx="2">
+            <a:schemeClr val="accent1"/>
+          </a:effectRef>
+          <a:fontRef idx="minor">
+            <a:schemeClr val="lt1"/>
+          </a:fontRef>
+        </p:style>
+        <p:txBody>
+          <a:bodyPr rtlCol="0" anchor="ctr"/>
+          <a:lstStyle/>
+          <a:p>
+            <a:pPr algn="ctr"/>
+          </a:p>
+        </p:txBody>
+      </p:sp>
+      <p:sp>
+        <p:nvSpPr>
+          <p:cNvPr id="8" name="TextBox 7"/>
+          <p:cNvSpPr txBox="1"/>
+          <p:nvPr/>
+        </p:nvSpPr>
+        <p:spPr>
+          <a:xfrm>
+            <a:off x="4389120" y="1901952"/>
+            <a:ext cx="3474720" cy="546735"/>
+          </a:xfrm>
+          <a:prstGeom prst="rect">
+            <a:avLst/>
+          </a:prstGeom>
+          <a:noFill/>
+        </p:spPr>
+        <p:txBody>
+          <a:bodyPr wrap="square" lIns="54864" tIns="27432" rIns="54864" bIns="27432">
+            <a:spAutoFit/>
+          </a:bodyPr>
+          <a:lstStyle/>
+          <a:p>
+            <a:pPr algn="ctr"/>
+            <a:r>
+              <a:rPr sz="1900" b="1" i="0">
+                <a:solidFill>
+                  <a:srgbClr val="C55A11"/>
+                </a:solidFill>
+                <a:latin typeface="PingFang SC" panose="020B0400000000000000" charset="-122"/>
+                <a:ea typeface="PingFang SC" panose="020B0400000000000000" charset="-122"/>
+              </a:rPr>
+              <a:t>E₂ = { b &amp; c = 0 }</a:t>
+            </a:r>
+            <a:endParaRPr sz="1900" b="1" i="0">
+              <a:solidFill>
+                <a:srgbClr val="C55A11"/>
+              </a:solidFill>
+              <a:latin typeface="PingFang SC" panose="020B0400000000000000" charset="-122"/>
+              <a:ea typeface="PingFang SC" panose="020B0400000000000000" charset="-122"/>
+            </a:endParaRPr>
+          </a:p>
+          <a:p>
+            <a:pPr algn="ctr"/>
+            <a:endParaRPr sz="1300" b="0" i="0">
+              <a:solidFill>
+                <a:srgbClr val="7F7F7F"/>
+              </a:solidFill>
+              <a:latin typeface="PingFang SC" panose="020B0400000000000000" charset="-122"/>
+              <a:ea typeface="PingFang SC" panose="020B0400000000000000" charset="-122"/>
+            </a:endParaRPr>
+          </a:p>
+        </p:txBody>
+      </p:sp>
+      <p:sp>
+        <p:nvSpPr>
+          <p:cNvPr id="9" name="Rounded Rectangle 8"/>
+          <p:cNvSpPr/>
+          <p:nvPr/>
+        </p:nvSpPr>
+        <p:spPr>
+          <a:xfrm>
+            <a:off x="8138160" y="1783080"/>
+            <a:ext cx="3566160" cy="1143000"/>
+          </a:xfrm>
+          <a:prstGeom prst="roundRect">
+            <a:avLst/>
+          </a:prstGeom>
+          <a:solidFill>
+            <a:srgbClr val="FCE4D6"/>
+          </a:solidFill>
+          <a:ln w="15240">
+            <a:solidFill>
+              <a:srgbClr val="C55A11"/>
+            </a:solidFill>
+          </a:ln>
+          <a:effectLst/>
+        </p:spPr>
+        <p:style>
+          <a:lnRef idx="1">
+            <a:schemeClr val="accent1"/>
+          </a:lnRef>
+          <a:fillRef idx="3">
+            <a:schemeClr val="accent1"/>
+          </a:fillRef>
+          <a:effectRef idx="2">
+            <a:schemeClr val="accent1"/>
+          </a:effectRef>
+          <a:fontRef idx="minor">
+            <a:schemeClr val="lt1"/>
+          </a:fontRef>
+        </p:style>
+        <p:txBody>
+          <a:bodyPr rtlCol="0" anchor="ctr"/>
+          <a:lstStyle/>
+          <a:p>
+            <a:pPr algn="ctr"/>
+          </a:p>
+        </p:txBody>
+      </p:sp>
+      <p:sp>
+        <p:nvSpPr>
+          <p:cNvPr id="10" name="TextBox 9"/>
+          <p:cNvSpPr txBox="1"/>
+          <p:nvPr/>
+        </p:nvSpPr>
+        <p:spPr>
+          <a:xfrm>
+            <a:off x="8183880" y="1901952"/>
+            <a:ext cx="3474720" cy="546735"/>
+          </a:xfrm>
+          <a:prstGeom prst="rect">
+            <a:avLst/>
+          </a:prstGeom>
+          <a:noFill/>
+        </p:spPr>
+        <p:txBody>
+          <a:bodyPr wrap="square" lIns="54864" tIns="27432" rIns="54864" bIns="27432">
+            <a:spAutoFit/>
+          </a:bodyPr>
+          <a:lstStyle/>
+          <a:p>
+            <a:pPr algn="ctr"/>
+            <a:r>
+              <a:rPr sz="1900" b="1" i="0">
+                <a:solidFill>
+                  <a:srgbClr val="C55A11"/>
+                </a:solidFill>
+                <a:latin typeface="PingFang SC" panose="020B0400000000000000" charset="-122"/>
+                <a:ea typeface="PingFang SC" panose="020B0400000000000000" charset="-122"/>
+              </a:rPr>
+              <a:t>E₃ = { a &amp; c = 0 }</a:t>
+            </a:r>
+            <a:endParaRPr sz="1900" b="1" i="0">
+              <a:solidFill>
+                <a:srgbClr val="C55A11"/>
+              </a:solidFill>
+              <a:latin typeface="PingFang SC" panose="020B0400000000000000" charset="-122"/>
+              <a:ea typeface="PingFang SC" panose="020B0400000000000000" charset="-122"/>
+            </a:endParaRPr>
+          </a:p>
+          <a:p>
+            <a:pPr algn="ctr"/>
+            <a:endParaRPr sz="1300" b="0" i="0">
+              <a:solidFill>
+                <a:srgbClr val="7F7F7F"/>
+              </a:solidFill>
+              <a:latin typeface="PingFang SC" panose="020B0400000000000000" charset="-122"/>
+              <a:ea typeface="PingFang SC" panose="020B0400000000000000" charset="-122"/>
+            </a:endParaRPr>
+          </a:p>
+        </p:txBody>
+      </p:sp>
+      <p:sp>
+        <p:nvSpPr>
+          <p:cNvPr id="11" name="TextBox 10"/>
+          <p:cNvSpPr txBox="1"/>
+          <p:nvPr/>
+        </p:nvSpPr>
+        <p:spPr>
+          <a:xfrm>
+            <a:off x="548640" y="3200400"/>
+            <a:ext cx="11155680" cy="346710"/>
+          </a:xfrm>
+          <a:prstGeom prst="rect">
+            <a:avLst/>
+          </a:prstGeom>
+          <a:noFill/>
+        </p:spPr>
+        <p:txBody>
+          <a:bodyPr wrap="square" lIns="54864" tIns="27432" rIns="54864" bIns="27432">
+            <a:spAutoFit/>
+          </a:bodyPr>
+          <a:lstStyle/>
+          <a:p>
+            <a:pPr indent="457200" algn="l"/>
+            <a:r>
+              <a:rPr sz="1900" b="0" i="0">
+                <a:solidFill>
+                  <a:srgbClr val="262626"/>
+                </a:solidFill>
+                <a:latin typeface="PingFang SC" panose="020B0400000000000000" charset="-122"/>
+                <a:ea typeface="PingFang SC" panose="020B0400000000000000" charset="-122"/>
+              </a:rPr>
+              <a:t>答案 = 全</a:t>
+            </a:r>
+            <a:r>
+              <a:rPr lang="zh-CN" sz="1900" b="0" i="0">
+                <a:solidFill>
+                  <a:srgbClr val="262626"/>
+                </a:solidFill>
+                <a:latin typeface="PingFang SC" panose="020B0400000000000000" charset="-122"/>
+                <a:ea typeface="PingFang SC" panose="020B0400000000000000" charset="-122"/>
+              </a:rPr>
+              <a:t>集</a:t>
+            </a:r>
+            <a:r>
+              <a:rPr sz="1900" b="0" i="0">
+                <a:solidFill>
+                  <a:srgbClr val="262626"/>
+                </a:solidFill>
+                <a:latin typeface="PingFang SC" panose="020B0400000000000000" charset="-122"/>
+                <a:ea typeface="PingFang SC" panose="020B0400000000000000" charset="-122"/>
+              </a:rPr>
+              <a:t> − </a:t>
+            </a:r>
+            <a:r>
+              <a:rPr lang="zh-CN" sz="1900" b="0" i="0">
+                <a:solidFill>
+                  <a:srgbClr val="262626"/>
+                </a:solidFill>
+                <a:latin typeface="PingFang SC" panose="020B0400000000000000" charset="-122"/>
+                <a:ea typeface="PingFang SC" panose="020B0400000000000000" charset="-122"/>
+              </a:rPr>
+              <a:t>三个</a:t>
+            </a:r>
+            <a:r>
+              <a:rPr sz="1900" b="0" i="0">
+                <a:solidFill>
+                  <a:srgbClr val="262626"/>
+                </a:solidFill>
+                <a:latin typeface="PingFang SC" panose="020B0400000000000000" charset="-122"/>
+                <a:ea typeface="PingFang SC" panose="020B0400000000000000" charset="-122"/>
+              </a:rPr>
+              <a:t>事件</a:t>
+            </a:r>
+            <a:r>
+              <a:rPr lang="zh-CN" sz="1900" b="0" i="0">
+                <a:solidFill>
+                  <a:srgbClr val="262626"/>
+                </a:solidFill>
+                <a:latin typeface="PingFang SC" panose="020B0400000000000000" charset="-122"/>
+                <a:ea typeface="PingFang SC" panose="020B0400000000000000" charset="-122"/>
+              </a:rPr>
+              <a:t>的</a:t>
+            </a:r>
+            <a:r>
+              <a:rPr sz="1900" b="0" i="0">
+                <a:solidFill>
+                  <a:srgbClr val="262626"/>
+                </a:solidFill>
+                <a:latin typeface="PingFang SC" panose="020B0400000000000000" charset="-122"/>
+                <a:ea typeface="PingFang SC" panose="020B0400000000000000" charset="-122"/>
+              </a:rPr>
+              <a:t>并集：</a:t>
+            </a:r>
+            <a:endParaRPr sz="1900" b="0" i="0">
+              <a:solidFill>
+                <a:srgbClr val="262626"/>
+              </a:solidFill>
+              <a:latin typeface="PingFang SC" panose="020B0400000000000000" charset="-122"/>
+              <a:ea typeface="PingFang SC" panose="020B0400000000000000" charset="-122"/>
+            </a:endParaRPr>
+          </a:p>
+        </p:txBody>
+      </p:sp>
+      <p:sp>
+        <p:nvSpPr>
+          <p:cNvPr id="12" name="Rounded Rectangle 11"/>
+          <p:cNvSpPr/>
+          <p:nvPr/>
+        </p:nvSpPr>
+        <p:spPr>
+          <a:xfrm>
+            <a:off x="822960" y="3794760"/>
+            <a:ext cx="10515600" cy="1005840"/>
+          </a:xfrm>
+          <a:prstGeom prst="roundRect">
+            <a:avLst/>
+          </a:prstGeom>
+          <a:solidFill>
+            <a:srgbClr val="DCE9F7"/>
+          </a:solidFill>
+          <a:ln>
+            <a:noFill/>
+          </a:ln>
+          <a:effectLst/>
+        </p:spPr>
+        <p:style>
+          <a:lnRef idx="1">
+            <a:schemeClr val="accent1"/>
+          </a:lnRef>
+          <a:fillRef idx="3">
+            <a:schemeClr val="accent1"/>
+          </a:fillRef>
+          <a:effectRef idx="2">
+            <a:schemeClr val="accent1"/>
+          </a:effectRef>
+          <a:fontRef idx="minor">
+            <a:schemeClr val="lt1"/>
+          </a:fontRef>
+        </p:style>
+        <p:txBody>
+          <a:bodyPr wrap="square" lIns="365760" rtlCol="0" anchor="ctr"/>
+          <a:lstStyle/>
+          <a:p>
+            <a:pPr algn="ctr"/>
+            <a:r>
+              <a:rPr sz="2600" b="1" i="0">
+                <a:solidFill>
+                  <a:srgbClr val="1F3864"/>
+                </a:solidFill>
+                <a:latin typeface="PingFang SC" panose="020B0400000000000000" charset="-122"/>
+                <a:ea typeface="PingFang SC" panose="020B0400000000000000" charset="-122"/>
+              </a:rPr>
+              <a:t>Ans = (2^N − 1)² − |E₁ ∪ E₂ ∪ E₃|</a:t>
+            </a:r>
+            <a:endParaRPr sz="2600" b="1" i="0">
+              <a:solidFill>
+                <a:srgbClr val="1F3864"/>
+              </a:solidFill>
+              <a:latin typeface="PingFang SC" panose="020B0400000000000000" charset="-122"/>
+              <a:ea typeface="PingFang SC" panose="020B0400000000000000" charset="-122"/>
+            </a:endParaRPr>
+          </a:p>
+        </p:txBody>
+      </p:sp>
+      <p:sp>
+        <p:nvSpPr>
+          <p:cNvPr id="13" name="TextBox 12"/>
+          <p:cNvSpPr txBox="1"/>
+          <p:nvPr/>
+        </p:nvSpPr>
+        <p:spPr>
+          <a:xfrm>
+            <a:off x="548640" y="5166360"/>
             <a:ext cx="11155680" cy="457200"/>
           </a:xfrm>
           <a:prstGeom prst="rect">
@@ -13184,47 +14337,7 @@
                 <a:latin typeface="PingFang SC" panose="020B0400000000000000" charset="-122"/>
                 <a:ea typeface="PingFang SC" panose="020B0400000000000000" charset="-122"/>
               </a:rPr>
-              <a:t>目标：</a:t>
-            </a:r>
-            <a:r>
-              <a:rPr sz="1900" b="1" i="0">
-                <a:solidFill>
-                  <a:srgbClr val="2E75B6"/>
-                </a:solidFill>
-                <a:latin typeface="PingFang SC" panose="020B0400000000000000" charset="-122"/>
-                <a:ea typeface="PingFang SC" panose="020B0400000000000000" charset="-122"/>
-              </a:rPr>
-              <a:t>a &amp; b = 0</a:t>
-            </a:r>
-            <a:r>
-              <a:rPr sz="1900" b="0" i="0">
-                <a:solidFill>
-                  <a:srgbClr val="262626"/>
-                </a:solidFill>
-                <a:latin typeface="PingFang SC" panose="020B0400000000000000" charset="-122"/>
-                <a:ea typeface="PingFang SC" panose="020B0400000000000000" charset="-122"/>
-              </a:rPr>
-              <a:t> 的对数（a, b ∈ [1, 2</a:t>
-            </a:r>
-            <a:r>
-              <a:rPr sz="1900" b="0" i="0" baseline="30000">
-                <a:solidFill>
-                  <a:srgbClr val="262626"/>
-                </a:solidFill>
-                <a:latin typeface="PingFang SC" panose="020B0400000000000000" charset="-122"/>
-                <a:ea typeface="PingFang SC" panose="020B0400000000000000" charset="-122"/>
-              </a:rPr>
-              <a:t>N</a:t>
-            </a:r>
-            <a:r>
-              <a:rPr sz="1900" b="0" i="0">
-                <a:solidFill>
-                  <a:srgbClr val="262626"/>
-                </a:solidFill>
-                <a:latin typeface="PingFang SC" panose="020B0400000000000000" charset="-122"/>
-                <a:ea typeface="PingFang SC" panose="020B0400000000000000" charset="-122"/>
-              </a:rPr>
-              <a:t>)）</a:t>
+              <a:t>下面逐个计算 |E₁|、|E₂|、|E₃| 与两两交集。</a:t>
             </a:r>
             <a:endParaRPr sz="1900" b="0" i="0">
               <a:solidFill>
@@ -13238,14 +14351,14 @@
       </p:sp>
       <p:sp>
         <p:nvSpPr>
-          <p:cNvPr id="5" name="TextBox 4"/>
+          <p:cNvPr id="14" name="TextBox 13"/>
           <p:cNvSpPr txBox="1"/>
           <p:nvPr/>
         </p:nvSpPr>
         <p:spPr>
           <a:xfrm>
-            <a:off x="822960" y="1828800"/>
-            <a:ext cx="10515600" cy="3108960"/>
+            <a:off x="9966960" y="6473952"/>
+            <a:ext cx="1737360" cy="320040"/>
           </a:xfrm>
           <a:prstGeom prst="rect">
             <a:avLst/>
@@ -13258,6 +14371,285 @@
           </a:bodyPr>
           <a:lstStyle/>
           <a:p>
+            <a:pPr algn="r"/>
+            <a:r>
+              <a:rPr sz="1100" b="0" i="0">
+                <a:solidFill>
+                  <a:srgbClr val="7F7F7F"/>
+                </a:solidFill>
+                <a:latin typeface="PingFang SC" panose="020B0400000000000000" charset="-122"/>
+                <a:ea typeface="PingFang SC" panose="020B0400000000000000" charset="-122"/>
+              </a:rPr>
+              <a:t>O. Xor Triangle · 5 / 12</a:t>
+            </a:r>
+            <a:endParaRPr sz="1100" b="0" i="0">
+              <a:solidFill>
+                <a:srgbClr val="7F7F7F"/>
+              </a:solidFill>
+              <a:latin typeface="PingFang SC" panose="020B0400000000000000" charset="-122"/>
+              <a:ea typeface="PingFang SC" panose="020B0400000000000000" charset="-122"/>
+            </a:endParaRPr>
+          </a:p>
+        </p:txBody>
+      </p:sp>
+    </p:spTree>
+  </p:cSld>
+  <p:clrMapOvr>
+    <a:masterClrMapping/>
+  </p:clrMapOvr>
+</p:sld>
+</file>
+
+<file path=ppt/slides/slide7.xml><?xml version="1.0" encoding="utf-8"?>
+<p:sld xmlns:a="http://schemas.openxmlformats.org/drawingml/2006/main" xmlns:r="http://schemas.openxmlformats.org/officeDocument/2006/relationships" xmlns:p="http://schemas.openxmlformats.org/presentationml/2006/main">
+  <p:cSld>
+    <p:spTree>
+      <p:nvGrpSpPr>
+        <p:cNvPr id="1" name=""/>
+        <p:cNvGrpSpPr/>
+        <p:nvPr/>
+      </p:nvGrpSpPr>
+      <p:grpSpPr/>
+      <p:sp>
+        <p:nvSpPr>
+          <p:cNvPr id="2" name="Rectangle 1"/>
+          <p:cNvSpPr/>
+          <p:nvPr/>
+        </p:nvSpPr>
+        <p:spPr>
+          <a:xfrm>
+            <a:off x="0" y="0"/>
+            <a:ext cx="12191695" cy="914400"/>
+          </a:xfrm>
+          <a:prstGeom prst="rect">
+            <a:avLst/>
+          </a:prstGeom>
+          <a:solidFill>
+            <a:srgbClr val="1F3864"/>
+          </a:solidFill>
+          <a:ln>
+            <a:noFill/>
+          </a:ln>
+          <a:effectLst/>
+        </p:spPr>
+        <p:style>
+          <a:lnRef idx="1">
+            <a:schemeClr val="accent1"/>
+          </a:lnRef>
+          <a:fillRef idx="3">
+            <a:schemeClr val="accent1"/>
+          </a:fillRef>
+          <a:effectRef idx="2">
+            <a:schemeClr val="accent1"/>
+          </a:effectRef>
+          <a:fontRef idx="minor">
+            <a:schemeClr val="lt1"/>
+          </a:fontRef>
+        </p:style>
+        <p:txBody>
+          <a:bodyPr lIns="502920" tIns="73152" rtlCol="0" anchor="ctr"/>
+          <a:lstStyle/>
+          <a:p>
+            <a:pPr algn="ctr"/>
+            <a:r>
+              <a:rPr sz="2700" b="1" i="0">
+                <a:solidFill>
+                  <a:srgbClr val="FFFFFF"/>
+                </a:solidFill>
+                <a:latin typeface="PingFang SC" panose="020B0400000000000000" charset="-122"/>
+                <a:ea typeface="PingFang SC" panose="020B0400000000000000" charset="-122"/>
+              </a:rPr>
+              <a:t>计数 ①：|E₁| = 3</a:t>
+            </a:r>
+            <a:r>
+              <a:rPr sz="2700" b="1" i="0" baseline="30000">
+                <a:solidFill>
+                  <a:srgbClr val="FFFFFF"/>
+                </a:solidFill>
+                <a:latin typeface="PingFang SC" panose="020B0400000000000000" charset="-122"/>
+                <a:ea typeface="PingFang SC" panose="020B0400000000000000" charset="-122"/>
+              </a:rPr>
+              <a:t>N</a:t>
+            </a:r>
+            <a:r>
+              <a:rPr sz="2700" b="1" i="0">
+                <a:solidFill>
+                  <a:srgbClr val="FFFFFF"/>
+                </a:solidFill>
+                <a:latin typeface="PingFang SC" panose="020B0400000000000000" charset="-122"/>
+                <a:ea typeface="PingFang SC" panose="020B0400000000000000" charset="-122"/>
+              </a:rPr>
+              <a:t> − 2</a:t>
+            </a:r>
+            <a:r>
+              <a:rPr sz="2700" b="1" i="0" baseline="30000">
+                <a:solidFill>
+                  <a:srgbClr val="FFFFFF"/>
+                </a:solidFill>
+                <a:latin typeface="PingFang SC" panose="020B0400000000000000" charset="-122"/>
+                <a:ea typeface="PingFang SC" panose="020B0400000000000000" charset="-122"/>
+              </a:rPr>
+              <a:t>N+1</a:t>
+            </a:r>
+            <a:r>
+              <a:rPr sz="2700" b="1" i="0">
+                <a:solidFill>
+                  <a:srgbClr val="FFFFFF"/>
+                </a:solidFill>
+                <a:latin typeface="PingFang SC" panose="020B0400000000000000" charset="-122"/>
+                <a:ea typeface="PingFang SC" panose="020B0400000000000000" charset="-122"/>
+              </a:rPr>
+              <a:t> + 1</a:t>
+            </a:r>
+            <a:endParaRPr sz="2700" b="1" i="0">
+              <a:solidFill>
+                <a:srgbClr val="FFFFFF"/>
+              </a:solidFill>
+              <a:latin typeface="PingFang SC" panose="020B0400000000000000" charset="-122"/>
+              <a:ea typeface="PingFang SC" panose="020B0400000000000000" charset="-122"/>
+            </a:endParaRPr>
+          </a:p>
+        </p:txBody>
+      </p:sp>
+      <p:sp>
+        <p:nvSpPr>
+          <p:cNvPr id="3" name="Rectangle 2"/>
+          <p:cNvSpPr/>
+          <p:nvPr/>
+        </p:nvSpPr>
+        <p:spPr>
+          <a:xfrm>
+            <a:off x="0" y="914400"/>
+            <a:ext cx="12191695" cy="41148"/>
+          </a:xfrm>
+          <a:prstGeom prst="rect">
+            <a:avLst/>
+          </a:prstGeom>
+          <a:solidFill>
+            <a:srgbClr val="C55A11"/>
+          </a:solidFill>
+          <a:ln>
+            <a:noFill/>
+          </a:ln>
+          <a:effectLst/>
+        </p:spPr>
+        <p:style>
+          <a:lnRef idx="1">
+            <a:schemeClr val="accent1"/>
+          </a:lnRef>
+          <a:fillRef idx="3">
+            <a:schemeClr val="accent1"/>
+          </a:fillRef>
+          <a:effectRef idx="2">
+            <a:schemeClr val="accent1"/>
+          </a:effectRef>
+          <a:fontRef idx="minor">
+            <a:schemeClr val="lt1"/>
+          </a:fontRef>
+        </p:style>
+        <p:txBody>
+          <a:bodyPr rtlCol="0" anchor="ctr"/>
+          <a:lstStyle/>
+          <a:p>
+            <a:pPr algn="ctr"/>
+          </a:p>
+        </p:txBody>
+      </p:sp>
+      <p:sp>
+        <p:nvSpPr>
+          <p:cNvPr id="4" name="TextBox 3"/>
+          <p:cNvSpPr txBox="1"/>
+          <p:nvPr/>
+        </p:nvSpPr>
+        <p:spPr>
+          <a:xfrm>
+            <a:off x="548640" y="1234440"/>
+            <a:ext cx="11155680" cy="346710"/>
+          </a:xfrm>
+          <a:prstGeom prst="rect">
+            <a:avLst/>
+          </a:prstGeom>
+          <a:noFill/>
+        </p:spPr>
+        <p:txBody>
+          <a:bodyPr wrap="square" lIns="54864" tIns="27432" rIns="54864" bIns="27432">
+            <a:spAutoFit/>
+          </a:bodyPr>
+          <a:lstStyle/>
+          <a:p>
+            <a:pPr algn="l"/>
+            <a:r>
+              <a:rPr sz="1900" b="0" i="0">
+                <a:solidFill>
+                  <a:srgbClr val="262626"/>
+                </a:solidFill>
+                <a:latin typeface="PingFang SC" panose="020B0400000000000000" charset="-122"/>
+                <a:ea typeface="PingFang SC" panose="020B0400000000000000" charset="-122"/>
+              </a:rPr>
+              <a:t>目标：</a:t>
+            </a:r>
+            <a:r>
+              <a:rPr lang="zh-CN" sz="1900" b="0" i="0">
+                <a:solidFill>
+                  <a:srgbClr val="262626"/>
+                </a:solidFill>
+                <a:latin typeface="PingFang SC" panose="020B0400000000000000" charset="-122"/>
+                <a:ea typeface="PingFang SC" panose="020B0400000000000000" charset="-122"/>
+              </a:rPr>
+              <a:t>求</a:t>
+            </a:r>
+            <a:r>
+              <a:rPr sz="1900" b="1" i="0">
+                <a:solidFill>
+                  <a:srgbClr val="2E75B6"/>
+                </a:solidFill>
+                <a:latin typeface="PingFang SC" panose="020B0400000000000000" charset="-122"/>
+                <a:ea typeface="PingFang SC" panose="020B0400000000000000" charset="-122"/>
+              </a:rPr>
+              <a:t>a &amp; b = 0</a:t>
+            </a:r>
+            <a:r>
+              <a:rPr sz="1900" b="0" i="0">
+                <a:solidFill>
+                  <a:srgbClr val="262626"/>
+                </a:solidFill>
+                <a:latin typeface="PingFang SC" panose="020B0400000000000000" charset="-122"/>
+                <a:ea typeface="PingFang SC" panose="020B0400000000000000" charset="-122"/>
+              </a:rPr>
+              <a:t> 的对数 —— 两个数没有任何一位“11”</a:t>
+            </a:r>
+            <a:endParaRPr sz="1900" b="0" i="0">
+              <a:solidFill>
+                <a:srgbClr val="262626"/>
+              </a:solidFill>
+              <a:latin typeface="PingFang SC" panose="020B0400000000000000" charset="-122"/>
+              <a:ea typeface="PingFang SC" panose="020B0400000000000000" charset="-122"/>
+            </a:endParaRPr>
+          </a:p>
+        </p:txBody>
+      </p:sp>
+      <p:sp>
+        <p:nvSpPr>
+          <p:cNvPr id="5" name="TextBox 4"/>
+          <p:cNvSpPr txBox="1"/>
+          <p:nvPr/>
+        </p:nvSpPr>
+        <p:spPr>
+          <a:xfrm>
+            <a:off x="822960" y="1828800"/>
+            <a:ext cx="10515600" cy="1383030"/>
+          </a:xfrm>
+          <a:prstGeom prst="rect">
+            <a:avLst/>
+          </a:prstGeom>
+          <a:noFill/>
+        </p:spPr>
+        <p:txBody>
+          <a:bodyPr wrap="square" lIns="54864" tIns="27432" rIns="54864" bIns="27432">
+            <a:spAutoFit/>
+          </a:bodyPr>
+          <a:lstStyle/>
+          <a:p>
             <a:pPr>
               <a:spcAft>
                 <a:spcPts val="1400"/>
@@ -13281,7 +14673,178 @@
                 <a:latin typeface="PingFang SC" panose="020B0400000000000000" charset="-122"/>
                 <a:ea typeface="PingFang SC" panose="020B0400000000000000" charset="-122"/>
               </a:rPr>
-              <a:t>每个 bit 三选一 { 只在 a / 只在 b / 都不在 } ⇒ </a:t>
+              <a:t>每个 bit </a:t>
+            </a:r>
+            <a:r>
+              <a:rPr lang="zh-CN" sz="2100" b="0" i="0">
+                <a:solidFill>
+                  <a:srgbClr val="262626"/>
+                </a:solidFill>
+                <a:latin typeface="PingFang SC" panose="020B0400000000000000" charset="-122"/>
+                <a:ea typeface="PingFang SC" panose="020B0400000000000000" charset="-122"/>
+              </a:rPr>
+              <a:t>只有三种取值情况：</a:t>
+            </a:r>
+            <a:r>
+              <a:rPr sz="2100" b="0" i="0">
+                <a:solidFill>
+                  <a:srgbClr val="262626"/>
+                </a:solidFill>
+                <a:latin typeface="PingFang SC" panose="020B0400000000000000" charset="-122"/>
+                <a:ea typeface="PingFang SC" panose="020B0400000000000000" charset="-122"/>
+              </a:rPr>
+              <a:t> </a:t>
+            </a:r>
+            <a:r>
+              <a:rPr sz="2100" b="1">
+                <a:solidFill>
+                  <a:srgbClr val="262626"/>
+                </a:solidFill>
+                <a:latin typeface="PingFang SC" panose="020B0400000000000000" charset="-122"/>
+                <a:ea typeface="PingFang SC" panose="020B0400000000000000" charset="-122"/>
+                <a:sym typeface="+mn-ea"/>
+              </a:rPr>
+              <a:t>“</a:t>
+            </a:r>
+            <a:r>
+              <a:rPr lang="en-US" sz="2100" b="1">
+                <a:solidFill>
+                  <a:srgbClr val="262626"/>
+                </a:solidFill>
+                <a:latin typeface="PingFang SC" panose="020B0400000000000000" charset="-122"/>
+                <a:ea typeface="PingFang SC" panose="020B0400000000000000" charset="-122"/>
+                <a:sym typeface="+mn-ea"/>
+              </a:rPr>
+              <a:t>00</a:t>
+            </a:r>
+            <a:r>
+              <a:rPr sz="2100" b="1">
+                <a:solidFill>
+                  <a:srgbClr val="262626"/>
+                </a:solidFill>
+                <a:latin typeface="PingFang SC" panose="020B0400000000000000" charset="-122"/>
+                <a:ea typeface="PingFang SC" panose="020B0400000000000000" charset="-122"/>
+                <a:sym typeface="+mn-ea"/>
+              </a:rPr>
+              <a:t>”</a:t>
+            </a:r>
+            <a:r>
+              <a:rPr lang="zh-CN" sz="2100" b="1">
+                <a:solidFill>
+                  <a:srgbClr val="262626"/>
+                </a:solidFill>
+                <a:latin typeface="PingFang SC" panose="020B0400000000000000" charset="-122"/>
+                <a:ea typeface="PingFang SC" panose="020B0400000000000000" charset="-122"/>
+                <a:sym typeface="+mn-ea"/>
+              </a:rPr>
+              <a:t>、</a:t>
+            </a:r>
+            <a:r>
+              <a:rPr sz="2100" b="1">
+                <a:solidFill>
+                  <a:srgbClr val="262626"/>
+                </a:solidFill>
+                <a:latin typeface="PingFang SC" panose="020B0400000000000000" charset="-122"/>
+                <a:ea typeface="PingFang SC" panose="020B0400000000000000" charset="-122"/>
+                <a:sym typeface="+mn-ea"/>
+              </a:rPr>
+              <a:t>“</a:t>
+            </a:r>
+            <a:r>
+              <a:rPr lang="en-US" sz="2100" b="1">
+                <a:solidFill>
+                  <a:srgbClr val="262626"/>
+                </a:solidFill>
+                <a:latin typeface="PingFang SC" panose="020B0400000000000000" charset="-122"/>
+                <a:ea typeface="PingFang SC" panose="020B0400000000000000" charset="-122"/>
+                <a:sym typeface="+mn-ea"/>
+              </a:rPr>
+              <a:t>01</a:t>
+            </a:r>
+            <a:r>
+              <a:rPr sz="2100" b="1">
+                <a:solidFill>
+                  <a:srgbClr val="262626"/>
+                </a:solidFill>
+                <a:latin typeface="PingFang SC" panose="020B0400000000000000" charset="-122"/>
+                <a:ea typeface="PingFang SC" panose="020B0400000000000000" charset="-122"/>
+                <a:sym typeface="+mn-ea"/>
+              </a:rPr>
+              <a:t>”</a:t>
+            </a:r>
+            <a:r>
+              <a:rPr lang="zh-CN" sz="2100" b="1">
+                <a:solidFill>
+                  <a:srgbClr val="262626"/>
+                </a:solidFill>
+                <a:latin typeface="PingFang SC" panose="020B0400000000000000" charset="-122"/>
+                <a:ea typeface="PingFang SC" panose="020B0400000000000000" charset="-122"/>
+                <a:sym typeface="+mn-ea"/>
+              </a:rPr>
+              <a:t>、</a:t>
+            </a:r>
+            <a:r>
+              <a:rPr sz="2100" b="1">
+                <a:solidFill>
+                  <a:srgbClr val="262626"/>
+                </a:solidFill>
+                <a:latin typeface="PingFang SC" panose="020B0400000000000000" charset="-122"/>
+                <a:ea typeface="PingFang SC" panose="020B0400000000000000" charset="-122"/>
+                <a:sym typeface="+mn-ea"/>
+              </a:rPr>
+              <a:t>“</a:t>
+            </a:r>
+            <a:r>
+              <a:rPr lang="en-US" sz="2100" b="1">
+                <a:solidFill>
+                  <a:srgbClr val="262626"/>
+                </a:solidFill>
+                <a:latin typeface="PingFang SC" panose="020B0400000000000000" charset="-122"/>
+                <a:ea typeface="PingFang SC" panose="020B0400000000000000" charset="-122"/>
+                <a:sym typeface="+mn-ea"/>
+              </a:rPr>
+              <a:t>10</a:t>
+            </a:r>
+            <a:r>
+              <a:rPr sz="2100" b="1">
+                <a:solidFill>
+                  <a:srgbClr val="262626"/>
+                </a:solidFill>
+                <a:latin typeface="PingFang SC" panose="020B0400000000000000" charset="-122"/>
+                <a:ea typeface="PingFang SC" panose="020B0400000000000000" charset="-122"/>
+                <a:sym typeface="+mn-ea"/>
+              </a:rPr>
+              <a:t>”</a:t>
+            </a:r>
+            <a:r>
+              <a:rPr lang="zh-CN" sz="2100" b="0" i="0">
+                <a:solidFill>
+                  <a:srgbClr val="262626"/>
+                </a:solidFill>
+                <a:latin typeface="PingFang SC" panose="020B0400000000000000" charset="-122"/>
+                <a:ea typeface="PingFang SC" panose="020B0400000000000000" charset="-122"/>
+              </a:rPr>
+              <a:t>，考虑全部</a:t>
+            </a:r>
+            <a:r>
+              <a:rPr lang="en-US" altLang="zh-CN" sz="2100" b="0" i="0">
+                <a:solidFill>
+                  <a:srgbClr val="262626"/>
+                </a:solidFill>
+                <a:latin typeface="PingFang SC" panose="020B0400000000000000" charset="-122"/>
+                <a:ea typeface="PingFang SC" panose="020B0400000000000000" charset="-122"/>
+              </a:rPr>
+              <a:t>n</a:t>
+            </a:r>
+            <a:r>
+              <a:rPr lang="zh-CN" altLang="en-US" sz="2100" b="0" i="0">
+                <a:solidFill>
+                  <a:srgbClr val="262626"/>
+                </a:solidFill>
+                <a:latin typeface="PingFang SC" panose="020B0400000000000000" charset="-122"/>
+                <a:ea typeface="PingFang SC" panose="020B0400000000000000" charset="-122"/>
+              </a:rPr>
+              <a:t>位，共</a:t>
             </a:r>
             <a:r>
               <a:rPr sz="2100" b="1" i="0">
@@ -13291,7 +14854,17 @@
                 <a:latin typeface="PingFang SC" panose="020B0400000000000000" charset="-122"/>
                 <a:ea typeface="PingFang SC" panose="020B0400000000000000" charset="-122"/>
               </a:rPr>
-              <a:t>3^{N}</a:t>
+              <a:t>3^</a:t>
+            </a:r>
+            <a:r>
+              <a:rPr lang="en-US" sz="2100" b="1" i="0">
+                <a:solidFill>
+                  <a:srgbClr val="2E75B6"/>
+                </a:solidFill>
+                <a:latin typeface="PingFang SC" panose="020B0400000000000000" charset="-122"/>
+                <a:ea typeface="PingFang SC" panose="020B0400000000000000" charset="-122"/>
+              </a:rPr>
+              <a:t>n</a:t>
             </a:r>
             <a:r>
               <a:rPr sz="2100" b="0" i="0">
@@ -13301,7 +14874,17 @@
                 <a:latin typeface="PingFang SC" panose="020B0400000000000000" charset="-122"/>
                 <a:ea typeface="PingFang SC" panose="020B0400000000000000" charset="-122"/>
               </a:rPr>
-              <a:t> 种分配</a:t>
+              <a:t>种</a:t>
+            </a:r>
+            <a:r>
+              <a:rPr lang="zh-CN" sz="2100" b="0" i="0">
+                <a:solidFill>
+                  <a:srgbClr val="262626"/>
+                </a:solidFill>
+                <a:latin typeface="PingFang SC" panose="020B0400000000000000" charset="-122"/>
+                <a:ea typeface="PingFang SC" panose="020B0400000000000000" charset="-122"/>
+              </a:rPr>
+              <a:t>可能</a:t>
             </a:r>
             <a:endParaRPr sz="2100" b="0" i="0">
               <a:solidFill>
@@ -13355,27 +14938,7 @@
                 <a:latin typeface="PingFang SC" panose="020B0400000000000000" charset="-122"/>
                 <a:ea typeface="PingFang SC" panose="020B0400000000000000" charset="-122"/>
               </a:rPr>
-              <a:t>（每个 bit 都选“只在 b / 都不在”，2</a:t>
-            </a:r>
-            <a:r>
-              <a:rPr sz="2100" b="0" i="0" baseline="30000">
-                <a:solidFill>
-                  <a:srgbClr val="262626"/>
-                </a:solidFill>
-                <a:latin typeface="PingFang SC" panose="020B0400000000000000" charset="-122"/>
-                <a:ea typeface="PingFang SC" panose="020B0400000000000000" charset="-122"/>
-              </a:rPr>
-              <a:t>N</a:t>
-            </a:r>
-            <a:r>
-              <a:rPr sz="2100" b="0" i="0">
-                <a:solidFill>
-                  <a:srgbClr val="262626"/>
-                </a:solidFill>
-                <a:latin typeface="PingFang SC" panose="020B0400000000000000" charset="-122"/>
-                <a:ea typeface="PingFang SC" panose="020B0400000000000000" charset="-122"/>
-              </a:rPr>
-              <a:t> 种）、</a:t>
+              <a:t>、</a:t>
             </a:r>
             <a:r>
               <a:rPr sz="2100" b="1" i="0">
@@ -13386,36 +14949,6 @@
                 <a:ea typeface="PingFang SC" panose="020B0400000000000000" charset="-122"/>
               </a:rPr>
               <a:t>b = 0</a:t>
-            </a:r>
-            <a:r>
-              <a:rPr sz="2100" b="0" i="0">
-                <a:solidFill>
-                  <a:srgbClr val="262626"/>
-                </a:solidFill>
-                <a:latin typeface="PingFang SC" panose="020B0400000000000000" charset="-122"/>
-                <a:ea typeface="PingFang SC" panose="020B0400000000000000" charset="-122"/>
-              </a:rPr>
-              <a:t>（同理 2</a:t>
-            </a:r>
-            <a:r>
-              <a:rPr sz="2100" b="0" i="0" baseline="30000">
-                <a:solidFill>
-                  <a:srgbClr val="262626"/>
-                </a:solidFill>
-                <a:latin typeface="PingFang SC" panose="020B0400000000000000" charset="-122"/>
-                <a:ea typeface="PingFang SC" panose="020B0400000000000000" charset="-122"/>
-              </a:rPr>
-              <a:t>N</a:t>
-            </a:r>
-            <a:r>
-              <a:rPr sz="2100" b="0" i="0">
-                <a:solidFill>
-                  <a:srgbClr val="262626"/>
-                </a:solidFill>
-                <a:latin typeface="PingFang SC" panose="020B0400000000000000" charset="-122"/>
-                <a:ea typeface="PingFang SC" panose="020B0400000000000000" charset="-122"/>
-              </a:rPr>
-              <a:t> 种）</a:t>
             </a:r>
             <a:endParaRPr sz="2100" b="0" i="0">
               <a:solidFill>
@@ -13442,24 +14975,57 @@
               <a:t>▪ </a:t>
             </a:r>
             <a:r>
-              <a:rPr sz="2100" b="1" i="0">
+              <a:rPr sz="2100" i="0">
+                <a:solidFill>
+                  <a:srgbClr val="262626"/>
+                </a:solidFill>
+                <a:latin typeface="PingFang SC" panose="020B0400000000000000" charset="-122"/>
+                <a:ea typeface="PingFang SC" panose="020B0400000000000000" charset="-122"/>
+              </a:rPr>
+              <a:t>加回</a:t>
+            </a:r>
+            <a:r>
+              <a:rPr sz="2100" b="0" i="0">
+                <a:solidFill>
+                  <a:srgbClr val="262626"/>
+                </a:solidFill>
+                <a:latin typeface="PingFang SC" panose="020B0400000000000000" charset="-122"/>
+                <a:ea typeface="PingFang SC" panose="020B0400000000000000" charset="-122"/>
+              </a:rPr>
+              <a:t> </a:t>
+            </a:r>
+            <a:r>
+              <a:rPr sz="2100" b="1">
                 <a:solidFill>
                   <a:srgbClr val="2E75B6"/>
                 </a:solidFill>
                 <a:latin typeface="PingFang SC" panose="020B0400000000000000" charset="-122"/>
                 <a:ea typeface="PingFang SC" panose="020B0400000000000000" charset="-122"/>
-              </a:rPr>
-              <a:t>加回</a:t>
-            </a:r>
-            <a:r>
-              <a:rPr sz="2100" b="0" i="0">
+                <a:sym typeface="+mn-ea"/>
+              </a:rPr>
+              <a:t>a = 0</a:t>
+            </a:r>
+            <a:r>
+              <a:rPr sz="2100">
                 <a:solidFill>
                   <a:srgbClr val="262626"/>
                 </a:solidFill>
                 <a:latin typeface="PingFang SC" panose="020B0400000000000000" charset="-122"/>
                 <a:ea typeface="PingFang SC" panose="020B0400000000000000" charset="-122"/>
-              </a:rPr>
-              <a:t> a = b = 0：两边各挖了一次，多挖 1 种</a:t>
+                <a:sym typeface="+mn-ea"/>
+              </a:rPr>
+              <a:t>、</a:t>
+            </a:r>
+            <a:r>
+              <a:rPr sz="2100" b="1">
+                <a:solidFill>
+                  <a:srgbClr val="2E75B6"/>
+                </a:solidFill>
+                <a:latin typeface="PingFang SC" panose="020B0400000000000000" charset="-122"/>
+                <a:ea typeface="PingFang SC" panose="020B0400000000000000" charset="-122"/>
+                <a:sym typeface="+mn-ea"/>
+              </a:rPr>
+              <a:t>b = 0</a:t>
             </a:r>
             <a:endParaRPr sz="2100" b="0" i="0">
               <a:solidFill>
@@ -13563,7 +15129,7 @@
                 <a:latin typeface="PingFang SC" panose="020B0400000000000000" charset="-122"/>
                 <a:ea typeface="PingFang SC" panose="020B0400000000000000" charset="-122"/>
               </a:rPr>
-              <a:t>O. Xor Triangle · 5 / 12</a:t>
+              <a:t>O. Xor Triangle · 6 / 12</a:t>
             </a:r>
             <a:endParaRPr sz="1100" b="0" i="0">
               <a:solidFill>
@@ -13583,7 +15149,7 @@
 </p:sld>
 </file>
 
-<file path=ppt/slides/slide7.xml><?xml version="1.0" encoding="utf-8"?>
+<file path=ppt/slides/slide8.xml><?xml version="1.0" encoding="utf-8"?>
 <p:sld xmlns:a="http://schemas.openxmlformats.org/drawingml/2006/main" xmlns:r="http://schemas.openxmlformats.org/officeDocument/2006/relationships" xmlns:p="http://schemas.openxmlformats.org/presentationml/2006/main">
   <p:cSld>
     <p:spTree>
@@ -13769,7 +15335,7 @@
                 <a:latin typeface="PingFang SC" panose="020B0400000000000000" charset="-122"/>
                 <a:ea typeface="PingFang SC" panose="020B0400000000000000" charset="-122"/>
               </a:rPr>
-              <a:t>a ⊆ b</a:t>
+              <a:t>b ⊆ a</a:t>
             </a:r>
             <a:r>
               <a:rPr sz="1900" b="0" i="0">
@@ -13800,7 +15366,7 @@
         <p:spPr>
           <a:xfrm>
             <a:off x="822960" y="1828800"/>
-            <a:ext cx="10515600" cy="2651760"/>
+            <a:ext cx="10515600" cy="1383030"/>
           </a:xfrm>
           <a:prstGeom prst="rect">
             <a:avLst/>
@@ -13836,7 +15402,7 @@
                 <a:latin typeface="PingFang SC" panose="020B0400000000000000" charset="-122"/>
                 <a:ea typeface="PingFang SC" panose="020B0400000000000000" charset="-122"/>
               </a:rPr>
-              <a:t>每个 bit 只有三种合法状态 (aᵢ, bᵢ) ∈ { </a:t>
+              <a:t>每个 bit 只有三种合法状态 (bᵢ, aᵢ) ∈ { </a:t>
             </a:r>
             <a:r>
               <a:rPr sz="2100" b="1" i="0">
@@ -13920,7 +15486,7 @@
                 <a:latin typeface="PingFang SC" panose="020B0400000000000000" charset="-122"/>
                 <a:ea typeface="PingFang SC" panose="020B0400000000000000" charset="-122"/>
               </a:rPr>
-              <a:t>a = 0</a:t>
+              <a:t>b = 0</a:t>
             </a:r>
             <a:r>
               <a:rPr sz="2100" b="0" i="0">
@@ -13984,7 +15550,7 @@
                 <a:latin typeface="PingFang SC" panose="020B0400000000000000" charset="-122"/>
                 <a:ea typeface="PingFang SC" panose="020B0400000000000000" charset="-122"/>
               </a:rPr>
-              <a:t>注意：此时 b = 0 的情形</a:t>
+              <a:t>注意此时 a = 0 的情形</a:t>
             </a:r>
             <a:r>
               <a:rPr sz="2100" b="1" i="0">
@@ -13994,7 +15560,7 @@
                 <a:latin typeface="PingFang SC" panose="020B0400000000000000" charset="-122"/>
                 <a:ea typeface="PingFang SC" panose="020B0400000000000000" charset="-122"/>
               </a:rPr>
-              <a:t>已包含在 a = 0 里</a:t>
+              <a:t>已包含在 b = 0 里</a:t>
             </a:r>
             <a:r>
               <a:rPr sz="2100" b="0" i="0">
@@ -14119,6 +15685,16 @@
           <a:p>
             <a:pPr algn="ctr"/>
             <a:r>
+              <a:rPr lang="zh-CN" sz="1700" b="1" i="0">
+                <a:solidFill>
+                  <a:srgbClr val="C55A11"/>
+                </a:solidFill>
+                <a:latin typeface="PingFang SC" panose="020B0400000000000000" charset="-122"/>
+                <a:ea typeface="PingFang SC" panose="020B0400000000000000" charset="-122"/>
+              </a:rPr>
+              <a:t>注意</a:t>
+            </a:r>
+            <a:r>
               <a:rPr sz="1700" b="1" i="0">
                 <a:solidFill>
                   <a:srgbClr val="C55A11"/>
@@ -14126,7 +15702,7 @@
                 <a:latin typeface="PingFang SC" panose="020B0400000000000000" charset="-122"/>
                 <a:ea typeface="PingFang SC" panose="020B0400000000000000" charset="-122"/>
               </a:rPr>
-              <a:t>易错点：|E₂| ≠ |E₁|</a:t>
+              <a:t>|E₂| ≠ |E₁|</a:t>
             </a:r>
             <a:r>
               <a:rPr sz="1700" b="1" i="0">
@@ -14136,7 +15712,7 @@
                 <a:latin typeface="PingFang SC" panose="020B0400000000000000" charset="-122"/>
                 <a:ea typeface="PingFang SC" panose="020B0400000000000000" charset="-122"/>
               </a:rPr>
-              <a:t> —— 挖 0 时 E₁ 有交集要加回，E₂ 没有，两个集合天生不对称，别套模板</a:t>
+              <a:t> —— 挖 0 时 E₁ 有交集要加回，E₂ 没有</a:t>
             </a:r>
             <a:endParaRPr sz="1700" b="1" i="0">
               <a:solidFill>
@@ -14179,7 +15755,7 @@
                 <a:latin typeface="PingFang SC" panose="020B0400000000000000" charset="-122"/>
                 <a:ea typeface="PingFang SC" panose="020B0400000000000000" charset="-122"/>
               </a:rPr>
-              <a:t>O. Xor Triangle · 6 / 12</a:t>
+              <a:t>O. Xor Triangle · 7 / 12</a:t>
             </a:r>
             <a:endParaRPr sz="1100" b="0" i="0">
               <a:solidFill>
@@ -14199,7 +15775,7 @@
 </p:sld>
 </file>
 
-<file path=ppt/slides/slide8.xml><?xml version="1.0" encoding="utf-8"?>
+<file path=ppt/slides/slide9.xml><?xml version="1.0" encoding="utf-8"?>
 <p:sld xmlns:a="http://schemas.openxmlformats.org/drawingml/2006/main" xmlns:r="http://schemas.openxmlformats.org/officeDocument/2006/relationships" xmlns:p="http://schemas.openxmlformats.org/presentationml/2006/main">
   <p:cSld>
     <p:spTree>
@@ -14369,7 +15945,7 @@
                 <a:latin typeface="PingFang SC" panose="020B0400000000000000" charset="-122"/>
                 <a:ea typeface="PingFang SC" panose="020B0400000000000000" charset="-122"/>
               </a:rPr>
-              <a:t>：a &amp; b = 0 且 a ⊆ b ⇒ a = 0，与 a ≥ 1 矛盾；E₁ ∩ E₃、三元交同理</a:t>
+              <a:t>：a &amp; b = 0 且 b ⊆ a ⇒ b = 0，与 b ≥ 1 矛盾；E₁ ∩ E₃、三元交同理</a:t>
             </a:r>
             <a:endParaRPr sz="2100" b="0" i="0">
               <a:solidFill>
@@ -14413,7 +15989,7 @@
                 <a:latin typeface="PingFang SC" panose="020B0400000000000000" charset="-122"/>
                 <a:ea typeface="PingFang SC" panose="020B0400000000000000" charset="-122"/>
               </a:rPr>
-              <a:t>：a ⊆ b 且 b ⊆ a ⟺ a = b，共 2</a:t>
+              <a:t>：b ⊆ a 且 a ⊆ b ⟺ a = b，共 2</a:t>
             </a:r>
             <a:r>
               <a:rPr sz="2100" b="0" i="0" baseline="30000">
@@ -14523,486 +16099,6 @@
             <a:endParaRPr sz="2600" b="1" i="0">
               <a:solidFill>
                 <a:srgbClr val="1F3864"/>
-              </a:solidFill>
-              <a:latin typeface="PingFang SC" panose="020B0400000000000000" charset="-122"/>
-              <a:ea typeface="PingFang SC" panose="020B0400000000000000" charset="-122"/>
-            </a:endParaRPr>
-          </a:p>
-        </p:txBody>
-      </p:sp>
-      <p:sp>
-        <p:nvSpPr>
-          <p:cNvPr id="6" name="TextBox 5"/>
-          <p:cNvSpPr txBox="1"/>
-          <p:nvPr/>
-        </p:nvSpPr>
-        <p:spPr>
-          <a:xfrm>
-            <a:off x="9966960" y="6473952"/>
-            <a:ext cx="1737360" cy="320040"/>
-          </a:xfrm>
-          <a:prstGeom prst="rect">
-            <a:avLst/>
-          </a:prstGeom>
-          <a:noFill/>
-        </p:spPr>
-        <p:txBody>
-          <a:bodyPr wrap="square" lIns="54864" tIns="27432" rIns="54864" bIns="27432">
-            <a:spAutoFit/>
-          </a:bodyPr>
-          <a:lstStyle/>
-          <a:p>
-            <a:pPr algn="r"/>
-            <a:r>
-              <a:rPr sz="1100" b="0" i="0">
-                <a:solidFill>
-                  <a:srgbClr val="7F7F7F"/>
-                </a:solidFill>
-                <a:latin typeface="PingFang SC" panose="020B0400000000000000" charset="-122"/>
-                <a:ea typeface="PingFang SC" panose="020B0400000000000000" charset="-122"/>
-              </a:rPr>
-              <a:t>O. Xor Triangle · 7 / 12</a:t>
-            </a:r>
-            <a:endParaRPr sz="1100" b="0" i="0">
-              <a:solidFill>
-                <a:srgbClr val="7F7F7F"/>
-              </a:solidFill>
-              <a:latin typeface="PingFang SC" panose="020B0400000000000000" charset="-122"/>
-              <a:ea typeface="PingFang SC" panose="020B0400000000000000" charset="-122"/>
-            </a:endParaRPr>
-          </a:p>
-        </p:txBody>
-      </p:sp>
-    </p:spTree>
-  </p:cSld>
-  <p:clrMapOvr>
-    <a:masterClrMapping/>
-  </p:clrMapOvr>
-</p:sld>
-</file>
-
-<file path=ppt/slides/slide9.xml><?xml version="1.0" encoding="utf-8"?>
-<p:sld xmlns:a="http://schemas.openxmlformats.org/drawingml/2006/main" xmlns:r="http://schemas.openxmlformats.org/officeDocument/2006/relationships" xmlns:p="http://schemas.openxmlformats.org/presentationml/2006/main">
-  <p:cSld>
-    <p:spTree>
-      <p:nvGrpSpPr>
-        <p:cNvPr id="1" name=""/>
-        <p:cNvGrpSpPr/>
-        <p:nvPr/>
-      </p:nvGrpSpPr>
-      <p:grpSpPr/>
-      <p:sp>
-        <p:nvSpPr>
-          <p:cNvPr id="2" name="Rectangle 1"/>
-          <p:cNvSpPr/>
-          <p:nvPr/>
-        </p:nvSpPr>
-        <p:spPr>
-          <a:xfrm>
-            <a:off x="0" y="0"/>
-            <a:ext cx="12191695" cy="914400"/>
-          </a:xfrm>
-          <a:prstGeom prst="rect">
-            <a:avLst/>
-          </a:prstGeom>
-          <a:solidFill>
-            <a:srgbClr val="1F3864"/>
-          </a:solidFill>
-          <a:ln>
-            <a:noFill/>
-          </a:ln>
-          <a:effectLst/>
-        </p:spPr>
-        <p:style>
-          <a:lnRef idx="1">
-            <a:schemeClr val="accent1"/>
-          </a:lnRef>
-          <a:fillRef idx="3">
-            <a:schemeClr val="accent1"/>
-          </a:fillRef>
-          <a:effectRef idx="2">
-            <a:schemeClr val="accent1"/>
-          </a:effectRef>
-          <a:fontRef idx="minor">
-            <a:schemeClr val="lt1"/>
-          </a:fontRef>
-        </p:style>
-        <p:txBody>
-          <a:bodyPr lIns="502920" tIns="73152" rtlCol="0" anchor="ctr"/>
-          <a:lstStyle/>
-          <a:p>
-            <a:pPr algn="ctr"/>
-            <a:r>
-              <a:rPr sz="2700" b="1" i="0">
-                <a:solidFill>
-                  <a:srgbClr val="FFFFFF"/>
-                </a:solidFill>
-                <a:latin typeface="PingFang SC" panose="020B0400000000000000" charset="-122"/>
-                <a:ea typeface="PingFang SC" panose="020B0400000000000000" charset="-122"/>
-              </a:rPr>
-              <a:t>最终公式与样例</a:t>
-            </a:r>
-            <a:endParaRPr sz="2700" b="1" i="0">
-              <a:solidFill>
-                <a:srgbClr val="FFFFFF"/>
-              </a:solidFill>
-              <a:latin typeface="PingFang SC" panose="020B0400000000000000" charset="-122"/>
-              <a:ea typeface="PingFang SC" panose="020B0400000000000000" charset="-122"/>
-            </a:endParaRPr>
-          </a:p>
-        </p:txBody>
-      </p:sp>
-      <p:sp>
-        <p:nvSpPr>
-          <p:cNvPr id="3" name="Rectangle 2"/>
-          <p:cNvSpPr/>
-          <p:nvPr/>
-        </p:nvSpPr>
-        <p:spPr>
-          <a:xfrm>
-            <a:off x="0" y="914400"/>
-            <a:ext cx="12191695" cy="41148"/>
-          </a:xfrm>
-          <a:prstGeom prst="rect">
-            <a:avLst/>
-          </a:prstGeom>
-          <a:solidFill>
-            <a:srgbClr val="C55A11"/>
-          </a:solidFill>
-          <a:ln>
-            <a:noFill/>
-          </a:ln>
-          <a:effectLst/>
-        </p:spPr>
-        <p:style>
-          <a:lnRef idx="1">
-            <a:schemeClr val="accent1"/>
-          </a:lnRef>
-          <a:fillRef idx="3">
-            <a:schemeClr val="accent1"/>
-          </a:fillRef>
-          <a:effectRef idx="2">
-            <a:schemeClr val="accent1"/>
-          </a:effectRef>
-          <a:fontRef idx="minor">
-            <a:schemeClr val="lt1"/>
-          </a:fontRef>
-        </p:style>
-        <p:txBody>
-          <a:bodyPr rtlCol="0" anchor="ctr"/>
-          <a:lstStyle/>
-          <a:p>
-            <a:pPr algn="ctr"/>
-          </a:p>
-        </p:txBody>
-      </p:sp>
-      <p:sp>
-        <p:nvSpPr>
-          <p:cNvPr id="4" name="Rounded Rectangle 3"/>
-          <p:cNvSpPr/>
-          <p:nvPr/>
-        </p:nvSpPr>
-        <p:spPr>
-          <a:xfrm>
-            <a:off x="822960" y="1325880"/>
-            <a:ext cx="10515600" cy="1280160"/>
-          </a:xfrm>
-          <a:prstGeom prst="roundRect">
-            <a:avLst/>
-          </a:prstGeom>
-          <a:solidFill>
-            <a:srgbClr val="DFECD8"/>
-          </a:solidFill>
-          <a:ln>
-            <a:noFill/>
-          </a:ln>
-          <a:effectLst/>
-        </p:spPr>
-        <p:style>
-          <a:lnRef idx="1">
-            <a:schemeClr val="accent1"/>
-          </a:lnRef>
-          <a:fillRef idx="3">
-            <a:schemeClr val="accent1"/>
-          </a:fillRef>
-          <a:effectRef idx="2">
-            <a:schemeClr val="accent1"/>
-          </a:effectRef>
-          <a:fontRef idx="minor">
-            <a:schemeClr val="lt1"/>
-          </a:fontRef>
-        </p:style>
-        <p:txBody>
-          <a:bodyPr wrap="square" lIns="365760" rtlCol="0" anchor="ctr"/>
-          <a:lstStyle/>
-          <a:p>
-            <a:pPr algn="ctr"/>
-            <a:r>
-              <a:rPr sz="3000" b="1" i="0">
-                <a:solidFill>
-                  <a:srgbClr val="538A4B"/>
-                </a:solidFill>
-                <a:latin typeface="PingFang SC" panose="020B0400000000000000" charset="-122"/>
-                <a:ea typeface="PingFang SC" panose="020B0400000000000000" charset="-122"/>
-              </a:rPr>
-              <a:t>Ans = 4^N − 3^(N+1) + 3·2^N − 1</a:t>
-            </a:r>
-            <a:endParaRPr sz="3000" b="1" i="0">
-              <a:solidFill>
-                <a:srgbClr val="538A4B"/>
-              </a:solidFill>
-              <a:latin typeface="PingFang SC" panose="020B0400000000000000" charset="-122"/>
-              <a:ea typeface="PingFang SC" panose="020B0400000000000000" charset="-122"/>
-            </a:endParaRPr>
-          </a:p>
-          <a:p>
-            <a:pPr algn="ctr">
-              <a:spcBef>
-                <a:spcPts val="600"/>
-              </a:spcBef>
-            </a:pPr>
-            <a:r>
-              <a:rPr sz="1600" b="0" i="0">
-                <a:solidFill>
-                  <a:srgbClr val="7F7F7F"/>
-                </a:solidFill>
-                <a:latin typeface="PingFang SC" panose="020B0400000000000000" charset="-122"/>
-                <a:ea typeface="PingFang SC" panose="020B0400000000000000" charset="-122"/>
-              </a:rPr>
-              <a:t>(4^N − 2^(N+1) + 1) − (3^(N+1) − 5·2^N + 2)　(mod 998244353)</a:t>
-            </a:r>
-            <a:endParaRPr sz="1600" b="0" i="0">
-              <a:solidFill>
-                <a:srgbClr val="7F7F7F"/>
-              </a:solidFill>
-              <a:latin typeface="PingFang SC" panose="020B0400000000000000" charset="-122"/>
-              <a:ea typeface="PingFang SC" panose="020B0400000000000000" charset="-122"/>
-            </a:endParaRPr>
-          </a:p>
-        </p:txBody>
-      </p:sp>
-      <p:sp>
-        <p:nvSpPr>
-          <p:cNvPr id="5" name="TextBox 4"/>
-          <p:cNvSpPr txBox="1"/>
-          <p:nvPr/>
-        </p:nvSpPr>
-        <p:spPr>
-          <a:xfrm>
-            <a:off x="822960" y="2971800"/>
-            <a:ext cx="10515600" cy="3108960"/>
-          </a:xfrm>
-          <a:prstGeom prst="rect">
-            <a:avLst/>
-          </a:prstGeom>
-          <a:noFill/>
-        </p:spPr>
-        <p:txBody>
-          <a:bodyPr wrap="square" lIns="54864" tIns="27432" rIns="54864" bIns="27432">
-            <a:spAutoFit/>
-          </a:bodyPr>
-          <a:lstStyle/>
-          <a:p>
-            <a:pPr>
-              <a:spcAft>
-                <a:spcPts val="1200"/>
-              </a:spcAft>
-            </a:pPr>
-            <a:r>
-              <a:rPr sz="2000" b="1" i="0">
-                <a:solidFill>
-                  <a:srgbClr val="2E75B6"/>
-                </a:solidFill>
-                <a:latin typeface="PingFang SC" panose="020B0400000000000000" charset="-122"/>
-                <a:ea typeface="PingFang SC" panose="020B0400000000000000" charset="-122"/>
-              </a:rPr>
-              <a:t>▪ </a:t>
-            </a:r>
-            <a:r>
-              <a:rPr sz="2000" b="0" i="0">
-                <a:solidFill>
-                  <a:srgbClr val="262626"/>
-                </a:solidFill>
-                <a:latin typeface="PingFang SC" panose="020B0400000000000000" charset="-122"/>
-                <a:ea typeface="PingFang SC" panose="020B0400000000000000" charset="-122"/>
-              </a:rPr>
-              <a:t>N = 2 → </a:t>
-            </a:r>
-            <a:r>
-              <a:rPr sz="2000" b="1" i="0">
-                <a:solidFill>
-                  <a:srgbClr val="2E75B6"/>
-                </a:solidFill>
-                <a:latin typeface="PingFang SC" panose="020B0400000000000000" charset="-122"/>
-                <a:ea typeface="PingFang SC" panose="020B0400000000000000" charset="-122"/>
-              </a:rPr>
-              <a:t>0</a:t>
-            </a:r>
-            <a:r>
-              <a:rPr sz="2000" b="0" i="0">
-                <a:solidFill>
-                  <a:srgbClr val="262626"/>
-                </a:solidFill>
-                <a:latin typeface="PingFang SC" panose="020B0400000000000000" charset="-122"/>
-                <a:ea typeface="PingFang SC" panose="020B0400000000000000" charset="-122"/>
-              </a:rPr>
-              <a:t>：{1, 2, 3} 共 9 对全部退化</a:t>
-            </a:r>
-            <a:endParaRPr sz="2000" b="0" i="0">
-              <a:solidFill>
-                <a:srgbClr val="262626"/>
-              </a:solidFill>
-              <a:latin typeface="PingFang SC" panose="020B0400000000000000" charset="-122"/>
-              <a:ea typeface="PingFang SC" panose="020B0400000000000000" charset="-122"/>
-            </a:endParaRPr>
-          </a:p>
-          <a:p>
-            <a:pPr>
-              <a:spcAft>
-                <a:spcPts val="1200"/>
-              </a:spcAft>
-            </a:pPr>
-            <a:r>
-              <a:rPr sz="2000" b="1" i="0">
-                <a:solidFill>
-                  <a:srgbClr val="2E75B6"/>
-                </a:solidFill>
-                <a:latin typeface="PingFang SC" panose="020B0400000000000000" charset="-122"/>
-                <a:ea typeface="PingFang SC" panose="020B0400000000000000" charset="-122"/>
-              </a:rPr>
-              <a:t>▪ </a:t>
-            </a:r>
-            <a:r>
-              <a:rPr sz="2000" b="0" i="0">
-                <a:solidFill>
-                  <a:srgbClr val="262626"/>
-                </a:solidFill>
-                <a:latin typeface="PingFang SC" panose="020B0400000000000000" charset="-122"/>
-                <a:ea typeface="PingFang SC" panose="020B0400000000000000" charset="-122"/>
-              </a:rPr>
-              <a:t>N = 5 → </a:t>
-            </a:r>
-            <a:r>
-              <a:rPr sz="2000" b="1" i="0">
-                <a:solidFill>
-                  <a:srgbClr val="2E75B6"/>
-                </a:solidFill>
-                <a:latin typeface="PingFang SC" panose="020B0400000000000000" charset="-122"/>
-                <a:ea typeface="PingFang SC" panose="020B0400000000000000" charset="-122"/>
-              </a:rPr>
-              <a:t>390</a:t>
-            </a:r>
-            <a:r>
-              <a:rPr sz="2000" b="0" i="0">
-                <a:solidFill>
-                  <a:srgbClr val="262626"/>
-                </a:solidFill>
-                <a:latin typeface="PingFang SC" panose="020B0400000000000000" charset="-122"/>
-                <a:ea typeface="PingFang SC" panose="020B0400000000000000" charset="-122"/>
-              </a:rPr>
-              <a:t>；例如 </a:t>
-            </a:r>
-            <a:r>
-              <a:rPr sz="2000" b="1" i="0">
-                <a:solidFill>
-                  <a:srgbClr val="2E75B6"/>
-                </a:solidFill>
-                <a:latin typeface="PingFang SC" panose="020B0400000000000000" charset="-122"/>
-                <a:ea typeface="PingFang SC" panose="020B0400000000000000" charset="-122"/>
-              </a:rPr>
-              <a:t>(13, 24)</a:t>
-            </a:r>
-            <a:r>
-              <a:rPr sz="2000" b="0" i="0">
-                <a:solidFill>
-                  <a:srgbClr val="262626"/>
-                </a:solidFill>
-                <a:latin typeface="PingFang SC" panose="020B0400000000000000" charset="-122"/>
-                <a:ea typeface="PingFang SC" panose="020B0400000000000000" charset="-122"/>
-              </a:rPr>
-              <a:t>：13 ⊕ 24 = 21，且 13+24 &gt; 21、13+21 &gt; 24、21+24 &gt; 13 ✓</a:t>
-            </a:r>
-            <a:endParaRPr sz="2000" b="0" i="0">
-              <a:solidFill>
-                <a:srgbClr val="262626"/>
-              </a:solidFill>
-              <a:latin typeface="PingFang SC" panose="020B0400000000000000" charset="-122"/>
-              <a:ea typeface="PingFang SC" panose="020B0400000000000000" charset="-122"/>
-            </a:endParaRPr>
-          </a:p>
-          <a:p>
-            <a:pPr>
-              <a:spcAft>
-                <a:spcPts val="1200"/>
-              </a:spcAft>
-            </a:pPr>
-            <a:r>
-              <a:rPr sz="2000" b="1" i="0">
-                <a:solidFill>
-                  <a:srgbClr val="2E75B6"/>
-                </a:solidFill>
-                <a:latin typeface="PingFang SC" panose="020B0400000000000000" charset="-122"/>
-                <a:ea typeface="PingFang SC" panose="020B0400000000000000" charset="-122"/>
-              </a:rPr>
-              <a:t>▪ </a:t>
-            </a:r>
-            <a:r>
-              <a:rPr sz="2000" b="0" i="0">
-                <a:solidFill>
-                  <a:srgbClr val="262626"/>
-                </a:solidFill>
-                <a:latin typeface="PingFang SC" panose="020B0400000000000000" charset="-122"/>
-                <a:ea typeface="PingFang SC" panose="020B0400000000000000" charset="-122"/>
-              </a:rPr>
-              <a:t>N = 10000 → </a:t>
-            </a:r>
-            <a:r>
-              <a:rPr sz="2000" b="1" i="0">
-                <a:solidFill>
-                  <a:srgbClr val="2E75B6"/>
-                </a:solidFill>
-                <a:latin typeface="PingFang SC" panose="020B0400000000000000" charset="-122"/>
-                <a:ea typeface="PingFang SC" panose="020B0400000000000000" charset="-122"/>
-              </a:rPr>
-              <a:t>851087540</a:t>
-            </a:r>
-            <a:endParaRPr sz="2000" b="1" i="0">
-              <a:solidFill>
-                <a:srgbClr val="2E75B6"/>
-              </a:solidFill>
-              <a:latin typeface="PingFang SC" panose="020B0400000000000000" charset="-122"/>
-              <a:ea typeface="PingFang SC" panose="020B0400000000000000" charset="-122"/>
-            </a:endParaRPr>
-          </a:p>
-          <a:p>
-            <a:pPr>
-              <a:spcAft>
-                <a:spcPts val="1200"/>
-              </a:spcAft>
-            </a:pPr>
-            <a:r>
-              <a:rPr sz="2000" b="1" i="0">
-                <a:solidFill>
-                  <a:srgbClr val="2E75B6"/>
-                </a:solidFill>
-                <a:latin typeface="PingFang SC" panose="020B0400000000000000" charset="-122"/>
-                <a:ea typeface="PingFang SC" panose="020B0400000000000000" charset="-122"/>
-              </a:rPr>
-              <a:t>▪ </a:t>
-            </a:r>
-            <a:r>
-              <a:rPr sz="2000" b="0" i="0">
-                <a:solidFill>
-                  <a:srgbClr val="262626"/>
-                </a:solidFill>
-                <a:latin typeface="PingFang SC" panose="020B0400000000000000" charset="-122"/>
-                <a:ea typeface="PingFang SC" panose="020B0400000000000000" charset="-122"/>
-              </a:rPr>
-              <a:t>三个样例与公式、与代码输出全部一致</a:t>
-            </a:r>
-            <a:endParaRPr sz="2000" b="0" i="0">
-              <a:solidFill>
-                <a:srgbClr val="262626"/>
               </a:solidFill>
               <a:latin typeface="PingFang SC" panose="020B0400000000000000" charset="-122"/>
               <a:ea typeface="PingFang SC" panose="020B0400000000000000" charset="-122"/>
